--- a/Documents/Diagrams for Dissertation/Tables of text responses.pptx
+++ b/Documents/Diagrams for Dissertation/Tables of text responses.pptx
@@ -11,6 +11,9 @@
     <p:sldId id="259" r:id="rId5"/>
     <p:sldId id="260" r:id="rId6"/>
     <p:sldId id="261" r:id="rId7"/>
+    <p:sldId id="262" r:id="rId8"/>
+    <p:sldId id="263" r:id="rId9"/>
+    <p:sldId id="264" r:id="rId10"/>
   </p:sldIdLst>
   <p:sldSz cx="12192000" cy="6858000"/>
   <p:notesSz cx="6858000" cy="9144000"/>
@@ -8698,14 +8701,14 @@
             <p:ph idx="1"/>
             <p:extLst>
               <p:ext uri="{D42A27DB-BD31-4B8C-83A1-F6EECF244321}">
-                <p14:modId xmlns:p14="http://schemas.microsoft.com/office/powerpoint/2010/main" val="2603478510"/>
+                <p14:modId xmlns:p14="http://schemas.microsoft.com/office/powerpoint/2010/main" val="4243443560"/>
               </p:ext>
             </p:extLst>
           </p:nvPr>
         </p:nvGraphicFramePr>
         <p:xfrm>
-          <a:off x="707571" y="649968"/>
-          <a:ext cx="10515600" cy="7589520"/>
+          <a:off x="-3109687" y="-584201"/>
+          <a:ext cx="14924320" cy="8026402"/>
         </p:xfrm>
         <a:graphic>
           <a:graphicData uri="http://schemas.openxmlformats.org/drawingml/2006/table">
@@ -8714,56 +8717,56 @@
                 <a:tableStyleId>{5C22544A-7EE6-4342-B048-85BDC9FD1C3A}</a:tableStyleId>
               </a:tblPr>
               <a:tblGrid>
-                <a:gridCol w="1314450">
+                <a:gridCol w="1865540">
                   <a:extLst>
                     <a:ext uri="{9D8B030D-6E8A-4147-A177-3AD203B41FA5}">
                       <a16:colId xmlns:a16="http://schemas.microsoft.com/office/drawing/2014/main" val="940649918"/>
                     </a:ext>
                   </a:extLst>
                 </a:gridCol>
-                <a:gridCol w="1314450">
+                <a:gridCol w="1865540">
                   <a:extLst>
                     <a:ext uri="{9D8B030D-6E8A-4147-A177-3AD203B41FA5}">
                       <a16:colId xmlns:a16="http://schemas.microsoft.com/office/drawing/2014/main" val="3850140298"/>
                     </a:ext>
                   </a:extLst>
                 </a:gridCol>
-                <a:gridCol w="1314450">
+                <a:gridCol w="1865540">
                   <a:extLst>
                     <a:ext uri="{9D8B030D-6E8A-4147-A177-3AD203B41FA5}">
                       <a16:colId xmlns:a16="http://schemas.microsoft.com/office/drawing/2014/main" val="7255999"/>
                     </a:ext>
                   </a:extLst>
                 </a:gridCol>
-                <a:gridCol w="1314450">
+                <a:gridCol w="1865540">
                   <a:extLst>
                     <a:ext uri="{9D8B030D-6E8A-4147-A177-3AD203B41FA5}">
                       <a16:colId xmlns:a16="http://schemas.microsoft.com/office/drawing/2014/main" val="2365742151"/>
                     </a:ext>
                   </a:extLst>
                 </a:gridCol>
-                <a:gridCol w="1314450">
+                <a:gridCol w="1865540">
                   <a:extLst>
                     <a:ext uri="{9D8B030D-6E8A-4147-A177-3AD203B41FA5}">
                       <a16:colId xmlns:a16="http://schemas.microsoft.com/office/drawing/2014/main" val="2384904596"/>
                     </a:ext>
                   </a:extLst>
                 </a:gridCol>
-                <a:gridCol w="1314450">
+                <a:gridCol w="1865540">
                   <a:extLst>
                     <a:ext uri="{9D8B030D-6E8A-4147-A177-3AD203B41FA5}">
                       <a16:colId xmlns:a16="http://schemas.microsoft.com/office/drawing/2014/main" val="3958249012"/>
                     </a:ext>
                   </a:extLst>
                 </a:gridCol>
-                <a:gridCol w="1314450">
+                <a:gridCol w="1865540">
                   <a:extLst>
                     <a:ext uri="{9D8B030D-6E8A-4147-A177-3AD203B41FA5}">
                       <a16:colId xmlns:a16="http://schemas.microsoft.com/office/drawing/2014/main" val="2023224839"/>
                     </a:ext>
                   </a:extLst>
                 </a:gridCol>
-                <a:gridCol w="1314450">
+                <a:gridCol w="1865540">
                   <a:extLst>
                     <a:ext uri="{9D8B030D-6E8A-4147-A177-3AD203B41FA5}">
                       <a16:colId xmlns:a16="http://schemas.microsoft.com/office/drawing/2014/main" val="4141436431"/>
@@ -8771,7 +8774,7 @@
                   </a:extLst>
                 </a:gridCol>
               </a:tblGrid>
-              <a:tr h="370840">
+              <a:tr h="967036">
                 <a:tc>
                   <a:txBody>
                     <a:bodyPr/>
@@ -8882,7 +8885,7 @@
                   </a:ext>
                 </a:extLst>
               </a:tr>
-              <a:tr h="370840">
+              <a:tr h="392187">
                 <a:tc>
                   <a:txBody>
                     <a:bodyPr/>
@@ -8993,7 +8996,7 @@
                   </a:ext>
                 </a:extLst>
               </a:tr>
-              <a:tr h="370840">
+              <a:tr h="392187">
                 <a:tc>
                   <a:txBody>
                     <a:bodyPr/>
@@ -9104,7 +9107,7 @@
                   </a:ext>
                 </a:extLst>
               </a:tr>
-              <a:tr h="370840">
+              <a:tr h="392187">
                 <a:tc>
                   <a:txBody>
                     <a:bodyPr/>
@@ -9215,7 +9218,7 @@
                   </a:ext>
                 </a:extLst>
               </a:tr>
-              <a:tr h="370840">
+              <a:tr h="392187">
                 <a:tc>
                   <a:txBody>
                     <a:bodyPr/>
@@ -9326,7 +9329,7 @@
                   </a:ext>
                 </a:extLst>
               </a:tr>
-              <a:tr h="370840">
+              <a:tr h="392187">
                 <a:tc>
                   <a:txBody>
                     <a:bodyPr/>
@@ -9437,7 +9440,7 @@
                   </a:ext>
                 </a:extLst>
               </a:tr>
-              <a:tr h="370840">
+              <a:tr h="392187">
                 <a:tc>
                   <a:txBody>
                     <a:bodyPr/>
@@ -9548,7 +9551,7 @@
                   </a:ext>
                 </a:extLst>
               </a:tr>
-              <a:tr h="370840">
+              <a:tr h="392187">
                 <a:tc>
                   <a:txBody>
                     <a:bodyPr/>
@@ -9659,7 +9662,7 @@
                   </a:ext>
                 </a:extLst>
               </a:tr>
-              <a:tr h="370840">
+              <a:tr h="392187">
                 <a:tc>
                   <a:txBody>
                     <a:bodyPr/>
@@ -9770,7 +9773,7 @@
                   </a:ext>
                 </a:extLst>
               </a:tr>
-              <a:tr h="370840">
+              <a:tr h="392187">
                 <a:tc>
                   <a:txBody>
                     <a:bodyPr/>
@@ -9881,7 +9884,7 @@
                   </a:ext>
                 </a:extLst>
               </a:tr>
-              <a:tr h="370840">
+              <a:tr h="392187">
                 <a:tc>
                   <a:txBody>
                     <a:bodyPr/>
@@ -9992,7 +9995,7 @@
                   </a:ext>
                 </a:extLst>
               </a:tr>
-              <a:tr h="370840">
+              <a:tr h="392187">
                 <a:tc>
                   <a:txBody>
                     <a:bodyPr/>
@@ -10103,7 +10106,7 @@
                   </a:ext>
                 </a:extLst>
               </a:tr>
-              <a:tr h="370840">
+              <a:tr h="392187">
                 <a:tc>
                   <a:txBody>
                     <a:bodyPr/>
@@ -10214,7 +10217,7 @@
                   </a:ext>
                 </a:extLst>
               </a:tr>
-              <a:tr h="370840">
+              <a:tr h="392187">
                 <a:tc>
                   <a:txBody>
                     <a:bodyPr/>
@@ -10325,7 +10328,7 @@
                   </a:ext>
                 </a:extLst>
               </a:tr>
-              <a:tr h="370840">
+              <a:tr h="392187">
                 <a:tc>
                   <a:txBody>
                     <a:bodyPr/>
@@ -10436,7 +10439,7 @@
                   </a:ext>
                 </a:extLst>
               </a:tr>
-              <a:tr h="370840">
+              <a:tr h="392187">
                 <a:tc>
                   <a:txBody>
                     <a:bodyPr/>
@@ -10547,7 +10550,7 @@
                   </a:ext>
                 </a:extLst>
               </a:tr>
-              <a:tr h="370840">
+              <a:tr h="392187">
                 <a:tc>
                   <a:txBody>
                     <a:bodyPr/>
@@ -10658,7 +10661,7 @@
                   </a:ext>
                 </a:extLst>
               </a:tr>
-              <a:tr h="370840">
+              <a:tr h="392187">
                 <a:tc>
                   <a:txBody>
                     <a:bodyPr/>
@@ -10769,7 +10772,7 @@
                   </a:ext>
                 </a:extLst>
               </a:tr>
-              <a:tr h="370840">
+              <a:tr h="392187">
                 <a:tc>
                   <a:txBody>
                     <a:bodyPr/>
@@ -10955,14 +10958,14 @@
             <p:ph idx="1"/>
             <p:extLst>
               <p:ext uri="{D42A27DB-BD31-4B8C-83A1-F6EECF244321}">
-                <p14:modId xmlns:p14="http://schemas.microsoft.com/office/powerpoint/2010/main" val="1724038907"/>
+                <p14:modId xmlns:p14="http://schemas.microsoft.com/office/powerpoint/2010/main" val="2993602101"/>
               </p:ext>
             </p:extLst>
           </p:nvPr>
         </p:nvGraphicFramePr>
         <p:xfrm>
-          <a:off x="112486" y="0"/>
-          <a:ext cx="10515596" cy="7589520"/>
+          <a:off x="-275771" y="0"/>
+          <a:ext cx="12932227" cy="7589520"/>
         </p:xfrm>
         <a:graphic>
           <a:graphicData uri="http://schemas.openxmlformats.org/drawingml/2006/table">
@@ -10971,49 +10974,49 @@
                 <a:tableStyleId>{5C22544A-7EE6-4342-B048-85BDC9FD1C3A}</a:tableStyleId>
               </a:tblPr>
               <a:tblGrid>
-                <a:gridCol w="1502228">
+                <a:gridCol w="1847461">
                   <a:extLst>
                     <a:ext uri="{9D8B030D-6E8A-4147-A177-3AD203B41FA5}">
                       <a16:colId xmlns:a16="http://schemas.microsoft.com/office/drawing/2014/main" val="3301535065"/>
                     </a:ext>
                   </a:extLst>
                 </a:gridCol>
-                <a:gridCol w="1502228">
+                <a:gridCol w="1847461">
                   <a:extLst>
                     <a:ext uri="{9D8B030D-6E8A-4147-A177-3AD203B41FA5}">
                       <a16:colId xmlns:a16="http://schemas.microsoft.com/office/drawing/2014/main" val="393007557"/>
                     </a:ext>
                   </a:extLst>
                 </a:gridCol>
-                <a:gridCol w="1502228">
+                <a:gridCol w="1847461">
                   <a:extLst>
                     <a:ext uri="{9D8B030D-6E8A-4147-A177-3AD203B41FA5}">
                       <a16:colId xmlns:a16="http://schemas.microsoft.com/office/drawing/2014/main" val="2286384413"/>
                     </a:ext>
                   </a:extLst>
                 </a:gridCol>
-                <a:gridCol w="1502228">
+                <a:gridCol w="1847461">
                   <a:extLst>
                     <a:ext uri="{9D8B030D-6E8A-4147-A177-3AD203B41FA5}">
                       <a16:colId xmlns:a16="http://schemas.microsoft.com/office/drawing/2014/main" val="2052890899"/>
                     </a:ext>
                   </a:extLst>
                 </a:gridCol>
-                <a:gridCol w="1502228">
+                <a:gridCol w="1847461">
                   <a:extLst>
                     <a:ext uri="{9D8B030D-6E8A-4147-A177-3AD203B41FA5}">
                       <a16:colId xmlns:a16="http://schemas.microsoft.com/office/drawing/2014/main" val="2668061030"/>
                     </a:ext>
                   </a:extLst>
                 </a:gridCol>
-                <a:gridCol w="1502228">
+                <a:gridCol w="1847461">
                   <a:extLst>
                     <a:ext uri="{9D8B030D-6E8A-4147-A177-3AD203B41FA5}">
                       <a16:colId xmlns:a16="http://schemas.microsoft.com/office/drawing/2014/main" val="1578013490"/>
                     </a:ext>
                   </a:extLst>
                 </a:gridCol>
-                <a:gridCol w="1502228">
+                <a:gridCol w="1847461">
                   <a:extLst>
                     <a:ext uri="{9D8B030D-6E8A-4147-A177-3AD203B41FA5}">
                       <a16:colId xmlns:a16="http://schemas.microsoft.com/office/drawing/2014/main" val="2979160422"/>
@@ -11107,7 +11110,7 @@
                     <a:p>
                       <a:r>
                         <a:rPr lang="en-GB"/>
-                        <a:t>Direction Change Chance</a:t>
+                        <a:t>Direction Change Chance (1 to 50)</a:t>
                       </a:r>
                     </a:p>
                   </a:txBody>
@@ -11125,67 +11128,88 @@
                     <a:bodyPr/>
                     <a:lstStyle/>
                     <a:p>
-                      <a:endParaRPr lang="en-GB"/>
-                    </a:p>
-                  </a:txBody>
-                  <a:tcPr/>
-                </a:tc>
-                <a:tc>
-                  <a:txBody>
-                    <a:bodyPr/>
-                    <a:lstStyle/>
-                    <a:p>
-                      <a:endParaRPr lang="en-GB"/>
-                    </a:p>
-                  </a:txBody>
-                  <a:tcPr/>
-                </a:tc>
-                <a:tc>
-                  <a:txBody>
-                    <a:bodyPr/>
-                    <a:lstStyle/>
-                    <a:p>
-                      <a:endParaRPr lang="en-GB"/>
-                    </a:p>
-                  </a:txBody>
-                  <a:tcPr/>
-                </a:tc>
-                <a:tc>
-                  <a:txBody>
-                    <a:bodyPr/>
-                    <a:lstStyle/>
-                    <a:p>
-                      <a:endParaRPr lang="en-GB"/>
-                    </a:p>
-                  </a:txBody>
-                  <a:tcPr/>
-                </a:tc>
-                <a:tc>
-                  <a:txBody>
-                    <a:bodyPr/>
-                    <a:lstStyle/>
-                    <a:p>
-                      <a:endParaRPr lang="en-GB"/>
-                    </a:p>
-                  </a:txBody>
-                  <a:tcPr/>
-                </a:tc>
-                <a:tc>
-                  <a:txBody>
-                    <a:bodyPr/>
-                    <a:lstStyle/>
-                    <a:p>
-                      <a:endParaRPr lang="en-GB"/>
-                    </a:p>
-                  </a:txBody>
-                  <a:tcPr/>
-                </a:tc>
-                <a:tc>
-                  <a:txBody>
-                    <a:bodyPr/>
-                    <a:lstStyle/>
-                    <a:p>
-                      <a:endParaRPr lang="en-GB"/>
+                      <a:r>
+                        <a:rPr lang="en-GB"/>
+                        <a:t>User 1</a:t>
+                      </a:r>
+                    </a:p>
+                  </a:txBody>
+                  <a:tcPr/>
+                </a:tc>
+                <a:tc>
+                  <a:txBody>
+                    <a:bodyPr/>
+                    <a:lstStyle/>
+                    <a:p>
+                      <a:r>
+                        <a:rPr lang="en-GB"/>
+                        <a:t>100</a:t>
+                      </a:r>
+                    </a:p>
+                  </a:txBody>
+                  <a:tcPr/>
+                </a:tc>
+                <a:tc>
+                  <a:txBody>
+                    <a:bodyPr/>
+                    <a:lstStyle/>
+                    <a:p>
+                      <a:r>
+                        <a:rPr lang="en-GB"/>
+                        <a:t>100</a:t>
+                      </a:r>
+                    </a:p>
+                  </a:txBody>
+                  <a:tcPr/>
+                </a:tc>
+                <a:tc>
+                  <a:txBody>
+                    <a:bodyPr/>
+                    <a:lstStyle/>
+                    <a:p>
+                      <a:r>
+                        <a:rPr lang="en-GB"/>
+                        <a:t>100</a:t>
+                      </a:r>
+                    </a:p>
+                  </a:txBody>
+                  <a:tcPr/>
+                </a:tc>
+                <a:tc>
+                  <a:txBody>
+                    <a:bodyPr/>
+                    <a:lstStyle/>
+                    <a:p>
+                      <a:r>
+                        <a:rPr lang="en-GB"/>
+                        <a:t>3</a:t>
+                      </a:r>
+                    </a:p>
+                  </a:txBody>
+                  <a:tcPr/>
+                </a:tc>
+                <a:tc>
+                  <a:txBody>
+                    <a:bodyPr/>
+                    <a:lstStyle/>
+                    <a:p>
+                      <a:r>
+                        <a:rPr lang="en-GB"/>
+                        <a:t>25</a:t>
+                      </a:r>
+                    </a:p>
+                  </a:txBody>
+                  <a:tcPr/>
+                </a:tc>
+                <a:tc>
+                  <a:txBody>
+                    <a:bodyPr/>
+                    <a:lstStyle/>
+                    <a:p>
+                      <a:r>
+                        <a:rPr lang="en-GB"/>
+                        <a:t>20</a:t>
+                      </a:r>
                     </a:p>
                   </a:txBody>
                   <a:tcPr/>
@@ -11202,67 +11226,88 @@
                     <a:bodyPr/>
                     <a:lstStyle/>
                     <a:p>
-                      <a:endParaRPr lang="en-GB"/>
-                    </a:p>
-                  </a:txBody>
-                  <a:tcPr/>
-                </a:tc>
-                <a:tc>
-                  <a:txBody>
-                    <a:bodyPr/>
-                    <a:lstStyle/>
-                    <a:p>
-                      <a:endParaRPr lang="en-GB"/>
-                    </a:p>
-                  </a:txBody>
-                  <a:tcPr/>
-                </a:tc>
-                <a:tc>
-                  <a:txBody>
-                    <a:bodyPr/>
-                    <a:lstStyle/>
-                    <a:p>
-                      <a:endParaRPr lang="en-GB"/>
-                    </a:p>
-                  </a:txBody>
-                  <a:tcPr/>
-                </a:tc>
-                <a:tc>
-                  <a:txBody>
-                    <a:bodyPr/>
-                    <a:lstStyle/>
-                    <a:p>
-                      <a:endParaRPr lang="en-GB"/>
-                    </a:p>
-                  </a:txBody>
-                  <a:tcPr/>
-                </a:tc>
-                <a:tc>
-                  <a:txBody>
-                    <a:bodyPr/>
-                    <a:lstStyle/>
-                    <a:p>
-                      <a:endParaRPr lang="en-GB"/>
-                    </a:p>
-                  </a:txBody>
-                  <a:tcPr/>
-                </a:tc>
-                <a:tc>
-                  <a:txBody>
-                    <a:bodyPr/>
-                    <a:lstStyle/>
-                    <a:p>
-                      <a:endParaRPr lang="en-GB"/>
-                    </a:p>
-                  </a:txBody>
-                  <a:tcPr/>
-                </a:tc>
-                <a:tc>
-                  <a:txBody>
-                    <a:bodyPr/>
-                    <a:lstStyle/>
-                    <a:p>
-                      <a:endParaRPr lang="en-GB"/>
+                      <a:r>
+                        <a:rPr lang="en-GB"/>
+                        <a:t>User 2</a:t>
+                      </a:r>
+                    </a:p>
+                  </a:txBody>
+                  <a:tcPr/>
+                </a:tc>
+                <a:tc>
+                  <a:txBody>
+                    <a:bodyPr/>
+                    <a:lstStyle/>
+                    <a:p>
+                      <a:r>
+                        <a:rPr lang="en-GB"/>
+                        <a:t>28</a:t>
+                      </a:r>
+                    </a:p>
+                  </a:txBody>
+                  <a:tcPr/>
+                </a:tc>
+                <a:tc>
+                  <a:txBody>
+                    <a:bodyPr/>
+                    <a:lstStyle/>
+                    <a:p>
+                      <a:r>
+                        <a:rPr lang="en-GB"/>
+                        <a:t>73</a:t>
+                      </a:r>
+                    </a:p>
+                  </a:txBody>
+                  <a:tcPr/>
+                </a:tc>
+                <a:tc>
+                  <a:txBody>
+                    <a:bodyPr/>
+                    <a:lstStyle/>
+                    <a:p>
+                      <a:r>
+                        <a:rPr lang="en-GB"/>
+                        <a:t>71</a:t>
+                      </a:r>
+                    </a:p>
+                  </a:txBody>
+                  <a:tcPr/>
+                </a:tc>
+                <a:tc>
+                  <a:txBody>
+                    <a:bodyPr/>
+                    <a:lstStyle/>
+                    <a:p>
+                      <a:r>
+                        <a:rPr lang="en-GB"/>
+                        <a:t>4</a:t>
+                      </a:r>
+                    </a:p>
+                  </a:txBody>
+                  <a:tcPr/>
+                </a:tc>
+                <a:tc>
+                  <a:txBody>
+                    <a:bodyPr/>
+                    <a:lstStyle/>
+                    <a:p>
+                      <a:r>
+                        <a:rPr lang="en-GB"/>
+                        <a:t>25</a:t>
+                      </a:r>
+                    </a:p>
+                  </a:txBody>
+                  <a:tcPr/>
+                </a:tc>
+                <a:tc>
+                  <a:txBody>
+                    <a:bodyPr/>
+                    <a:lstStyle/>
+                    <a:p>
+                      <a:r>
+                        <a:rPr lang="en-GB"/>
+                        <a:t>20</a:t>
+                      </a:r>
                     </a:p>
                   </a:txBody>
                   <a:tcPr/>
@@ -11279,67 +11324,88 @@
                     <a:bodyPr/>
                     <a:lstStyle/>
                     <a:p>
-                      <a:endParaRPr lang="en-GB"/>
-                    </a:p>
-                  </a:txBody>
-                  <a:tcPr/>
-                </a:tc>
-                <a:tc>
-                  <a:txBody>
-                    <a:bodyPr/>
-                    <a:lstStyle/>
-                    <a:p>
-                      <a:endParaRPr lang="en-GB"/>
-                    </a:p>
-                  </a:txBody>
-                  <a:tcPr/>
-                </a:tc>
-                <a:tc>
-                  <a:txBody>
-                    <a:bodyPr/>
-                    <a:lstStyle/>
-                    <a:p>
-                      <a:endParaRPr lang="en-GB"/>
-                    </a:p>
-                  </a:txBody>
-                  <a:tcPr/>
-                </a:tc>
-                <a:tc>
-                  <a:txBody>
-                    <a:bodyPr/>
-                    <a:lstStyle/>
-                    <a:p>
-                      <a:endParaRPr lang="en-GB"/>
-                    </a:p>
-                  </a:txBody>
-                  <a:tcPr/>
-                </a:tc>
-                <a:tc>
-                  <a:txBody>
-                    <a:bodyPr/>
-                    <a:lstStyle/>
-                    <a:p>
-                      <a:endParaRPr lang="en-GB"/>
-                    </a:p>
-                  </a:txBody>
-                  <a:tcPr/>
-                </a:tc>
-                <a:tc>
-                  <a:txBody>
-                    <a:bodyPr/>
-                    <a:lstStyle/>
-                    <a:p>
-                      <a:endParaRPr lang="en-GB"/>
-                    </a:p>
-                  </a:txBody>
-                  <a:tcPr/>
-                </a:tc>
-                <a:tc>
-                  <a:txBody>
-                    <a:bodyPr/>
-                    <a:lstStyle/>
-                    <a:p>
-                      <a:endParaRPr lang="en-GB"/>
+                      <a:r>
+                        <a:rPr lang="en-GB"/>
+                        <a:t>User 3</a:t>
+                      </a:r>
+                    </a:p>
+                  </a:txBody>
+                  <a:tcPr/>
+                </a:tc>
+                <a:tc>
+                  <a:txBody>
+                    <a:bodyPr/>
+                    <a:lstStyle/>
+                    <a:p>
+                      <a:r>
+                        <a:rPr lang="en-GB"/>
+                        <a:t>61</a:t>
+                      </a:r>
+                    </a:p>
+                  </a:txBody>
+                  <a:tcPr/>
+                </a:tc>
+                <a:tc>
+                  <a:txBody>
+                    <a:bodyPr/>
+                    <a:lstStyle/>
+                    <a:p>
+                      <a:r>
+                        <a:rPr lang="en-GB"/>
+                        <a:t>56</a:t>
+                      </a:r>
+                    </a:p>
+                  </a:txBody>
+                  <a:tcPr/>
+                </a:tc>
+                <a:tc>
+                  <a:txBody>
+                    <a:bodyPr/>
+                    <a:lstStyle/>
+                    <a:p>
+                      <a:r>
+                        <a:rPr lang="en-GB"/>
+                        <a:t>67</a:t>
+                      </a:r>
+                    </a:p>
+                  </a:txBody>
+                  <a:tcPr/>
+                </a:tc>
+                <a:tc>
+                  <a:txBody>
+                    <a:bodyPr/>
+                    <a:lstStyle/>
+                    <a:p>
+                      <a:r>
+                        <a:rPr lang="en-GB"/>
+                        <a:t>2</a:t>
+                      </a:r>
+                    </a:p>
+                  </a:txBody>
+                  <a:tcPr/>
+                </a:tc>
+                <a:tc>
+                  <a:txBody>
+                    <a:bodyPr/>
+                    <a:lstStyle/>
+                    <a:p>
+                      <a:r>
+                        <a:rPr lang="en-GB"/>
+                        <a:t>25</a:t>
+                      </a:r>
+                    </a:p>
+                  </a:txBody>
+                  <a:tcPr/>
+                </a:tc>
+                <a:tc>
+                  <a:txBody>
+                    <a:bodyPr/>
+                    <a:lstStyle/>
+                    <a:p>
+                      <a:r>
+                        <a:rPr lang="en-GB"/>
+                        <a:t>20</a:t>
+                      </a:r>
                     </a:p>
                   </a:txBody>
                   <a:tcPr/>
@@ -11356,67 +11422,88 @@
                     <a:bodyPr/>
                     <a:lstStyle/>
                     <a:p>
-                      <a:endParaRPr lang="en-GB"/>
-                    </a:p>
-                  </a:txBody>
-                  <a:tcPr/>
-                </a:tc>
-                <a:tc>
-                  <a:txBody>
-                    <a:bodyPr/>
-                    <a:lstStyle/>
-                    <a:p>
-                      <a:endParaRPr lang="en-GB"/>
-                    </a:p>
-                  </a:txBody>
-                  <a:tcPr/>
-                </a:tc>
-                <a:tc>
-                  <a:txBody>
-                    <a:bodyPr/>
-                    <a:lstStyle/>
-                    <a:p>
-                      <a:endParaRPr lang="en-GB"/>
-                    </a:p>
-                  </a:txBody>
-                  <a:tcPr/>
-                </a:tc>
-                <a:tc>
-                  <a:txBody>
-                    <a:bodyPr/>
-                    <a:lstStyle/>
-                    <a:p>
-                      <a:endParaRPr lang="en-GB"/>
-                    </a:p>
-                  </a:txBody>
-                  <a:tcPr/>
-                </a:tc>
-                <a:tc>
-                  <a:txBody>
-                    <a:bodyPr/>
-                    <a:lstStyle/>
-                    <a:p>
-                      <a:endParaRPr lang="en-GB"/>
-                    </a:p>
-                  </a:txBody>
-                  <a:tcPr/>
-                </a:tc>
-                <a:tc>
-                  <a:txBody>
-                    <a:bodyPr/>
-                    <a:lstStyle/>
-                    <a:p>
-                      <a:endParaRPr lang="en-GB"/>
-                    </a:p>
-                  </a:txBody>
-                  <a:tcPr/>
-                </a:tc>
-                <a:tc>
-                  <a:txBody>
-                    <a:bodyPr/>
-                    <a:lstStyle/>
-                    <a:p>
-                      <a:endParaRPr lang="en-GB"/>
+                      <a:r>
+                        <a:rPr lang="en-GB"/>
+                        <a:t>User 4</a:t>
+                      </a:r>
+                    </a:p>
+                  </a:txBody>
+                  <a:tcPr/>
+                </a:tc>
+                <a:tc>
+                  <a:txBody>
+                    <a:bodyPr/>
+                    <a:lstStyle/>
+                    <a:p>
+                      <a:r>
+                        <a:rPr lang="en-GB"/>
+                        <a:t>50</a:t>
+                      </a:r>
+                    </a:p>
+                  </a:txBody>
+                  <a:tcPr/>
+                </a:tc>
+                <a:tc>
+                  <a:txBody>
+                    <a:bodyPr/>
+                    <a:lstStyle/>
+                    <a:p>
+                      <a:r>
+                        <a:rPr lang="en-GB"/>
+                        <a:t>50</a:t>
+                      </a:r>
+                    </a:p>
+                  </a:txBody>
+                  <a:tcPr/>
+                </a:tc>
+                <a:tc>
+                  <a:txBody>
+                    <a:bodyPr/>
+                    <a:lstStyle/>
+                    <a:p>
+                      <a:r>
+                        <a:rPr lang="en-GB"/>
+                        <a:t>50</a:t>
+                      </a:r>
+                    </a:p>
+                  </a:txBody>
+                  <a:tcPr/>
+                </a:tc>
+                <a:tc>
+                  <a:txBody>
+                    <a:bodyPr/>
+                    <a:lstStyle/>
+                    <a:p>
+                      <a:r>
+                        <a:rPr lang="en-GB"/>
+                        <a:t>2</a:t>
+                      </a:r>
+                    </a:p>
+                  </a:txBody>
+                  <a:tcPr/>
+                </a:tc>
+                <a:tc>
+                  <a:txBody>
+                    <a:bodyPr/>
+                    <a:lstStyle/>
+                    <a:p>
+                      <a:r>
+                        <a:rPr lang="en-GB"/>
+                        <a:t>25</a:t>
+                      </a:r>
+                    </a:p>
+                  </a:txBody>
+                  <a:tcPr/>
+                </a:tc>
+                <a:tc>
+                  <a:txBody>
+                    <a:bodyPr/>
+                    <a:lstStyle/>
+                    <a:p>
+                      <a:r>
+                        <a:rPr lang="en-GB"/>
+                        <a:t>20</a:t>
+                      </a:r>
                     </a:p>
                   </a:txBody>
                   <a:tcPr/>
@@ -11433,67 +11520,88 @@
                     <a:bodyPr/>
                     <a:lstStyle/>
                     <a:p>
-                      <a:endParaRPr lang="en-GB"/>
-                    </a:p>
-                  </a:txBody>
-                  <a:tcPr/>
-                </a:tc>
-                <a:tc>
-                  <a:txBody>
-                    <a:bodyPr/>
-                    <a:lstStyle/>
-                    <a:p>
-                      <a:endParaRPr lang="en-GB"/>
-                    </a:p>
-                  </a:txBody>
-                  <a:tcPr/>
-                </a:tc>
-                <a:tc>
-                  <a:txBody>
-                    <a:bodyPr/>
-                    <a:lstStyle/>
-                    <a:p>
-                      <a:endParaRPr lang="en-GB"/>
-                    </a:p>
-                  </a:txBody>
-                  <a:tcPr/>
-                </a:tc>
-                <a:tc>
-                  <a:txBody>
-                    <a:bodyPr/>
-                    <a:lstStyle/>
-                    <a:p>
-                      <a:endParaRPr lang="en-GB"/>
-                    </a:p>
-                  </a:txBody>
-                  <a:tcPr/>
-                </a:tc>
-                <a:tc>
-                  <a:txBody>
-                    <a:bodyPr/>
-                    <a:lstStyle/>
-                    <a:p>
-                      <a:endParaRPr lang="en-GB"/>
-                    </a:p>
-                  </a:txBody>
-                  <a:tcPr/>
-                </a:tc>
-                <a:tc>
-                  <a:txBody>
-                    <a:bodyPr/>
-                    <a:lstStyle/>
-                    <a:p>
-                      <a:endParaRPr lang="en-GB"/>
-                    </a:p>
-                  </a:txBody>
-                  <a:tcPr/>
-                </a:tc>
-                <a:tc>
-                  <a:txBody>
-                    <a:bodyPr/>
-                    <a:lstStyle/>
-                    <a:p>
-                      <a:endParaRPr lang="en-GB"/>
+                      <a:r>
+                        <a:rPr lang="en-GB"/>
+                        <a:t>User 5</a:t>
+                      </a:r>
+                    </a:p>
+                  </a:txBody>
+                  <a:tcPr/>
+                </a:tc>
+                <a:tc>
+                  <a:txBody>
+                    <a:bodyPr/>
+                    <a:lstStyle/>
+                    <a:p>
+                      <a:r>
+                        <a:rPr lang="en-GB"/>
+                        <a:t>29</a:t>
+                      </a:r>
+                    </a:p>
+                  </a:txBody>
+                  <a:tcPr/>
+                </a:tc>
+                <a:tc>
+                  <a:txBody>
+                    <a:bodyPr/>
+                    <a:lstStyle/>
+                    <a:p>
+                      <a:r>
+                        <a:rPr lang="en-GB"/>
+                        <a:t>61</a:t>
+                      </a:r>
+                    </a:p>
+                  </a:txBody>
+                  <a:tcPr/>
+                </a:tc>
+                <a:tc>
+                  <a:txBody>
+                    <a:bodyPr/>
+                    <a:lstStyle/>
+                    <a:p>
+                      <a:r>
+                        <a:rPr lang="en-GB"/>
+                        <a:t>68</a:t>
+                      </a:r>
+                    </a:p>
+                  </a:txBody>
+                  <a:tcPr/>
+                </a:tc>
+                <a:tc>
+                  <a:txBody>
+                    <a:bodyPr/>
+                    <a:lstStyle/>
+                    <a:p>
+                      <a:r>
+                        <a:rPr lang="en-GB"/>
+                        <a:t>6</a:t>
+                      </a:r>
+                    </a:p>
+                  </a:txBody>
+                  <a:tcPr/>
+                </a:tc>
+                <a:tc>
+                  <a:txBody>
+                    <a:bodyPr/>
+                    <a:lstStyle/>
+                    <a:p>
+                      <a:r>
+                        <a:rPr lang="en-GB"/>
+                        <a:t>25</a:t>
+                      </a:r>
+                    </a:p>
+                  </a:txBody>
+                  <a:tcPr/>
+                </a:tc>
+                <a:tc>
+                  <a:txBody>
+                    <a:bodyPr/>
+                    <a:lstStyle/>
+                    <a:p>
+                      <a:r>
+                        <a:rPr lang="en-GB"/>
+                        <a:t>20</a:t>
+                      </a:r>
                     </a:p>
                   </a:txBody>
                   <a:tcPr/>
@@ -11510,67 +11618,88 @@
                     <a:bodyPr/>
                     <a:lstStyle/>
                     <a:p>
-                      <a:endParaRPr lang="en-GB"/>
-                    </a:p>
-                  </a:txBody>
-                  <a:tcPr/>
-                </a:tc>
-                <a:tc>
-                  <a:txBody>
-                    <a:bodyPr/>
-                    <a:lstStyle/>
-                    <a:p>
-                      <a:endParaRPr lang="en-GB"/>
-                    </a:p>
-                  </a:txBody>
-                  <a:tcPr/>
-                </a:tc>
-                <a:tc>
-                  <a:txBody>
-                    <a:bodyPr/>
-                    <a:lstStyle/>
-                    <a:p>
-                      <a:endParaRPr lang="en-GB"/>
-                    </a:p>
-                  </a:txBody>
-                  <a:tcPr/>
-                </a:tc>
-                <a:tc>
-                  <a:txBody>
-                    <a:bodyPr/>
-                    <a:lstStyle/>
-                    <a:p>
-                      <a:endParaRPr lang="en-GB"/>
-                    </a:p>
-                  </a:txBody>
-                  <a:tcPr/>
-                </a:tc>
-                <a:tc>
-                  <a:txBody>
-                    <a:bodyPr/>
-                    <a:lstStyle/>
-                    <a:p>
-                      <a:endParaRPr lang="en-GB"/>
-                    </a:p>
-                  </a:txBody>
-                  <a:tcPr/>
-                </a:tc>
-                <a:tc>
-                  <a:txBody>
-                    <a:bodyPr/>
-                    <a:lstStyle/>
-                    <a:p>
-                      <a:endParaRPr lang="en-GB"/>
-                    </a:p>
-                  </a:txBody>
-                  <a:tcPr/>
-                </a:tc>
-                <a:tc>
-                  <a:txBody>
-                    <a:bodyPr/>
-                    <a:lstStyle/>
-                    <a:p>
-                      <a:endParaRPr lang="en-GB"/>
+                      <a:r>
+                        <a:rPr lang="en-GB"/>
+                        <a:t>User 6</a:t>
+                      </a:r>
+                    </a:p>
+                  </a:txBody>
+                  <a:tcPr/>
+                </a:tc>
+                <a:tc>
+                  <a:txBody>
+                    <a:bodyPr/>
+                    <a:lstStyle/>
+                    <a:p>
+                      <a:r>
+                        <a:rPr lang="en-GB"/>
+                        <a:t>50</a:t>
+                      </a:r>
+                    </a:p>
+                  </a:txBody>
+                  <a:tcPr/>
+                </a:tc>
+                <a:tc>
+                  <a:txBody>
+                    <a:bodyPr/>
+                    <a:lstStyle/>
+                    <a:p>
+                      <a:r>
+                        <a:rPr lang="en-GB"/>
+                        <a:t>50</a:t>
+                      </a:r>
+                    </a:p>
+                  </a:txBody>
+                  <a:tcPr/>
+                </a:tc>
+                <a:tc>
+                  <a:txBody>
+                    <a:bodyPr/>
+                    <a:lstStyle/>
+                    <a:p>
+                      <a:r>
+                        <a:rPr lang="en-GB"/>
+                        <a:t>50</a:t>
+                      </a:r>
+                    </a:p>
+                  </a:txBody>
+                  <a:tcPr/>
+                </a:tc>
+                <a:tc>
+                  <a:txBody>
+                    <a:bodyPr/>
+                    <a:lstStyle/>
+                    <a:p>
+                      <a:r>
+                        <a:rPr lang="en-GB"/>
+                        <a:t>3</a:t>
+                      </a:r>
+                    </a:p>
+                  </a:txBody>
+                  <a:tcPr/>
+                </a:tc>
+                <a:tc>
+                  <a:txBody>
+                    <a:bodyPr/>
+                    <a:lstStyle/>
+                    <a:p>
+                      <a:r>
+                        <a:rPr lang="en-GB"/>
+                        <a:t>25</a:t>
+                      </a:r>
+                    </a:p>
+                  </a:txBody>
+                  <a:tcPr/>
+                </a:tc>
+                <a:tc>
+                  <a:txBody>
+                    <a:bodyPr/>
+                    <a:lstStyle/>
+                    <a:p>
+                      <a:r>
+                        <a:rPr lang="en-GB"/>
+                        <a:t>20</a:t>
+                      </a:r>
                     </a:p>
                   </a:txBody>
                   <a:tcPr/>
@@ -11587,67 +11716,88 @@
                     <a:bodyPr/>
                     <a:lstStyle/>
                     <a:p>
-                      <a:endParaRPr lang="en-GB"/>
-                    </a:p>
-                  </a:txBody>
-                  <a:tcPr/>
-                </a:tc>
-                <a:tc>
-                  <a:txBody>
-                    <a:bodyPr/>
-                    <a:lstStyle/>
-                    <a:p>
-                      <a:endParaRPr lang="en-GB"/>
-                    </a:p>
-                  </a:txBody>
-                  <a:tcPr/>
-                </a:tc>
-                <a:tc>
-                  <a:txBody>
-                    <a:bodyPr/>
-                    <a:lstStyle/>
-                    <a:p>
-                      <a:endParaRPr lang="en-GB"/>
-                    </a:p>
-                  </a:txBody>
-                  <a:tcPr/>
-                </a:tc>
-                <a:tc>
-                  <a:txBody>
-                    <a:bodyPr/>
-                    <a:lstStyle/>
-                    <a:p>
-                      <a:endParaRPr lang="en-GB"/>
-                    </a:p>
-                  </a:txBody>
-                  <a:tcPr/>
-                </a:tc>
-                <a:tc>
-                  <a:txBody>
-                    <a:bodyPr/>
-                    <a:lstStyle/>
-                    <a:p>
-                      <a:endParaRPr lang="en-GB"/>
-                    </a:p>
-                  </a:txBody>
-                  <a:tcPr/>
-                </a:tc>
-                <a:tc>
-                  <a:txBody>
-                    <a:bodyPr/>
-                    <a:lstStyle/>
-                    <a:p>
-                      <a:endParaRPr lang="en-GB"/>
-                    </a:p>
-                  </a:txBody>
-                  <a:tcPr/>
-                </a:tc>
-                <a:tc>
-                  <a:txBody>
-                    <a:bodyPr/>
-                    <a:lstStyle/>
-                    <a:p>
-                      <a:endParaRPr lang="en-GB"/>
+                      <a:r>
+                        <a:rPr lang="en-GB"/>
+                        <a:t>User 7</a:t>
+                      </a:r>
+                    </a:p>
+                  </a:txBody>
+                  <a:tcPr/>
+                </a:tc>
+                <a:tc>
+                  <a:txBody>
+                    <a:bodyPr/>
+                    <a:lstStyle/>
+                    <a:p>
+                      <a:r>
+                        <a:rPr lang="en-GB"/>
+                        <a:t>50</a:t>
+                      </a:r>
+                    </a:p>
+                  </a:txBody>
+                  <a:tcPr/>
+                </a:tc>
+                <a:tc>
+                  <a:txBody>
+                    <a:bodyPr/>
+                    <a:lstStyle/>
+                    <a:p>
+                      <a:r>
+                        <a:rPr lang="en-GB"/>
+                        <a:t>50</a:t>
+                      </a:r>
+                    </a:p>
+                  </a:txBody>
+                  <a:tcPr/>
+                </a:tc>
+                <a:tc>
+                  <a:txBody>
+                    <a:bodyPr/>
+                    <a:lstStyle/>
+                    <a:p>
+                      <a:r>
+                        <a:rPr lang="en-GB"/>
+                        <a:t>100</a:t>
+                      </a:r>
+                    </a:p>
+                  </a:txBody>
+                  <a:tcPr/>
+                </a:tc>
+                <a:tc>
+                  <a:txBody>
+                    <a:bodyPr/>
+                    <a:lstStyle/>
+                    <a:p>
+                      <a:r>
+                        <a:rPr lang="en-GB"/>
+                        <a:t>2</a:t>
+                      </a:r>
+                    </a:p>
+                  </a:txBody>
+                  <a:tcPr/>
+                </a:tc>
+                <a:tc>
+                  <a:txBody>
+                    <a:bodyPr/>
+                    <a:lstStyle/>
+                    <a:p>
+                      <a:r>
+                        <a:rPr lang="en-GB"/>
+                        <a:t>25</a:t>
+                      </a:r>
+                    </a:p>
+                  </a:txBody>
+                  <a:tcPr/>
+                </a:tc>
+                <a:tc>
+                  <a:txBody>
+                    <a:bodyPr/>
+                    <a:lstStyle/>
+                    <a:p>
+                      <a:r>
+                        <a:rPr lang="en-GB"/>
+                        <a:t>20</a:t>
+                      </a:r>
                     </a:p>
                   </a:txBody>
                   <a:tcPr/>
@@ -11664,67 +11814,88 @@
                     <a:bodyPr/>
                     <a:lstStyle/>
                     <a:p>
-                      <a:endParaRPr lang="en-GB"/>
-                    </a:p>
-                  </a:txBody>
-                  <a:tcPr/>
-                </a:tc>
-                <a:tc>
-                  <a:txBody>
-                    <a:bodyPr/>
-                    <a:lstStyle/>
-                    <a:p>
-                      <a:endParaRPr lang="en-GB"/>
-                    </a:p>
-                  </a:txBody>
-                  <a:tcPr/>
-                </a:tc>
-                <a:tc>
-                  <a:txBody>
-                    <a:bodyPr/>
-                    <a:lstStyle/>
-                    <a:p>
-                      <a:endParaRPr lang="en-GB"/>
-                    </a:p>
-                  </a:txBody>
-                  <a:tcPr/>
-                </a:tc>
-                <a:tc>
-                  <a:txBody>
-                    <a:bodyPr/>
-                    <a:lstStyle/>
-                    <a:p>
-                      <a:endParaRPr lang="en-GB"/>
-                    </a:p>
-                  </a:txBody>
-                  <a:tcPr/>
-                </a:tc>
-                <a:tc>
-                  <a:txBody>
-                    <a:bodyPr/>
-                    <a:lstStyle/>
-                    <a:p>
-                      <a:endParaRPr lang="en-GB"/>
-                    </a:p>
-                  </a:txBody>
-                  <a:tcPr/>
-                </a:tc>
-                <a:tc>
-                  <a:txBody>
-                    <a:bodyPr/>
-                    <a:lstStyle/>
-                    <a:p>
-                      <a:endParaRPr lang="en-GB"/>
-                    </a:p>
-                  </a:txBody>
-                  <a:tcPr/>
-                </a:tc>
-                <a:tc>
-                  <a:txBody>
-                    <a:bodyPr/>
-                    <a:lstStyle/>
-                    <a:p>
-                      <a:endParaRPr lang="en-GB"/>
+                      <a:r>
+                        <a:rPr lang="en-GB"/>
+                        <a:t>User 8</a:t>
+                      </a:r>
+                    </a:p>
+                  </a:txBody>
+                  <a:tcPr/>
+                </a:tc>
+                <a:tc>
+                  <a:txBody>
+                    <a:bodyPr/>
+                    <a:lstStyle/>
+                    <a:p>
+                      <a:r>
+                        <a:rPr lang="en-GB"/>
+                        <a:t>50</a:t>
+                      </a:r>
+                    </a:p>
+                  </a:txBody>
+                  <a:tcPr/>
+                </a:tc>
+                <a:tc>
+                  <a:txBody>
+                    <a:bodyPr/>
+                    <a:lstStyle/>
+                    <a:p>
+                      <a:r>
+                        <a:rPr lang="en-GB"/>
+                        <a:t>100</a:t>
+                      </a:r>
+                    </a:p>
+                  </a:txBody>
+                  <a:tcPr/>
+                </a:tc>
+                <a:tc>
+                  <a:txBody>
+                    <a:bodyPr/>
+                    <a:lstStyle/>
+                    <a:p>
+                      <a:r>
+                        <a:rPr lang="en-GB"/>
+                        <a:t>100</a:t>
+                      </a:r>
+                    </a:p>
+                  </a:txBody>
+                  <a:tcPr/>
+                </a:tc>
+                <a:tc>
+                  <a:txBody>
+                    <a:bodyPr/>
+                    <a:lstStyle/>
+                    <a:p>
+                      <a:r>
+                        <a:rPr lang="en-GB"/>
+                        <a:t>2</a:t>
+                      </a:r>
+                    </a:p>
+                  </a:txBody>
+                  <a:tcPr/>
+                </a:tc>
+                <a:tc>
+                  <a:txBody>
+                    <a:bodyPr/>
+                    <a:lstStyle/>
+                    <a:p>
+                      <a:r>
+                        <a:rPr lang="en-GB"/>
+                        <a:t>25</a:t>
+                      </a:r>
+                    </a:p>
+                  </a:txBody>
+                  <a:tcPr/>
+                </a:tc>
+                <a:tc>
+                  <a:txBody>
+                    <a:bodyPr/>
+                    <a:lstStyle/>
+                    <a:p>
+                      <a:r>
+                        <a:rPr lang="en-GB"/>
+                        <a:t>50</a:t>
+                      </a:r>
                     </a:p>
                   </a:txBody>
                   <a:tcPr/>
@@ -11741,67 +11912,88 @@
                     <a:bodyPr/>
                     <a:lstStyle/>
                     <a:p>
-                      <a:endParaRPr lang="en-GB"/>
-                    </a:p>
-                  </a:txBody>
-                  <a:tcPr/>
-                </a:tc>
-                <a:tc>
-                  <a:txBody>
-                    <a:bodyPr/>
-                    <a:lstStyle/>
-                    <a:p>
-                      <a:endParaRPr lang="en-GB"/>
-                    </a:p>
-                  </a:txBody>
-                  <a:tcPr/>
-                </a:tc>
-                <a:tc>
-                  <a:txBody>
-                    <a:bodyPr/>
-                    <a:lstStyle/>
-                    <a:p>
-                      <a:endParaRPr lang="en-GB"/>
-                    </a:p>
-                  </a:txBody>
-                  <a:tcPr/>
-                </a:tc>
-                <a:tc>
-                  <a:txBody>
-                    <a:bodyPr/>
-                    <a:lstStyle/>
-                    <a:p>
-                      <a:endParaRPr lang="en-GB"/>
-                    </a:p>
-                  </a:txBody>
-                  <a:tcPr/>
-                </a:tc>
-                <a:tc>
-                  <a:txBody>
-                    <a:bodyPr/>
-                    <a:lstStyle/>
-                    <a:p>
-                      <a:endParaRPr lang="en-GB"/>
-                    </a:p>
-                  </a:txBody>
-                  <a:tcPr/>
-                </a:tc>
-                <a:tc>
-                  <a:txBody>
-                    <a:bodyPr/>
-                    <a:lstStyle/>
-                    <a:p>
-                      <a:endParaRPr lang="en-GB"/>
-                    </a:p>
-                  </a:txBody>
-                  <a:tcPr/>
-                </a:tc>
-                <a:tc>
-                  <a:txBody>
-                    <a:bodyPr/>
-                    <a:lstStyle/>
-                    <a:p>
-                      <a:endParaRPr lang="en-GB"/>
+                      <a:r>
+                        <a:rPr lang="en-GB"/>
+                        <a:t>User 9</a:t>
+                      </a:r>
+                    </a:p>
+                  </a:txBody>
+                  <a:tcPr/>
+                </a:tc>
+                <a:tc>
+                  <a:txBody>
+                    <a:bodyPr/>
+                    <a:lstStyle/>
+                    <a:p>
+                      <a:r>
+                        <a:rPr lang="en-GB"/>
+                        <a:t>87</a:t>
+                      </a:r>
+                    </a:p>
+                  </a:txBody>
+                  <a:tcPr/>
+                </a:tc>
+                <a:tc>
+                  <a:txBody>
+                    <a:bodyPr/>
+                    <a:lstStyle/>
+                    <a:p>
+                      <a:r>
+                        <a:rPr lang="en-GB"/>
+                        <a:t>29</a:t>
+                      </a:r>
+                    </a:p>
+                  </a:txBody>
+                  <a:tcPr/>
+                </a:tc>
+                <a:tc>
+                  <a:txBody>
+                    <a:bodyPr/>
+                    <a:lstStyle/>
+                    <a:p>
+                      <a:r>
+                        <a:rPr lang="en-GB"/>
+                        <a:t>17</a:t>
+                      </a:r>
+                    </a:p>
+                  </a:txBody>
+                  <a:tcPr/>
+                </a:tc>
+                <a:tc>
+                  <a:txBody>
+                    <a:bodyPr/>
+                    <a:lstStyle/>
+                    <a:p>
+                      <a:r>
+                        <a:rPr lang="en-GB"/>
+                        <a:t>2</a:t>
+                      </a:r>
+                    </a:p>
+                  </a:txBody>
+                  <a:tcPr/>
+                </a:tc>
+                <a:tc>
+                  <a:txBody>
+                    <a:bodyPr/>
+                    <a:lstStyle/>
+                    <a:p>
+                      <a:r>
+                        <a:rPr lang="en-GB"/>
+                        <a:t>25</a:t>
+                      </a:r>
+                    </a:p>
+                  </a:txBody>
+                  <a:tcPr/>
+                </a:tc>
+                <a:tc>
+                  <a:txBody>
+                    <a:bodyPr/>
+                    <a:lstStyle/>
+                    <a:p>
+                      <a:r>
+                        <a:rPr lang="en-GB"/>
+                        <a:t>20</a:t>
+                      </a:r>
                     </a:p>
                   </a:txBody>
                   <a:tcPr/>
@@ -11818,67 +12010,88 @@
                     <a:bodyPr/>
                     <a:lstStyle/>
                     <a:p>
-                      <a:endParaRPr lang="en-GB"/>
-                    </a:p>
-                  </a:txBody>
-                  <a:tcPr/>
-                </a:tc>
-                <a:tc>
-                  <a:txBody>
-                    <a:bodyPr/>
-                    <a:lstStyle/>
-                    <a:p>
-                      <a:endParaRPr lang="en-GB"/>
-                    </a:p>
-                  </a:txBody>
-                  <a:tcPr/>
-                </a:tc>
-                <a:tc>
-                  <a:txBody>
-                    <a:bodyPr/>
-                    <a:lstStyle/>
-                    <a:p>
-                      <a:endParaRPr lang="en-GB"/>
-                    </a:p>
-                  </a:txBody>
-                  <a:tcPr/>
-                </a:tc>
-                <a:tc>
-                  <a:txBody>
-                    <a:bodyPr/>
-                    <a:lstStyle/>
-                    <a:p>
-                      <a:endParaRPr lang="en-GB"/>
-                    </a:p>
-                  </a:txBody>
-                  <a:tcPr/>
-                </a:tc>
-                <a:tc>
-                  <a:txBody>
-                    <a:bodyPr/>
-                    <a:lstStyle/>
-                    <a:p>
-                      <a:endParaRPr lang="en-GB"/>
-                    </a:p>
-                  </a:txBody>
-                  <a:tcPr/>
-                </a:tc>
-                <a:tc>
-                  <a:txBody>
-                    <a:bodyPr/>
-                    <a:lstStyle/>
-                    <a:p>
-                      <a:endParaRPr lang="en-GB"/>
-                    </a:p>
-                  </a:txBody>
-                  <a:tcPr/>
-                </a:tc>
-                <a:tc>
-                  <a:txBody>
-                    <a:bodyPr/>
-                    <a:lstStyle/>
-                    <a:p>
-                      <a:endParaRPr lang="en-GB"/>
+                      <a:r>
+                        <a:rPr lang="en-GB"/>
+                        <a:t>User 10</a:t>
+                      </a:r>
+                    </a:p>
+                  </a:txBody>
+                  <a:tcPr/>
+                </a:tc>
+                <a:tc>
+                  <a:txBody>
+                    <a:bodyPr/>
+                    <a:lstStyle/>
+                    <a:p>
+                      <a:r>
+                        <a:rPr lang="en-GB"/>
+                        <a:t>50</a:t>
+                      </a:r>
+                    </a:p>
+                  </a:txBody>
+                  <a:tcPr/>
+                </a:tc>
+                <a:tc>
+                  <a:txBody>
+                    <a:bodyPr/>
+                    <a:lstStyle/>
+                    <a:p>
+                      <a:r>
+                        <a:rPr lang="en-GB"/>
+                        <a:t>1</a:t>
+                      </a:r>
+                    </a:p>
+                  </a:txBody>
+                  <a:tcPr/>
+                </a:tc>
+                <a:tc>
+                  <a:txBody>
+                    <a:bodyPr/>
+                    <a:lstStyle/>
+                    <a:p>
+                      <a:r>
+                        <a:rPr lang="en-GB"/>
+                        <a:t>1</a:t>
+                      </a:r>
+                    </a:p>
+                  </a:txBody>
+                  <a:tcPr/>
+                </a:tc>
+                <a:tc>
+                  <a:txBody>
+                    <a:bodyPr/>
+                    <a:lstStyle/>
+                    <a:p>
+                      <a:r>
+                        <a:rPr lang="en-GB"/>
+                        <a:t>2</a:t>
+                      </a:r>
+                    </a:p>
+                  </a:txBody>
+                  <a:tcPr/>
+                </a:tc>
+                <a:tc>
+                  <a:txBody>
+                    <a:bodyPr/>
+                    <a:lstStyle/>
+                    <a:p>
+                      <a:r>
+                        <a:rPr lang="en-GB"/>
+                        <a:t>25</a:t>
+                      </a:r>
+                    </a:p>
+                  </a:txBody>
+                  <a:tcPr/>
+                </a:tc>
+                <a:tc>
+                  <a:txBody>
+                    <a:bodyPr/>
+                    <a:lstStyle/>
+                    <a:p>
+                      <a:r>
+                        <a:rPr lang="en-GB"/>
+                        <a:t>20</a:t>
+                      </a:r>
                     </a:p>
                   </a:txBody>
                   <a:tcPr/>
@@ -11895,67 +12108,88 @@
                     <a:bodyPr/>
                     <a:lstStyle/>
                     <a:p>
-                      <a:endParaRPr lang="en-GB"/>
-                    </a:p>
-                  </a:txBody>
-                  <a:tcPr/>
-                </a:tc>
-                <a:tc>
-                  <a:txBody>
-                    <a:bodyPr/>
-                    <a:lstStyle/>
-                    <a:p>
-                      <a:endParaRPr lang="en-GB"/>
-                    </a:p>
-                  </a:txBody>
-                  <a:tcPr/>
-                </a:tc>
-                <a:tc>
-                  <a:txBody>
-                    <a:bodyPr/>
-                    <a:lstStyle/>
-                    <a:p>
-                      <a:endParaRPr lang="en-GB"/>
-                    </a:p>
-                  </a:txBody>
-                  <a:tcPr/>
-                </a:tc>
-                <a:tc>
-                  <a:txBody>
-                    <a:bodyPr/>
-                    <a:lstStyle/>
-                    <a:p>
-                      <a:endParaRPr lang="en-GB"/>
-                    </a:p>
-                  </a:txBody>
-                  <a:tcPr/>
-                </a:tc>
-                <a:tc>
-                  <a:txBody>
-                    <a:bodyPr/>
-                    <a:lstStyle/>
-                    <a:p>
-                      <a:endParaRPr lang="en-GB"/>
-                    </a:p>
-                  </a:txBody>
-                  <a:tcPr/>
-                </a:tc>
-                <a:tc>
-                  <a:txBody>
-                    <a:bodyPr/>
-                    <a:lstStyle/>
-                    <a:p>
-                      <a:endParaRPr lang="en-GB"/>
-                    </a:p>
-                  </a:txBody>
-                  <a:tcPr/>
-                </a:tc>
-                <a:tc>
-                  <a:txBody>
-                    <a:bodyPr/>
-                    <a:lstStyle/>
-                    <a:p>
-                      <a:endParaRPr lang="en-GB"/>
+                      <a:r>
+                        <a:rPr lang="en-GB"/>
+                        <a:t>User 11</a:t>
+                      </a:r>
+                    </a:p>
+                  </a:txBody>
+                  <a:tcPr/>
+                </a:tc>
+                <a:tc>
+                  <a:txBody>
+                    <a:bodyPr/>
+                    <a:lstStyle/>
+                    <a:p>
+                      <a:r>
+                        <a:rPr lang="en-GB"/>
+                        <a:t>75</a:t>
+                      </a:r>
+                    </a:p>
+                  </a:txBody>
+                  <a:tcPr/>
+                </a:tc>
+                <a:tc>
+                  <a:txBody>
+                    <a:bodyPr/>
+                    <a:lstStyle/>
+                    <a:p>
+                      <a:r>
+                        <a:rPr lang="en-GB"/>
+                        <a:t>74</a:t>
+                      </a:r>
+                    </a:p>
+                  </a:txBody>
+                  <a:tcPr/>
+                </a:tc>
+                <a:tc>
+                  <a:txBody>
+                    <a:bodyPr/>
+                    <a:lstStyle/>
+                    <a:p>
+                      <a:r>
+                        <a:rPr lang="en-GB"/>
+                        <a:t>48</a:t>
+                      </a:r>
+                    </a:p>
+                  </a:txBody>
+                  <a:tcPr/>
+                </a:tc>
+                <a:tc>
+                  <a:txBody>
+                    <a:bodyPr/>
+                    <a:lstStyle/>
+                    <a:p>
+                      <a:r>
+                        <a:rPr lang="en-GB"/>
+                        <a:t>3</a:t>
+                      </a:r>
+                    </a:p>
+                  </a:txBody>
+                  <a:tcPr/>
+                </a:tc>
+                <a:tc>
+                  <a:txBody>
+                    <a:bodyPr/>
+                    <a:lstStyle/>
+                    <a:p>
+                      <a:r>
+                        <a:rPr lang="en-GB"/>
+                        <a:t>25</a:t>
+                      </a:r>
+                    </a:p>
+                  </a:txBody>
+                  <a:tcPr/>
+                </a:tc>
+                <a:tc>
+                  <a:txBody>
+                    <a:bodyPr/>
+                    <a:lstStyle/>
+                    <a:p>
+                      <a:r>
+                        <a:rPr lang="en-GB"/>
+                        <a:t>32</a:t>
+                      </a:r>
                     </a:p>
                   </a:txBody>
                   <a:tcPr/>
@@ -11972,67 +12206,88 @@
                     <a:bodyPr/>
                     <a:lstStyle/>
                     <a:p>
-                      <a:endParaRPr lang="en-GB"/>
-                    </a:p>
-                  </a:txBody>
-                  <a:tcPr/>
-                </a:tc>
-                <a:tc>
-                  <a:txBody>
-                    <a:bodyPr/>
-                    <a:lstStyle/>
-                    <a:p>
-                      <a:endParaRPr lang="en-GB"/>
-                    </a:p>
-                  </a:txBody>
-                  <a:tcPr/>
-                </a:tc>
-                <a:tc>
-                  <a:txBody>
-                    <a:bodyPr/>
-                    <a:lstStyle/>
-                    <a:p>
-                      <a:endParaRPr lang="en-GB"/>
-                    </a:p>
-                  </a:txBody>
-                  <a:tcPr/>
-                </a:tc>
-                <a:tc>
-                  <a:txBody>
-                    <a:bodyPr/>
-                    <a:lstStyle/>
-                    <a:p>
-                      <a:endParaRPr lang="en-GB"/>
-                    </a:p>
-                  </a:txBody>
-                  <a:tcPr/>
-                </a:tc>
-                <a:tc>
-                  <a:txBody>
-                    <a:bodyPr/>
-                    <a:lstStyle/>
-                    <a:p>
-                      <a:endParaRPr lang="en-GB"/>
-                    </a:p>
-                  </a:txBody>
-                  <a:tcPr/>
-                </a:tc>
-                <a:tc>
-                  <a:txBody>
-                    <a:bodyPr/>
-                    <a:lstStyle/>
-                    <a:p>
-                      <a:endParaRPr lang="en-GB"/>
-                    </a:p>
-                  </a:txBody>
-                  <a:tcPr/>
-                </a:tc>
-                <a:tc>
-                  <a:txBody>
-                    <a:bodyPr/>
-                    <a:lstStyle/>
-                    <a:p>
-                      <a:endParaRPr lang="en-GB"/>
+                      <a:r>
+                        <a:rPr lang="en-GB"/>
+                        <a:t>User 12</a:t>
+                      </a:r>
+                    </a:p>
+                  </a:txBody>
+                  <a:tcPr/>
+                </a:tc>
+                <a:tc>
+                  <a:txBody>
+                    <a:bodyPr/>
+                    <a:lstStyle/>
+                    <a:p>
+                      <a:r>
+                        <a:rPr lang="en-GB"/>
+                        <a:t>67</a:t>
+                      </a:r>
+                    </a:p>
+                  </a:txBody>
+                  <a:tcPr/>
+                </a:tc>
+                <a:tc>
+                  <a:txBody>
+                    <a:bodyPr/>
+                    <a:lstStyle/>
+                    <a:p>
+                      <a:r>
+                        <a:rPr lang="en-GB"/>
+                        <a:t>42</a:t>
+                      </a:r>
+                    </a:p>
+                  </a:txBody>
+                  <a:tcPr/>
+                </a:tc>
+                <a:tc>
+                  <a:txBody>
+                    <a:bodyPr/>
+                    <a:lstStyle/>
+                    <a:p>
+                      <a:r>
+                        <a:rPr lang="en-GB"/>
+                        <a:t>32</a:t>
+                      </a:r>
+                    </a:p>
+                  </a:txBody>
+                  <a:tcPr/>
+                </a:tc>
+                <a:tc>
+                  <a:txBody>
+                    <a:bodyPr/>
+                    <a:lstStyle/>
+                    <a:p>
+                      <a:r>
+                        <a:rPr lang="en-GB"/>
+                        <a:t>6</a:t>
+                      </a:r>
+                    </a:p>
+                  </a:txBody>
+                  <a:tcPr/>
+                </a:tc>
+                <a:tc>
+                  <a:txBody>
+                    <a:bodyPr/>
+                    <a:lstStyle/>
+                    <a:p>
+                      <a:r>
+                        <a:rPr lang="en-GB"/>
+                        <a:t>25</a:t>
+                      </a:r>
+                    </a:p>
+                  </a:txBody>
+                  <a:tcPr/>
+                </a:tc>
+                <a:tc>
+                  <a:txBody>
+                    <a:bodyPr/>
+                    <a:lstStyle/>
+                    <a:p>
+                      <a:r>
+                        <a:rPr lang="en-GB"/>
+                        <a:t>30</a:t>
+                      </a:r>
                     </a:p>
                   </a:txBody>
                   <a:tcPr/>
@@ -12049,67 +12304,88 @@
                     <a:bodyPr/>
                     <a:lstStyle/>
                     <a:p>
-                      <a:endParaRPr lang="en-GB"/>
-                    </a:p>
-                  </a:txBody>
-                  <a:tcPr/>
-                </a:tc>
-                <a:tc>
-                  <a:txBody>
-                    <a:bodyPr/>
-                    <a:lstStyle/>
-                    <a:p>
-                      <a:endParaRPr lang="en-GB"/>
-                    </a:p>
-                  </a:txBody>
-                  <a:tcPr/>
-                </a:tc>
-                <a:tc>
-                  <a:txBody>
-                    <a:bodyPr/>
-                    <a:lstStyle/>
-                    <a:p>
-                      <a:endParaRPr lang="en-GB"/>
-                    </a:p>
-                  </a:txBody>
-                  <a:tcPr/>
-                </a:tc>
-                <a:tc>
-                  <a:txBody>
-                    <a:bodyPr/>
-                    <a:lstStyle/>
-                    <a:p>
-                      <a:endParaRPr lang="en-GB"/>
-                    </a:p>
-                  </a:txBody>
-                  <a:tcPr/>
-                </a:tc>
-                <a:tc>
-                  <a:txBody>
-                    <a:bodyPr/>
-                    <a:lstStyle/>
-                    <a:p>
-                      <a:endParaRPr lang="en-GB"/>
-                    </a:p>
-                  </a:txBody>
-                  <a:tcPr/>
-                </a:tc>
-                <a:tc>
-                  <a:txBody>
-                    <a:bodyPr/>
-                    <a:lstStyle/>
-                    <a:p>
-                      <a:endParaRPr lang="en-GB"/>
-                    </a:p>
-                  </a:txBody>
-                  <a:tcPr/>
-                </a:tc>
-                <a:tc>
-                  <a:txBody>
-                    <a:bodyPr/>
-                    <a:lstStyle/>
-                    <a:p>
-                      <a:endParaRPr lang="en-GB"/>
+                      <a:r>
+                        <a:rPr lang="en-GB"/>
+                        <a:t>User 13</a:t>
+                      </a:r>
+                    </a:p>
+                  </a:txBody>
+                  <a:tcPr/>
+                </a:tc>
+                <a:tc>
+                  <a:txBody>
+                    <a:bodyPr/>
+                    <a:lstStyle/>
+                    <a:p>
+                      <a:r>
+                        <a:rPr lang="en-GB"/>
+                        <a:t>21</a:t>
+                      </a:r>
+                    </a:p>
+                  </a:txBody>
+                  <a:tcPr/>
+                </a:tc>
+                <a:tc>
+                  <a:txBody>
+                    <a:bodyPr/>
+                    <a:lstStyle/>
+                    <a:p>
+                      <a:r>
+                        <a:rPr lang="en-GB"/>
+                        <a:t>50</a:t>
+                      </a:r>
+                    </a:p>
+                  </a:txBody>
+                  <a:tcPr/>
+                </a:tc>
+                <a:tc>
+                  <a:txBody>
+                    <a:bodyPr/>
+                    <a:lstStyle/>
+                    <a:p>
+                      <a:r>
+                        <a:rPr lang="en-GB"/>
+                        <a:t>50</a:t>
+                      </a:r>
+                    </a:p>
+                  </a:txBody>
+                  <a:tcPr/>
+                </a:tc>
+                <a:tc>
+                  <a:txBody>
+                    <a:bodyPr/>
+                    <a:lstStyle/>
+                    <a:p>
+                      <a:r>
+                        <a:rPr lang="en-GB"/>
+                        <a:t>2</a:t>
+                      </a:r>
+                    </a:p>
+                  </a:txBody>
+                  <a:tcPr/>
+                </a:tc>
+                <a:tc>
+                  <a:txBody>
+                    <a:bodyPr/>
+                    <a:lstStyle/>
+                    <a:p>
+                      <a:r>
+                        <a:rPr lang="en-GB"/>
+                        <a:t>25</a:t>
+                      </a:r>
+                    </a:p>
+                  </a:txBody>
+                  <a:tcPr/>
+                </a:tc>
+                <a:tc>
+                  <a:txBody>
+                    <a:bodyPr/>
+                    <a:lstStyle/>
+                    <a:p>
+                      <a:r>
+                        <a:rPr lang="en-GB"/>
+                        <a:t>31</a:t>
+                      </a:r>
                     </a:p>
                   </a:txBody>
                   <a:tcPr/>
@@ -12126,67 +12402,88 @@
                     <a:bodyPr/>
                     <a:lstStyle/>
                     <a:p>
-                      <a:endParaRPr lang="en-GB"/>
-                    </a:p>
-                  </a:txBody>
-                  <a:tcPr/>
-                </a:tc>
-                <a:tc>
-                  <a:txBody>
-                    <a:bodyPr/>
-                    <a:lstStyle/>
-                    <a:p>
-                      <a:endParaRPr lang="en-GB"/>
-                    </a:p>
-                  </a:txBody>
-                  <a:tcPr/>
-                </a:tc>
-                <a:tc>
-                  <a:txBody>
-                    <a:bodyPr/>
-                    <a:lstStyle/>
-                    <a:p>
-                      <a:endParaRPr lang="en-GB"/>
-                    </a:p>
-                  </a:txBody>
-                  <a:tcPr/>
-                </a:tc>
-                <a:tc>
-                  <a:txBody>
-                    <a:bodyPr/>
-                    <a:lstStyle/>
-                    <a:p>
-                      <a:endParaRPr lang="en-GB"/>
-                    </a:p>
-                  </a:txBody>
-                  <a:tcPr/>
-                </a:tc>
-                <a:tc>
-                  <a:txBody>
-                    <a:bodyPr/>
-                    <a:lstStyle/>
-                    <a:p>
-                      <a:endParaRPr lang="en-GB"/>
-                    </a:p>
-                  </a:txBody>
-                  <a:tcPr/>
-                </a:tc>
-                <a:tc>
-                  <a:txBody>
-                    <a:bodyPr/>
-                    <a:lstStyle/>
-                    <a:p>
-                      <a:endParaRPr lang="en-GB"/>
-                    </a:p>
-                  </a:txBody>
-                  <a:tcPr/>
-                </a:tc>
-                <a:tc>
-                  <a:txBody>
-                    <a:bodyPr/>
-                    <a:lstStyle/>
-                    <a:p>
-                      <a:endParaRPr lang="en-GB"/>
+                      <a:r>
+                        <a:rPr lang="en-GB"/>
+                        <a:t>User 14</a:t>
+                      </a:r>
+                    </a:p>
+                  </a:txBody>
+                  <a:tcPr/>
+                </a:tc>
+                <a:tc>
+                  <a:txBody>
+                    <a:bodyPr/>
+                    <a:lstStyle/>
+                    <a:p>
+                      <a:r>
+                        <a:rPr lang="en-GB"/>
+                        <a:t>100</a:t>
+                      </a:r>
+                    </a:p>
+                  </a:txBody>
+                  <a:tcPr/>
+                </a:tc>
+                <a:tc>
+                  <a:txBody>
+                    <a:bodyPr/>
+                    <a:lstStyle/>
+                    <a:p>
+                      <a:r>
+                        <a:rPr lang="en-GB"/>
+                        <a:t>100</a:t>
+                      </a:r>
+                    </a:p>
+                  </a:txBody>
+                  <a:tcPr/>
+                </a:tc>
+                <a:tc>
+                  <a:txBody>
+                    <a:bodyPr/>
+                    <a:lstStyle/>
+                    <a:p>
+                      <a:r>
+                        <a:rPr lang="en-GB"/>
+                        <a:t>100</a:t>
+                      </a:r>
+                    </a:p>
+                  </a:txBody>
+                  <a:tcPr/>
+                </a:tc>
+                <a:tc>
+                  <a:txBody>
+                    <a:bodyPr/>
+                    <a:lstStyle/>
+                    <a:p>
+                      <a:r>
+                        <a:rPr lang="en-GB"/>
+                        <a:t>4</a:t>
+                      </a:r>
+                    </a:p>
+                  </a:txBody>
+                  <a:tcPr/>
+                </a:tc>
+                <a:tc>
+                  <a:txBody>
+                    <a:bodyPr/>
+                    <a:lstStyle/>
+                    <a:p>
+                      <a:r>
+                        <a:rPr lang="en-GB"/>
+                        <a:t>25</a:t>
+                      </a:r>
+                    </a:p>
+                  </a:txBody>
+                  <a:tcPr/>
+                </a:tc>
+                <a:tc>
+                  <a:txBody>
+                    <a:bodyPr/>
+                    <a:lstStyle/>
+                    <a:p>
+                      <a:r>
+                        <a:rPr lang="en-GB"/>
+                        <a:t>1</a:t>
+                      </a:r>
                     </a:p>
                   </a:txBody>
                   <a:tcPr/>
@@ -12203,67 +12500,88 @@
                     <a:bodyPr/>
                     <a:lstStyle/>
                     <a:p>
-                      <a:endParaRPr lang="en-GB"/>
-                    </a:p>
-                  </a:txBody>
-                  <a:tcPr/>
-                </a:tc>
-                <a:tc>
-                  <a:txBody>
-                    <a:bodyPr/>
-                    <a:lstStyle/>
-                    <a:p>
-                      <a:endParaRPr lang="en-GB"/>
-                    </a:p>
-                  </a:txBody>
-                  <a:tcPr/>
-                </a:tc>
-                <a:tc>
-                  <a:txBody>
-                    <a:bodyPr/>
-                    <a:lstStyle/>
-                    <a:p>
-                      <a:endParaRPr lang="en-GB"/>
-                    </a:p>
-                  </a:txBody>
-                  <a:tcPr/>
-                </a:tc>
-                <a:tc>
-                  <a:txBody>
-                    <a:bodyPr/>
-                    <a:lstStyle/>
-                    <a:p>
-                      <a:endParaRPr lang="en-GB"/>
-                    </a:p>
-                  </a:txBody>
-                  <a:tcPr/>
-                </a:tc>
-                <a:tc>
-                  <a:txBody>
-                    <a:bodyPr/>
-                    <a:lstStyle/>
-                    <a:p>
-                      <a:endParaRPr lang="en-GB"/>
-                    </a:p>
-                  </a:txBody>
-                  <a:tcPr/>
-                </a:tc>
-                <a:tc>
-                  <a:txBody>
-                    <a:bodyPr/>
-                    <a:lstStyle/>
-                    <a:p>
-                      <a:endParaRPr lang="en-GB"/>
-                    </a:p>
-                  </a:txBody>
-                  <a:tcPr/>
-                </a:tc>
-                <a:tc>
-                  <a:txBody>
-                    <a:bodyPr/>
-                    <a:lstStyle/>
-                    <a:p>
-                      <a:endParaRPr lang="en-GB"/>
+                      <a:r>
+                        <a:rPr lang="en-GB"/>
+                        <a:t>User 15</a:t>
+                      </a:r>
+                    </a:p>
+                  </a:txBody>
+                  <a:tcPr/>
+                </a:tc>
+                <a:tc>
+                  <a:txBody>
+                    <a:bodyPr/>
+                    <a:lstStyle/>
+                    <a:p>
+                      <a:r>
+                        <a:rPr lang="en-GB"/>
+                        <a:t>1</a:t>
+                      </a:r>
+                    </a:p>
+                  </a:txBody>
+                  <a:tcPr/>
+                </a:tc>
+                <a:tc>
+                  <a:txBody>
+                    <a:bodyPr/>
+                    <a:lstStyle/>
+                    <a:p>
+                      <a:r>
+                        <a:rPr lang="en-GB"/>
+                        <a:t>1</a:t>
+                      </a:r>
+                    </a:p>
+                  </a:txBody>
+                  <a:tcPr/>
+                </a:tc>
+                <a:tc>
+                  <a:txBody>
+                    <a:bodyPr/>
+                    <a:lstStyle/>
+                    <a:p>
+                      <a:r>
+                        <a:rPr lang="en-GB"/>
+                        <a:t>100</a:t>
+                      </a:r>
+                    </a:p>
+                  </a:txBody>
+                  <a:tcPr/>
+                </a:tc>
+                <a:tc>
+                  <a:txBody>
+                    <a:bodyPr/>
+                    <a:lstStyle/>
+                    <a:p>
+                      <a:r>
+                        <a:rPr lang="en-GB"/>
+                        <a:t>3</a:t>
+                      </a:r>
+                    </a:p>
+                  </a:txBody>
+                  <a:tcPr/>
+                </a:tc>
+                <a:tc>
+                  <a:txBody>
+                    <a:bodyPr/>
+                    <a:lstStyle/>
+                    <a:p>
+                      <a:r>
+                        <a:rPr lang="en-GB"/>
+                        <a:t>25</a:t>
+                      </a:r>
+                    </a:p>
+                  </a:txBody>
+                  <a:tcPr/>
+                </a:tc>
+                <a:tc>
+                  <a:txBody>
+                    <a:bodyPr/>
+                    <a:lstStyle/>
+                    <a:p>
+                      <a:r>
+                        <a:rPr lang="en-GB"/>
+                        <a:t>20</a:t>
+                      </a:r>
                     </a:p>
                   </a:txBody>
                   <a:tcPr/>
@@ -12280,67 +12598,88 @@
                     <a:bodyPr/>
                     <a:lstStyle/>
                     <a:p>
-                      <a:endParaRPr lang="en-GB"/>
-                    </a:p>
-                  </a:txBody>
-                  <a:tcPr/>
-                </a:tc>
-                <a:tc>
-                  <a:txBody>
-                    <a:bodyPr/>
-                    <a:lstStyle/>
-                    <a:p>
-                      <a:endParaRPr lang="en-GB"/>
-                    </a:p>
-                  </a:txBody>
-                  <a:tcPr/>
-                </a:tc>
-                <a:tc>
-                  <a:txBody>
-                    <a:bodyPr/>
-                    <a:lstStyle/>
-                    <a:p>
-                      <a:endParaRPr lang="en-GB"/>
-                    </a:p>
-                  </a:txBody>
-                  <a:tcPr/>
-                </a:tc>
-                <a:tc>
-                  <a:txBody>
-                    <a:bodyPr/>
-                    <a:lstStyle/>
-                    <a:p>
-                      <a:endParaRPr lang="en-GB"/>
-                    </a:p>
-                  </a:txBody>
-                  <a:tcPr/>
-                </a:tc>
-                <a:tc>
-                  <a:txBody>
-                    <a:bodyPr/>
-                    <a:lstStyle/>
-                    <a:p>
-                      <a:endParaRPr lang="en-GB"/>
-                    </a:p>
-                  </a:txBody>
-                  <a:tcPr/>
-                </a:tc>
-                <a:tc>
-                  <a:txBody>
-                    <a:bodyPr/>
-                    <a:lstStyle/>
-                    <a:p>
-                      <a:endParaRPr lang="en-GB"/>
-                    </a:p>
-                  </a:txBody>
-                  <a:tcPr/>
-                </a:tc>
-                <a:tc>
-                  <a:txBody>
-                    <a:bodyPr/>
-                    <a:lstStyle/>
-                    <a:p>
-                      <a:endParaRPr lang="en-GB"/>
+                      <a:r>
+                        <a:rPr lang="en-GB"/>
+                        <a:t>User 16</a:t>
+                      </a:r>
+                    </a:p>
+                  </a:txBody>
+                  <a:tcPr/>
+                </a:tc>
+                <a:tc>
+                  <a:txBody>
+                    <a:bodyPr/>
+                    <a:lstStyle/>
+                    <a:p>
+                      <a:r>
+                        <a:rPr lang="en-GB"/>
+                        <a:t>50</a:t>
+                      </a:r>
+                    </a:p>
+                  </a:txBody>
+                  <a:tcPr/>
+                </a:tc>
+                <a:tc>
+                  <a:txBody>
+                    <a:bodyPr/>
+                    <a:lstStyle/>
+                    <a:p>
+                      <a:r>
+                        <a:rPr lang="en-GB"/>
+                        <a:t>66</a:t>
+                      </a:r>
+                    </a:p>
+                  </a:txBody>
+                  <a:tcPr/>
+                </a:tc>
+                <a:tc>
+                  <a:txBody>
+                    <a:bodyPr/>
+                    <a:lstStyle/>
+                    <a:p>
+                      <a:r>
+                        <a:rPr lang="en-GB"/>
+                        <a:t>50</a:t>
+                      </a:r>
+                    </a:p>
+                  </a:txBody>
+                  <a:tcPr/>
+                </a:tc>
+                <a:tc>
+                  <a:txBody>
+                    <a:bodyPr/>
+                    <a:lstStyle/>
+                    <a:p>
+                      <a:r>
+                        <a:rPr lang="en-GB"/>
+                        <a:t>4</a:t>
+                      </a:r>
+                    </a:p>
+                  </a:txBody>
+                  <a:tcPr/>
+                </a:tc>
+                <a:tc>
+                  <a:txBody>
+                    <a:bodyPr/>
+                    <a:lstStyle/>
+                    <a:p>
+                      <a:r>
+                        <a:rPr lang="en-GB"/>
+                        <a:t>25</a:t>
+                      </a:r>
+                    </a:p>
+                  </a:txBody>
+                  <a:tcPr/>
+                </a:tc>
+                <a:tc>
+                  <a:txBody>
+                    <a:bodyPr/>
+                    <a:lstStyle/>
+                    <a:p>
+                      <a:r>
+                        <a:rPr lang="en-GB"/>
+                        <a:t>20</a:t>
+                      </a:r>
                     </a:p>
                   </a:txBody>
                   <a:tcPr/>
@@ -12357,67 +12696,88 @@
                     <a:bodyPr/>
                     <a:lstStyle/>
                     <a:p>
-                      <a:endParaRPr lang="en-GB"/>
-                    </a:p>
-                  </a:txBody>
-                  <a:tcPr/>
-                </a:tc>
-                <a:tc>
-                  <a:txBody>
-                    <a:bodyPr/>
-                    <a:lstStyle/>
-                    <a:p>
-                      <a:endParaRPr lang="en-GB"/>
-                    </a:p>
-                  </a:txBody>
-                  <a:tcPr/>
-                </a:tc>
-                <a:tc>
-                  <a:txBody>
-                    <a:bodyPr/>
-                    <a:lstStyle/>
-                    <a:p>
-                      <a:endParaRPr lang="en-GB"/>
-                    </a:p>
-                  </a:txBody>
-                  <a:tcPr/>
-                </a:tc>
-                <a:tc>
-                  <a:txBody>
-                    <a:bodyPr/>
-                    <a:lstStyle/>
-                    <a:p>
-                      <a:endParaRPr lang="en-GB"/>
-                    </a:p>
-                  </a:txBody>
-                  <a:tcPr/>
-                </a:tc>
-                <a:tc>
-                  <a:txBody>
-                    <a:bodyPr/>
-                    <a:lstStyle/>
-                    <a:p>
-                      <a:endParaRPr lang="en-GB"/>
-                    </a:p>
-                  </a:txBody>
-                  <a:tcPr/>
-                </a:tc>
-                <a:tc>
-                  <a:txBody>
-                    <a:bodyPr/>
-                    <a:lstStyle/>
-                    <a:p>
-                      <a:endParaRPr lang="en-GB"/>
-                    </a:p>
-                  </a:txBody>
-                  <a:tcPr/>
-                </a:tc>
-                <a:tc>
-                  <a:txBody>
-                    <a:bodyPr/>
-                    <a:lstStyle/>
-                    <a:p>
-                      <a:endParaRPr lang="en-GB"/>
+                      <a:r>
+                        <a:rPr lang="en-GB"/>
+                        <a:t>User 17</a:t>
+                      </a:r>
+                    </a:p>
+                  </a:txBody>
+                  <a:tcPr/>
+                </a:tc>
+                <a:tc>
+                  <a:txBody>
+                    <a:bodyPr/>
+                    <a:lstStyle/>
+                    <a:p>
+                      <a:r>
+                        <a:rPr lang="en-GB"/>
+                        <a:t>56</a:t>
+                      </a:r>
+                    </a:p>
+                  </a:txBody>
+                  <a:tcPr/>
+                </a:tc>
+                <a:tc>
+                  <a:txBody>
+                    <a:bodyPr/>
+                    <a:lstStyle/>
+                    <a:p>
+                      <a:r>
+                        <a:rPr lang="en-GB"/>
+                        <a:t>74</a:t>
+                      </a:r>
+                    </a:p>
+                  </a:txBody>
+                  <a:tcPr/>
+                </a:tc>
+                <a:tc>
+                  <a:txBody>
+                    <a:bodyPr/>
+                    <a:lstStyle/>
+                    <a:p>
+                      <a:r>
+                        <a:rPr lang="en-GB"/>
+                        <a:t>41</a:t>
+                      </a:r>
+                    </a:p>
+                  </a:txBody>
+                  <a:tcPr/>
+                </a:tc>
+                <a:tc>
+                  <a:txBody>
+                    <a:bodyPr/>
+                    <a:lstStyle/>
+                    <a:p>
+                      <a:r>
+                        <a:rPr lang="en-GB"/>
+                        <a:t>2</a:t>
+                      </a:r>
+                    </a:p>
+                  </a:txBody>
+                  <a:tcPr/>
+                </a:tc>
+                <a:tc>
+                  <a:txBody>
+                    <a:bodyPr/>
+                    <a:lstStyle/>
+                    <a:p>
+                      <a:r>
+                        <a:rPr lang="en-GB"/>
+                        <a:t>25</a:t>
+                      </a:r>
+                    </a:p>
+                  </a:txBody>
+                  <a:tcPr/>
+                </a:tc>
+                <a:tc>
+                  <a:txBody>
+                    <a:bodyPr/>
+                    <a:lstStyle/>
+                    <a:p>
+                      <a:r>
+                        <a:rPr lang="en-GB"/>
+                        <a:t>20</a:t>
+                      </a:r>
                     </a:p>
                   </a:txBody>
                   <a:tcPr/>
@@ -12434,67 +12794,88 @@
                     <a:bodyPr/>
                     <a:lstStyle/>
                     <a:p>
-                      <a:endParaRPr lang="en-GB"/>
-                    </a:p>
-                  </a:txBody>
-                  <a:tcPr/>
-                </a:tc>
-                <a:tc>
-                  <a:txBody>
-                    <a:bodyPr/>
-                    <a:lstStyle/>
-                    <a:p>
-                      <a:endParaRPr lang="en-GB"/>
-                    </a:p>
-                  </a:txBody>
-                  <a:tcPr/>
-                </a:tc>
-                <a:tc>
-                  <a:txBody>
-                    <a:bodyPr/>
-                    <a:lstStyle/>
-                    <a:p>
-                      <a:endParaRPr lang="en-GB"/>
-                    </a:p>
-                  </a:txBody>
-                  <a:tcPr/>
-                </a:tc>
-                <a:tc>
-                  <a:txBody>
-                    <a:bodyPr/>
-                    <a:lstStyle/>
-                    <a:p>
-                      <a:endParaRPr lang="en-GB"/>
-                    </a:p>
-                  </a:txBody>
-                  <a:tcPr/>
-                </a:tc>
-                <a:tc>
-                  <a:txBody>
-                    <a:bodyPr/>
-                    <a:lstStyle/>
-                    <a:p>
-                      <a:endParaRPr lang="en-GB"/>
-                    </a:p>
-                  </a:txBody>
-                  <a:tcPr/>
-                </a:tc>
-                <a:tc>
-                  <a:txBody>
-                    <a:bodyPr/>
-                    <a:lstStyle/>
-                    <a:p>
-                      <a:endParaRPr lang="en-GB"/>
-                    </a:p>
-                  </a:txBody>
-                  <a:tcPr/>
-                </a:tc>
-                <a:tc>
-                  <a:txBody>
-                    <a:bodyPr/>
-                    <a:lstStyle/>
-                    <a:p>
-                      <a:endParaRPr lang="en-GB"/>
+                      <a:r>
+                        <a:rPr lang="en-GB"/>
+                        <a:t>User 18</a:t>
+                      </a:r>
+                    </a:p>
+                  </a:txBody>
+                  <a:tcPr/>
+                </a:tc>
+                <a:tc>
+                  <a:txBody>
+                    <a:bodyPr/>
+                    <a:lstStyle/>
+                    <a:p>
+                      <a:r>
+                        <a:rPr lang="en-GB"/>
+                        <a:t>1</a:t>
+                      </a:r>
+                    </a:p>
+                  </a:txBody>
+                  <a:tcPr/>
+                </a:tc>
+                <a:tc>
+                  <a:txBody>
+                    <a:bodyPr/>
+                    <a:lstStyle/>
+                    <a:p>
+                      <a:r>
+                        <a:rPr lang="en-GB"/>
+                        <a:t>1</a:t>
+                      </a:r>
+                    </a:p>
+                  </a:txBody>
+                  <a:tcPr/>
+                </a:tc>
+                <a:tc>
+                  <a:txBody>
+                    <a:bodyPr/>
+                    <a:lstStyle/>
+                    <a:p>
+                      <a:r>
+                        <a:rPr lang="en-GB"/>
+                        <a:t>50</a:t>
+                      </a:r>
+                    </a:p>
+                  </a:txBody>
+                  <a:tcPr/>
+                </a:tc>
+                <a:tc>
+                  <a:txBody>
+                    <a:bodyPr/>
+                    <a:lstStyle/>
+                    <a:p>
+                      <a:r>
+                        <a:rPr lang="en-GB"/>
+                        <a:t>3</a:t>
+                      </a:r>
+                    </a:p>
+                  </a:txBody>
+                  <a:tcPr/>
+                </a:tc>
+                <a:tc>
+                  <a:txBody>
+                    <a:bodyPr/>
+                    <a:lstStyle/>
+                    <a:p>
+                      <a:r>
+                        <a:rPr lang="en-GB"/>
+                        <a:t>33</a:t>
+                      </a:r>
+                    </a:p>
+                  </a:txBody>
+                  <a:tcPr/>
+                </a:tc>
+                <a:tc>
+                  <a:txBody>
+                    <a:bodyPr/>
+                    <a:lstStyle/>
+                    <a:p>
+                      <a:r>
+                        <a:rPr lang="en-GB"/>
+                        <a:t>50</a:t>
+                      </a:r>
                     </a:p>
                   </a:txBody>
                   <a:tcPr/>
@@ -12513,6 +12894,6074 @@
     <p:extLst>
       <p:ext uri="{BB962C8B-B14F-4D97-AF65-F5344CB8AC3E}">
         <p14:creationId xmlns:p14="http://schemas.microsoft.com/office/powerpoint/2010/main" val="951265710"/>
+      </p:ext>
+    </p:extLst>
+  </p:cSld>
+  <p:clrMapOvr>
+    <a:masterClrMapping/>
+  </p:clrMapOvr>
+</p:sld>
+</file>
+
+<file path=ppt/slides/slide7.xml><?xml version="1.0" encoding="utf-8"?>
+<p:sld xmlns:a="http://schemas.openxmlformats.org/drawingml/2006/main" xmlns:r="http://schemas.openxmlformats.org/officeDocument/2006/relationships" xmlns:p="http://schemas.openxmlformats.org/presentationml/2006/main">
+  <p:cSld>
+    <p:spTree>
+      <p:nvGrpSpPr>
+        <p:cNvPr id="1" name=""/>
+        <p:cNvGrpSpPr/>
+        <p:nvPr/>
+      </p:nvGrpSpPr>
+      <p:grpSpPr>
+        <a:xfrm>
+          <a:off x="0" y="0"/>
+          <a:ext cx="0" cy="0"/>
+          <a:chOff x="0" y="0"/>
+          <a:chExt cx="0" cy="0"/>
+        </a:xfrm>
+      </p:grpSpPr>
+      <p:sp>
+        <p:nvSpPr>
+          <p:cNvPr id="2" name="Title 1">
+            <a:extLst>
+              <a:ext uri="{FF2B5EF4-FFF2-40B4-BE49-F238E27FC236}">
+                <a16:creationId xmlns:a16="http://schemas.microsoft.com/office/drawing/2014/main" id="{D181A73F-1626-2A24-BD2E-AC17CC4BD8E0}"/>
+              </a:ext>
+            </a:extLst>
+          </p:cNvPr>
+          <p:cNvSpPr>
+            <a:spLocks noGrp="1"/>
+          </p:cNvSpPr>
+          <p:nvPr>
+            <p:ph type="title"/>
+          </p:nvPr>
+        </p:nvSpPr>
+        <p:spPr/>
+        <p:txBody>
+          <a:bodyPr/>
+          <a:lstStyle/>
+          <a:p>
+            <a:endParaRPr lang="en-GB"/>
+          </a:p>
+        </p:txBody>
+      </p:sp>
+      <p:graphicFrame>
+        <p:nvGraphicFramePr>
+          <p:cNvPr id="4" name="Content Placeholder 3">
+            <a:extLst>
+              <a:ext uri="{FF2B5EF4-FFF2-40B4-BE49-F238E27FC236}">
+                <a16:creationId xmlns:a16="http://schemas.microsoft.com/office/drawing/2014/main" id="{FDECB4C1-BECF-CD2B-1507-D6CEECC80873}"/>
+              </a:ext>
+            </a:extLst>
+          </p:cNvPr>
+          <p:cNvGraphicFramePr>
+            <a:graphicFrameLocks noGrp="1"/>
+          </p:cNvGraphicFramePr>
+          <p:nvPr>
+            <p:ph idx="1"/>
+            <p:extLst>
+              <p:ext uri="{D42A27DB-BD31-4B8C-83A1-F6EECF244321}">
+                <p14:modId xmlns:p14="http://schemas.microsoft.com/office/powerpoint/2010/main" val="3332634478"/>
+              </p:ext>
+            </p:extLst>
+          </p:nvPr>
+        </p:nvGraphicFramePr>
+        <p:xfrm>
+          <a:off x="-159658" y="0"/>
+          <a:ext cx="12758058" cy="7315200"/>
+        </p:xfrm>
+        <a:graphic>
+          <a:graphicData uri="http://schemas.openxmlformats.org/drawingml/2006/table">
+            <a:tbl>
+              <a:tblPr firstRow="1" bandRow="1">
+                <a:tableStyleId>{5C22544A-7EE6-4342-B048-85BDC9FD1C3A}</a:tableStyleId>
+              </a:tblPr>
+              <a:tblGrid>
+                <a:gridCol w="2126343">
+                  <a:extLst>
+                    <a:ext uri="{9D8B030D-6E8A-4147-A177-3AD203B41FA5}">
+                      <a16:colId xmlns:a16="http://schemas.microsoft.com/office/drawing/2014/main" val="848173133"/>
+                    </a:ext>
+                  </a:extLst>
+                </a:gridCol>
+                <a:gridCol w="2126343">
+                  <a:extLst>
+                    <a:ext uri="{9D8B030D-6E8A-4147-A177-3AD203B41FA5}">
+                      <a16:colId xmlns:a16="http://schemas.microsoft.com/office/drawing/2014/main" val="5868766"/>
+                    </a:ext>
+                  </a:extLst>
+                </a:gridCol>
+                <a:gridCol w="2126343">
+                  <a:extLst>
+                    <a:ext uri="{9D8B030D-6E8A-4147-A177-3AD203B41FA5}">
+                      <a16:colId xmlns:a16="http://schemas.microsoft.com/office/drawing/2014/main" val="3730470556"/>
+                    </a:ext>
+                  </a:extLst>
+                </a:gridCol>
+                <a:gridCol w="2126343">
+                  <a:extLst>
+                    <a:ext uri="{9D8B030D-6E8A-4147-A177-3AD203B41FA5}">
+                      <a16:colId xmlns:a16="http://schemas.microsoft.com/office/drawing/2014/main" val="1555184440"/>
+                    </a:ext>
+                  </a:extLst>
+                </a:gridCol>
+                <a:gridCol w="2126343">
+                  <a:extLst>
+                    <a:ext uri="{9D8B030D-6E8A-4147-A177-3AD203B41FA5}">
+                      <a16:colId xmlns:a16="http://schemas.microsoft.com/office/drawing/2014/main" val="2024284273"/>
+                    </a:ext>
+                  </a:extLst>
+                </a:gridCol>
+                <a:gridCol w="2126343">
+                  <a:extLst>
+                    <a:ext uri="{9D8B030D-6E8A-4147-A177-3AD203B41FA5}">
+                      <a16:colId xmlns:a16="http://schemas.microsoft.com/office/drawing/2014/main" val="2776059384"/>
+                    </a:ext>
+                  </a:extLst>
+                </a:gridCol>
+              </a:tblGrid>
+              <a:tr h="370840">
+                <a:tc>
+                  <a:txBody>
+                    <a:bodyPr/>
+                    <a:lstStyle/>
+                    <a:p>
+                      <a:r>
+                        <a:rPr lang="en-GB"/>
+                        <a:t>User</a:t>
+                      </a:r>
+                    </a:p>
+                  </a:txBody>
+                  <a:tcPr/>
+                </a:tc>
+                <a:tc>
+                  <a:txBody>
+                    <a:bodyPr/>
+                    <a:lstStyle/>
+                    <a:p>
+                      <a:r>
+                        <a:rPr lang="en-GB"/>
+                        <a:t>Bounce Pad Rate (0 to 20)</a:t>
+                      </a:r>
+                    </a:p>
+                  </a:txBody>
+                  <a:tcPr/>
+                </a:tc>
+                <a:tc>
+                  <a:txBody>
+                    <a:bodyPr/>
+                    <a:lstStyle/>
+                    <a:p>
+                      <a:r>
+                        <a:rPr lang="en-GB"/>
+                        <a:t>Spike Rate (0 to 100)</a:t>
+                      </a:r>
+                    </a:p>
+                  </a:txBody>
+                  <a:tcPr/>
+                </a:tc>
+                <a:tc>
+                  <a:txBody>
+                    <a:bodyPr/>
+                    <a:lstStyle/>
+                    <a:p>
+                      <a:r>
+                        <a:rPr lang="en-GB"/>
+                        <a:t>Coins Rate (0 to 100)</a:t>
+                      </a:r>
+                    </a:p>
+                  </a:txBody>
+                  <a:tcPr/>
+                </a:tc>
+                <a:tc>
+                  <a:txBody>
+                    <a:bodyPr/>
+                    <a:lstStyle/>
+                    <a:p>
+                      <a:r>
+                        <a:rPr lang="en-GB"/>
+                        <a:t>Easy Spikes (1 to 100)</a:t>
+                      </a:r>
+                    </a:p>
+                  </a:txBody>
+                  <a:tcPr/>
+                </a:tc>
+                <a:tc>
+                  <a:txBody>
+                    <a:bodyPr/>
+                    <a:lstStyle/>
+                    <a:p>
+                      <a:r>
+                        <a:rPr lang="en-GB"/>
+                        <a:t>Hard Spikes (1 to 100)</a:t>
+                      </a:r>
+                    </a:p>
+                  </a:txBody>
+                  <a:tcPr/>
+                </a:tc>
+                <a:extLst>
+                  <a:ext uri="{0D108BD9-81ED-4DB2-BD59-A6C34878D82A}">
+                    <a16:rowId xmlns:a16="http://schemas.microsoft.com/office/drawing/2014/main" val="3467521059"/>
+                  </a:ext>
+                </a:extLst>
+              </a:tr>
+              <a:tr h="370840">
+                <a:tc>
+                  <a:txBody>
+                    <a:bodyPr/>
+                    <a:lstStyle/>
+                    <a:p>
+                      <a:r>
+                        <a:rPr lang="en-GB"/>
+                        <a:t>User 1</a:t>
+                      </a:r>
+                    </a:p>
+                  </a:txBody>
+                  <a:tcPr/>
+                </a:tc>
+                <a:tc>
+                  <a:txBody>
+                    <a:bodyPr/>
+                    <a:lstStyle/>
+                    <a:p>
+                      <a:r>
+                        <a:rPr lang="en-GB"/>
+                        <a:t>20</a:t>
+                      </a:r>
+                    </a:p>
+                  </a:txBody>
+                  <a:tcPr/>
+                </a:tc>
+                <a:tc>
+                  <a:txBody>
+                    <a:bodyPr/>
+                    <a:lstStyle/>
+                    <a:p>
+                      <a:r>
+                        <a:rPr lang="en-GB"/>
+                        <a:t>100</a:t>
+                      </a:r>
+                    </a:p>
+                  </a:txBody>
+                  <a:tcPr/>
+                </a:tc>
+                <a:tc>
+                  <a:txBody>
+                    <a:bodyPr/>
+                    <a:lstStyle/>
+                    <a:p>
+                      <a:r>
+                        <a:rPr lang="en-GB"/>
+                        <a:t>100</a:t>
+                      </a:r>
+                    </a:p>
+                  </a:txBody>
+                  <a:tcPr/>
+                </a:tc>
+                <a:tc>
+                  <a:txBody>
+                    <a:bodyPr/>
+                    <a:lstStyle/>
+                    <a:p>
+                      <a:r>
+                        <a:rPr lang="en-GB"/>
+                        <a:t>50</a:t>
+                      </a:r>
+                    </a:p>
+                  </a:txBody>
+                  <a:tcPr/>
+                </a:tc>
+                <a:tc>
+                  <a:txBody>
+                    <a:bodyPr/>
+                    <a:lstStyle/>
+                    <a:p>
+                      <a:r>
+                        <a:rPr lang="en-GB"/>
+                        <a:t>25</a:t>
+                      </a:r>
+                    </a:p>
+                  </a:txBody>
+                  <a:tcPr/>
+                </a:tc>
+                <a:extLst>
+                  <a:ext uri="{0D108BD9-81ED-4DB2-BD59-A6C34878D82A}">
+                    <a16:rowId xmlns:a16="http://schemas.microsoft.com/office/drawing/2014/main" val="1013673526"/>
+                  </a:ext>
+                </a:extLst>
+              </a:tr>
+              <a:tr h="370840">
+                <a:tc>
+                  <a:txBody>
+                    <a:bodyPr/>
+                    <a:lstStyle/>
+                    <a:p>
+                      <a:r>
+                        <a:rPr lang="en-GB"/>
+                        <a:t>User 2</a:t>
+                      </a:r>
+                    </a:p>
+                  </a:txBody>
+                  <a:tcPr/>
+                </a:tc>
+                <a:tc>
+                  <a:txBody>
+                    <a:bodyPr/>
+                    <a:lstStyle/>
+                    <a:p>
+                      <a:r>
+                        <a:rPr lang="en-GB"/>
+                        <a:t>14</a:t>
+                      </a:r>
+                    </a:p>
+                  </a:txBody>
+                  <a:tcPr/>
+                </a:tc>
+                <a:tc>
+                  <a:txBody>
+                    <a:bodyPr/>
+                    <a:lstStyle/>
+                    <a:p>
+                      <a:r>
+                        <a:rPr lang="en-GB"/>
+                        <a:t>53</a:t>
+                      </a:r>
+                    </a:p>
+                  </a:txBody>
+                  <a:tcPr/>
+                </a:tc>
+                <a:tc>
+                  <a:txBody>
+                    <a:bodyPr/>
+                    <a:lstStyle/>
+                    <a:p>
+                      <a:r>
+                        <a:rPr lang="en-GB"/>
+                        <a:t>62</a:t>
+                      </a:r>
+                    </a:p>
+                  </a:txBody>
+                  <a:tcPr/>
+                </a:tc>
+                <a:tc>
+                  <a:txBody>
+                    <a:bodyPr/>
+                    <a:lstStyle/>
+                    <a:p>
+                      <a:r>
+                        <a:rPr lang="en-GB"/>
+                        <a:t>50</a:t>
+                      </a:r>
+                    </a:p>
+                  </a:txBody>
+                  <a:tcPr/>
+                </a:tc>
+                <a:tc>
+                  <a:txBody>
+                    <a:bodyPr/>
+                    <a:lstStyle/>
+                    <a:p>
+                      <a:r>
+                        <a:rPr lang="en-GB"/>
+                        <a:t>25</a:t>
+                      </a:r>
+                    </a:p>
+                  </a:txBody>
+                  <a:tcPr/>
+                </a:tc>
+                <a:extLst>
+                  <a:ext uri="{0D108BD9-81ED-4DB2-BD59-A6C34878D82A}">
+                    <a16:rowId xmlns:a16="http://schemas.microsoft.com/office/drawing/2014/main" val="3411831393"/>
+                  </a:ext>
+                </a:extLst>
+              </a:tr>
+              <a:tr h="370840">
+                <a:tc>
+                  <a:txBody>
+                    <a:bodyPr/>
+                    <a:lstStyle/>
+                    <a:p>
+                      <a:r>
+                        <a:rPr lang="en-GB"/>
+                        <a:t>User 3</a:t>
+                      </a:r>
+                    </a:p>
+                  </a:txBody>
+                  <a:tcPr/>
+                </a:tc>
+                <a:tc>
+                  <a:txBody>
+                    <a:bodyPr/>
+                    <a:lstStyle/>
+                    <a:p>
+                      <a:r>
+                        <a:rPr lang="en-GB"/>
+                        <a:t>11</a:t>
+                      </a:r>
+                    </a:p>
+                  </a:txBody>
+                  <a:tcPr/>
+                </a:tc>
+                <a:tc>
+                  <a:txBody>
+                    <a:bodyPr/>
+                    <a:lstStyle/>
+                    <a:p>
+                      <a:r>
+                        <a:rPr lang="en-GB"/>
+                        <a:t>37</a:t>
+                      </a:r>
+                    </a:p>
+                  </a:txBody>
+                  <a:tcPr/>
+                </a:tc>
+                <a:tc>
+                  <a:txBody>
+                    <a:bodyPr/>
+                    <a:lstStyle/>
+                    <a:p>
+                      <a:r>
+                        <a:rPr lang="en-GB"/>
+                        <a:t>51</a:t>
+                      </a:r>
+                    </a:p>
+                  </a:txBody>
+                  <a:tcPr/>
+                </a:tc>
+                <a:tc>
+                  <a:txBody>
+                    <a:bodyPr/>
+                    <a:lstStyle/>
+                    <a:p>
+                      <a:r>
+                        <a:rPr lang="en-GB"/>
+                        <a:t>50</a:t>
+                      </a:r>
+                    </a:p>
+                  </a:txBody>
+                  <a:tcPr/>
+                </a:tc>
+                <a:tc>
+                  <a:txBody>
+                    <a:bodyPr/>
+                    <a:lstStyle/>
+                    <a:p>
+                      <a:r>
+                        <a:rPr lang="en-GB"/>
+                        <a:t>25</a:t>
+                      </a:r>
+                    </a:p>
+                  </a:txBody>
+                  <a:tcPr/>
+                </a:tc>
+                <a:extLst>
+                  <a:ext uri="{0D108BD9-81ED-4DB2-BD59-A6C34878D82A}">
+                    <a16:rowId xmlns:a16="http://schemas.microsoft.com/office/drawing/2014/main" val="3890609605"/>
+                  </a:ext>
+                </a:extLst>
+              </a:tr>
+              <a:tr h="370840">
+                <a:tc>
+                  <a:txBody>
+                    <a:bodyPr/>
+                    <a:lstStyle/>
+                    <a:p>
+                      <a:r>
+                        <a:rPr lang="en-GB"/>
+                        <a:t>User 4</a:t>
+                      </a:r>
+                    </a:p>
+                  </a:txBody>
+                  <a:tcPr/>
+                </a:tc>
+                <a:tc>
+                  <a:txBody>
+                    <a:bodyPr/>
+                    <a:lstStyle/>
+                    <a:p>
+                      <a:r>
+                        <a:rPr lang="en-GB"/>
+                        <a:t>10</a:t>
+                      </a:r>
+                    </a:p>
+                  </a:txBody>
+                  <a:tcPr/>
+                </a:tc>
+                <a:tc>
+                  <a:txBody>
+                    <a:bodyPr/>
+                    <a:lstStyle/>
+                    <a:p>
+                      <a:r>
+                        <a:rPr lang="en-GB"/>
+                        <a:t>25</a:t>
+                      </a:r>
+                    </a:p>
+                  </a:txBody>
+                  <a:tcPr/>
+                </a:tc>
+                <a:tc>
+                  <a:txBody>
+                    <a:bodyPr/>
+                    <a:lstStyle/>
+                    <a:p>
+                      <a:r>
+                        <a:rPr lang="en-GB"/>
+                        <a:t>50</a:t>
+                      </a:r>
+                    </a:p>
+                  </a:txBody>
+                  <a:tcPr/>
+                </a:tc>
+                <a:tc>
+                  <a:txBody>
+                    <a:bodyPr/>
+                    <a:lstStyle/>
+                    <a:p>
+                      <a:r>
+                        <a:rPr lang="en-GB"/>
+                        <a:t>50</a:t>
+                      </a:r>
+                    </a:p>
+                  </a:txBody>
+                  <a:tcPr/>
+                </a:tc>
+                <a:tc>
+                  <a:txBody>
+                    <a:bodyPr/>
+                    <a:lstStyle/>
+                    <a:p>
+                      <a:r>
+                        <a:rPr lang="en-GB"/>
+                        <a:t>25</a:t>
+                      </a:r>
+                    </a:p>
+                  </a:txBody>
+                  <a:tcPr/>
+                </a:tc>
+                <a:extLst>
+                  <a:ext uri="{0D108BD9-81ED-4DB2-BD59-A6C34878D82A}">
+                    <a16:rowId xmlns:a16="http://schemas.microsoft.com/office/drawing/2014/main" val="3359316046"/>
+                  </a:ext>
+                </a:extLst>
+              </a:tr>
+              <a:tr h="370840">
+                <a:tc>
+                  <a:txBody>
+                    <a:bodyPr/>
+                    <a:lstStyle/>
+                    <a:p>
+                      <a:r>
+                        <a:rPr lang="en-GB"/>
+                        <a:t>User 5</a:t>
+                      </a:r>
+                    </a:p>
+                  </a:txBody>
+                  <a:tcPr/>
+                </a:tc>
+                <a:tc>
+                  <a:txBody>
+                    <a:bodyPr/>
+                    <a:lstStyle/>
+                    <a:p>
+                      <a:r>
+                        <a:rPr lang="en-GB"/>
+                        <a:t>12</a:t>
+                      </a:r>
+                    </a:p>
+                  </a:txBody>
+                  <a:tcPr/>
+                </a:tc>
+                <a:tc>
+                  <a:txBody>
+                    <a:bodyPr/>
+                    <a:lstStyle/>
+                    <a:p>
+                      <a:r>
+                        <a:rPr lang="en-GB"/>
+                        <a:t>36</a:t>
+                      </a:r>
+                    </a:p>
+                  </a:txBody>
+                  <a:tcPr/>
+                </a:tc>
+                <a:tc>
+                  <a:txBody>
+                    <a:bodyPr/>
+                    <a:lstStyle/>
+                    <a:p>
+                      <a:r>
+                        <a:rPr lang="en-GB"/>
+                        <a:t>50</a:t>
+                      </a:r>
+                    </a:p>
+                  </a:txBody>
+                  <a:tcPr/>
+                </a:tc>
+                <a:tc>
+                  <a:txBody>
+                    <a:bodyPr/>
+                    <a:lstStyle/>
+                    <a:p>
+                      <a:r>
+                        <a:rPr lang="en-GB"/>
+                        <a:t>50</a:t>
+                      </a:r>
+                    </a:p>
+                  </a:txBody>
+                  <a:tcPr/>
+                </a:tc>
+                <a:tc>
+                  <a:txBody>
+                    <a:bodyPr/>
+                    <a:lstStyle/>
+                    <a:p>
+                      <a:r>
+                        <a:rPr lang="en-GB"/>
+                        <a:t>25</a:t>
+                      </a:r>
+                    </a:p>
+                  </a:txBody>
+                  <a:tcPr/>
+                </a:tc>
+                <a:extLst>
+                  <a:ext uri="{0D108BD9-81ED-4DB2-BD59-A6C34878D82A}">
+                    <a16:rowId xmlns:a16="http://schemas.microsoft.com/office/drawing/2014/main" val="2320000005"/>
+                  </a:ext>
+                </a:extLst>
+              </a:tr>
+              <a:tr h="370840">
+                <a:tc>
+                  <a:txBody>
+                    <a:bodyPr/>
+                    <a:lstStyle/>
+                    <a:p>
+                      <a:r>
+                        <a:rPr lang="en-GB"/>
+                        <a:t>User 6</a:t>
+                      </a:r>
+                    </a:p>
+                  </a:txBody>
+                  <a:tcPr/>
+                </a:tc>
+                <a:tc>
+                  <a:txBody>
+                    <a:bodyPr/>
+                    <a:lstStyle/>
+                    <a:p>
+                      <a:r>
+                        <a:rPr lang="en-GB"/>
+                        <a:t>10</a:t>
+                      </a:r>
+                    </a:p>
+                  </a:txBody>
+                  <a:tcPr/>
+                </a:tc>
+                <a:tc>
+                  <a:txBody>
+                    <a:bodyPr/>
+                    <a:lstStyle/>
+                    <a:p>
+                      <a:r>
+                        <a:rPr lang="en-GB"/>
+                        <a:t>25</a:t>
+                      </a:r>
+                    </a:p>
+                  </a:txBody>
+                  <a:tcPr/>
+                </a:tc>
+                <a:tc>
+                  <a:txBody>
+                    <a:bodyPr/>
+                    <a:lstStyle/>
+                    <a:p>
+                      <a:r>
+                        <a:rPr lang="en-GB"/>
+                        <a:t>50</a:t>
+                      </a:r>
+                    </a:p>
+                  </a:txBody>
+                  <a:tcPr/>
+                </a:tc>
+                <a:tc>
+                  <a:txBody>
+                    <a:bodyPr/>
+                    <a:lstStyle/>
+                    <a:p>
+                      <a:r>
+                        <a:rPr lang="en-GB"/>
+                        <a:t>50</a:t>
+                      </a:r>
+                    </a:p>
+                  </a:txBody>
+                  <a:tcPr/>
+                </a:tc>
+                <a:tc>
+                  <a:txBody>
+                    <a:bodyPr/>
+                    <a:lstStyle/>
+                    <a:p>
+                      <a:r>
+                        <a:rPr lang="en-GB"/>
+                        <a:t>25</a:t>
+                      </a:r>
+                    </a:p>
+                  </a:txBody>
+                  <a:tcPr/>
+                </a:tc>
+                <a:extLst>
+                  <a:ext uri="{0D108BD9-81ED-4DB2-BD59-A6C34878D82A}">
+                    <a16:rowId xmlns:a16="http://schemas.microsoft.com/office/drawing/2014/main" val="525163697"/>
+                  </a:ext>
+                </a:extLst>
+              </a:tr>
+              <a:tr h="370840">
+                <a:tc>
+                  <a:txBody>
+                    <a:bodyPr/>
+                    <a:lstStyle/>
+                    <a:p>
+                      <a:r>
+                        <a:rPr lang="en-GB"/>
+                        <a:t>User 7</a:t>
+                      </a:r>
+                    </a:p>
+                  </a:txBody>
+                  <a:tcPr/>
+                </a:tc>
+                <a:tc>
+                  <a:txBody>
+                    <a:bodyPr/>
+                    <a:lstStyle/>
+                    <a:p>
+                      <a:r>
+                        <a:rPr lang="en-GB"/>
+                        <a:t>10</a:t>
+                      </a:r>
+                    </a:p>
+                  </a:txBody>
+                  <a:tcPr/>
+                </a:tc>
+                <a:tc>
+                  <a:txBody>
+                    <a:bodyPr/>
+                    <a:lstStyle/>
+                    <a:p>
+                      <a:r>
+                        <a:rPr lang="en-GB"/>
+                        <a:t>25</a:t>
+                      </a:r>
+                    </a:p>
+                  </a:txBody>
+                  <a:tcPr/>
+                </a:tc>
+                <a:tc>
+                  <a:txBody>
+                    <a:bodyPr/>
+                    <a:lstStyle/>
+                    <a:p>
+                      <a:r>
+                        <a:rPr lang="en-GB"/>
+                        <a:t>0</a:t>
+                      </a:r>
+                    </a:p>
+                  </a:txBody>
+                  <a:tcPr/>
+                </a:tc>
+                <a:tc>
+                  <a:txBody>
+                    <a:bodyPr/>
+                    <a:lstStyle/>
+                    <a:p>
+                      <a:r>
+                        <a:rPr lang="en-GB"/>
+                        <a:t>50</a:t>
+                      </a:r>
+                    </a:p>
+                  </a:txBody>
+                  <a:tcPr/>
+                </a:tc>
+                <a:tc>
+                  <a:txBody>
+                    <a:bodyPr/>
+                    <a:lstStyle/>
+                    <a:p>
+                      <a:r>
+                        <a:rPr lang="en-GB"/>
+                        <a:t>25</a:t>
+                      </a:r>
+                    </a:p>
+                  </a:txBody>
+                  <a:tcPr/>
+                </a:tc>
+                <a:extLst>
+                  <a:ext uri="{0D108BD9-81ED-4DB2-BD59-A6C34878D82A}">
+                    <a16:rowId xmlns:a16="http://schemas.microsoft.com/office/drawing/2014/main" val="3070500893"/>
+                  </a:ext>
+                </a:extLst>
+              </a:tr>
+              <a:tr h="370840">
+                <a:tc>
+                  <a:txBody>
+                    <a:bodyPr/>
+                    <a:lstStyle/>
+                    <a:p>
+                      <a:r>
+                        <a:rPr lang="en-GB"/>
+                        <a:t>User 8 </a:t>
+                      </a:r>
+                    </a:p>
+                  </a:txBody>
+                  <a:tcPr/>
+                </a:tc>
+                <a:tc>
+                  <a:txBody>
+                    <a:bodyPr/>
+                    <a:lstStyle/>
+                    <a:p>
+                      <a:r>
+                        <a:rPr lang="en-GB"/>
+                        <a:t>20</a:t>
+                      </a:r>
+                    </a:p>
+                  </a:txBody>
+                  <a:tcPr/>
+                </a:tc>
+                <a:tc>
+                  <a:txBody>
+                    <a:bodyPr/>
+                    <a:lstStyle/>
+                    <a:p>
+                      <a:r>
+                        <a:rPr lang="en-GB"/>
+                        <a:t>100</a:t>
+                      </a:r>
+                    </a:p>
+                  </a:txBody>
+                  <a:tcPr/>
+                </a:tc>
+                <a:tc>
+                  <a:txBody>
+                    <a:bodyPr/>
+                    <a:lstStyle/>
+                    <a:p>
+                      <a:r>
+                        <a:rPr lang="en-GB"/>
+                        <a:t>0</a:t>
+                      </a:r>
+                    </a:p>
+                  </a:txBody>
+                  <a:tcPr/>
+                </a:tc>
+                <a:tc>
+                  <a:txBody>
+                    <a:bodyPr/>
+                    <a:lstStyle/>
+                    <a:p>
+                      <a:r>
+                        <a:rPr lang="en-GB"/>
+                        <a:t>1</a:t>
+                      </a:r>
+                    </a:p>
+                  </a:txBody>
+                  <a:tcPr/>
+                </a:tc>
+                <a:tc>
+                  <a:txBody>
+                    <a:bodyPr/>
+                    <a:lstStyle/>
+                    <a:p>
+                      <a:r>
+                        <a:rPr lang="en-GB"/>
+                        <a:t>100</a:t>
+                      </a:r>
+                    </a:p>
+                  </a:txBody>
+                  <a:tcPr/>
+                </a:tc>
+                <a:extLst>
+                  <a:ext uri="{0D108BD9-81ED-4DB2-BD59-A6C34878D82A}">
+                    <a16:rowId xmlns:a16="http://schemas.microsoft.com/office/drawing/2014/main" val="1281673482"/>
+                  </a:ext>
+                </a:extLst>
+              </a:tr>
+              <a:tr h="370840">
+                <a:tc>
+                  <a:txBody>
+                    <a:bodyPr/>
+                    <a:lstStyle/>
+                    <a:p>
+                      <a:r>
+                        <a:rPr lang="en-GB"/>
+                        <a:t>User 9</a:t>
+                      </a:r>
+                    </a:p>
+                  </a:txBody>
+                  <a:tcPr/>
+                </a:tc>
+                <a:tc>
+                  <a:txBody>
+                    <a:bodyPr/>
+                    <a:lstStyle/>
+                    <a:p>
+                      <a:r>
+                        <a:rPr lang="en-GB"/>
+                        <a:t>10</a:t>
+                      </a:r>
+                    </a:p>
+                  </a:txBody>
+                  <a:tcPr/>
+                </a:tc>
+                <a:tc>
+                  <a:txBody>
+                    <a:bodyPr/>
+                    <a:lstStyle/>
+                    <a:p>
+                      <a:r>
+                        <a:rPr lang="en-GB"/>
+                        <a:t>25</a:t>
+                      </a:r>
+                    </a:p>
+                  </a:txBody>
+                  <a:tcPr/>
+                </a:tc>
+                <a:tc>
+                  <a:txBody>
+                    <a:bodyPr/>
+                    <a:lstStyle/>
+                    <a:p>
+                      <a:r>
+                        <a:rPr lang="en-GB"/>
+                        <a:t>50</a:t>
+                      </a:r>
+                    </a:p>
+                  </a:txBody>
+                  <a:tcPr/>
+                </a:tc>
+                <a:tc>
+                  <a:txBody>
+                    <a:bodyPr/>
+                    <a:lstStyle/>
+                    <a:p>
+                      <a:r>
+                        <a:rPr lang="en-GB"/>
+                        <a:t>50</a:t>
+                      </a:r>
+                    </a:p>
+                  </a:txBody>
+                  <a:tcPr/>
+                </a:tc>
+                <a:tc>
+                  <a:txBody>
+                    <a:bodyPr/>
+                    <a:lstStyle/>
+                    <a:p>
+                      <a:r>
+                        <a:rPr lang="en-GB"/>
+                        <a:t>25</a:t>
+                      </a:r>
+                    </a:p>
+                  </a:txBody>
+                  <a:tcPr/>
+                </a:tc>
+                <a:extLst>
+                  <a:ext uri="{0D108BD9-81ED-4DB2-BD59-A6C34878D82A}">
+                    <a16:rowId xmlns:a16="http://schemas.microsoft.com/office/drawing/2014/main" val="1004390491"/>
+                  </a:ext>
+                </a:extLst>
+              </a:tr>
+              <a:tr h="370840">
+                <a:tc>
+                  <a:txBody>
+                    <a:bodyPr/>
+                    <a:lstStyle/>
+                    <a:p>
+                      <a:r>
+                        <a:rPr lang="en-GB"/>
+                        <a:t>User 10</a:t>
+                      </a:r>
+                    </a:p>
+                  </a:txBody>
+                  <a:tcPr/>
+                </a:tc>
+                <a:tc>
+                  <a:txBody>
+                    <a:bodyPr/>
+                    <a:lstStyle/>
+                    <a:p>
+                      <a:r>
+                        <a:rPr lang="en-GB"/>
+                        <a:t>10</a:t>
+                      </a:r>
+                    </a:p>
+                  </a:txBody>
+                  <a:tcPr/>
+                </a:tc>
+                <a:tc>
+                  <a:txBody>
+                    <a:bodyPr/>
+                    <a:lstStyle/>
+                    <a:p>
+                      <a:r>
+                        <a:rPr lang="en-GB"/>
+                        <a:t>25</a:t>
+                      </a:r>
+                    </a:p>
+                  </a:txBody>
+                  <a:tcPr/>
+                </a:tc>
+                <a:tc>
+                  <a:txBody>
+                    <a:bodyPr/>
+                    <a:lstStyle/>
+                    <a:p>
+                      <a:r>
+                        <a:rPr lang="en-GB"/>
+                        <a:t>50</a:t>
+                      </a:r>
+                    </a:p>
+                  </a:txBody>
+                  <a:tcPr/>
+                </a:tc>
+                <a:tc>
+                  <a:txBody>
+                    <a:bodyPr/>
+                    <a:lstStyle/>
+                    <a:p>
+                      <a:r>
+                        <a:rPr lang="en-GB"/>
+                        <a:t>100</a:t>
+                      </a:r>
+                    </a:p>
+                  </a:txBody>
+                  <a:tcPr/>
+                </a:tc>
+                <a:tc>
+                  <a:txBody>
+                    <a:bodyPr/>
+                    <a:lstStyle/>
+                    <a:p>
+                      <a:r>
+                        <a:rPr lang="en-GB"/>
+                        <a:t>25</a:t>
+                      </a:r>
+                    </a:p>
+                  </a:txBody>
+                  <a:tcPr/>
+                </a:tc>
+                <a:extLst>
+                  <a:ext uri="{0D108BD9-81ED-4DB2-BD59-A6C34878D82A}">
+                    <a16:rowId xmlns:a16="http://schemas.microsoft.com/office/drawing/2014/main" val="1235920090"/>
+                  </a:ext>
+                </a:extLst>
+              </a:tr>
+              <a:tr h="370840">
+                <a:tc>
+                  <a:txBody>
+                    <a:bodyPr/>
+                    <a:lstStyle/>
+                    <a:p>
+                      <a:r>
+                        <a:rPr lang="en-GB"/>
+                        <a:t>User 11</a:t>
+                      </a:r>
+                    </a:p>
+                  </a:txBody>
+                  <a:tcPr/>
+                </a:tc>
+                <a:tc>
+                  <a:txBody>
+                    <a:bodyPr/>
+                    <a:lstStyle/>
+                    <a:p>
+                      <a:r>
+                        <a:rPr lang="en-GB"/>
+                        <a:t>9</a:t>
+                      </a:r>
+                    </a:p>
+                  </a:txBody>
+                  <a:tcPr/>
+                </a:tc>
+                <a:tc>
+                  <a:txBody>
+                    <a:bodyPr/>
+                    <a:lstStyle/>
+                    <a:p>
+                      <a:r>
+                        <a:rPr lang="en-GB"/>
+                        <a:t>100</a:t>
+                      </a:r>
+                    </a:p>
+                  </a:txBody>
+                  <a:tcPr/>
+                </a:tc>
+                <a:tc>
+                  <a:txBody>
+                    <a:bodyPr/>
+                    <a:lstStyle/>
+                    <a:p>
+                      <a:r>
+                        <a:rPr lang="en-GB"/>
+                        <a:t>100</a:t>
+                      </a:r>
+                    </a:p>
+                  </a:txBody>
+                  <a:tcPr/>
+                </a:tc>
+                <a:tc>
+                  <a:txBody>
+                    <a:bodyPr/>
+                    <a:lstStyle/>
+                    <a:p>
+                      <a:r>
+                        <a:rPr lang="en-GB"/>
+                        <a:t>52</a:t>
+                      </a:r>
+                    </a:p>
+                  </a:txBody>
+                  <a:tcPr/>
+                </a:tc>
+                <a:tc>
+                  <a:txBody>
+                    <a:bodyPr/>
+                    <a:lstStyle/>
+                    <a:p>
+                      <a:r>
+                        <a:rPr lang="en-GB"/>
+                        <a:t>25</a:t>
+                      </a:r>
+                    </a:p>
+                  </a:txBody>
+                  <a:tcPr/>
+                </a:tc>
+                <a:extLst>
+                  <a:ext uri="{0D108BD9-81ED-4DB2-BD59-A6C34878D82A}">
+                    <a16:rowId xmlns:a16="http://schemas.microsoft.com/office/drawing/2014/main" val="1323763990"/>
+                  </a:ext>
+                </a:extLst>
+              </a:tr>
+              <a:tr h="370840">
+                <a:tc>
+                  <a:txBody>
+                    <a:bodyPr/>
+                    <a:lstStyle/>
+                    <a:p>
+                      <a:r>
+                        <a:rPr lang="en-GB"/>
+                        <a:t>User 12</a:t>
+                      </a:r>
+                    </a:p>
+                  </a:txBody>
+                  <a:tcPr/>
+                </a:tc>
+                <a:tc>
+                  <a:txBody>
+                    <a:bodyPr/>
+                    <a:lstStyle/>
+                    <a:p>
+                      <a:r>
+                        <a:rPr lang="en-GB"/>
+                        <a:t>6</a:t>
+                      </a:r>
+                    </a:p>
+                  </a:txBody>
+                  <a:tcPr/>
+                </a:tc>
+                <a:tc>
+                  <a:txBody>
+                    <a:bodyPr/>
+                    <a:lstStyle/>
+                    <a:p>
+                      <a:r>
+                        <a:rPr lang="en-GB"/>
+                        <a:t>58</a:t>
+                      </a:r>
+                    </a:p>
+                  </a:txBody>
+                  <a:tcPr/>
+                </a:tc>
+                <a:tc>
+                  <a:txBody>
+                    <a:bodyPr/>
+                    <a:lstStyle/>
+                    <a:p>
+                      <a:r>
+                        <a:rPr lang="en-GB"/>
+                        <a:t>50</a:t>
+                      </a:r>
+                    </a:p>
+                  </a:txBody>
+                  <a:tcPr/>
+                </a:tc>
+                <a:tc>
+                  <a:txBody>
+                    <a:bodyPr/>
+                    <a:lstStyle/>
+                    <a:p>
+                      <a:r>
+                        <a:rPr lang="en-GB"/>
+                        <a:t>50</a:t>
+                      </a:r>
+                    </a:p>
+                  </a:txBody>
+                  <a:tcPr/>
+                </a:tc>
+                <a:tc>
+                  <a:txBody>
+                    <a:bodyPr/>
+                    <a:lstStyle/>
+                    <a:p>
+                      <a:r>
+                        <a:rPr lang="en-GB"/>
+                        <a:t>36</a:t>
+                      </a:r>
+                    </a:p>
+                  </a:txBody>
+                  <a:tcPr/>
+                </a:tc>
+                <a:extLst>
+                  <a:ext uri="{0D108BD9-81ED-4DB2-BD59-A6C34878D82A}">
+                    <a16:rowId xmlns:a16="http://schemas.microsoft.com/office/drawing/2014/main" val="1402155640"/>
+                  </a:ext>
+                </a:extLst>
+              </a:tr>
+              <a:tr h="370840">
+                <a:tc>
+                  <a:txBody>
+                    <a:bodyPr/>
+                    <a:lstStyle/>
+                    <a:p>
+                      <a:r>
+                        <a:rPr lang="en-GB"/>
+                        <a:t>User 13</a:t>
+                      </a:r>
+                    </a:p>
+                  </a:txBody>
+                  <a:tcPr/>
+                </a:tc>
+                <a:tc>
+                  <a:txBody>
+                    <a:bodyPr/>
+                    <a:lstStyle/>
+                    <a:p>
+                      <a:r>
+                        <a:rPr lang="en-GB"/>
+                        <a:t>10</a:t>
+                      </a:r>
+                    </a:p>
+                  </a:txBody>
+                  <a:tcPr/>
+                </a:tc>
+                <a:tc>
+                  <a:txBody>
+                    <a:bodyPr/>
+                    <a:lstStyle/>
+                    <a:p>
+                      <a:r>
+                        <a:rPr lang="en-GB"/>
+                        <a:t>25</a:t>
+                      </a:r>
+                    </a:p>
+                  </a:txBody>
+                  <a:tcPr/>
+                </a:tc>
+                <a:tc>
+                  <a:txBody>
+                    <a:bodyPr/>
+                    <a:lstStyle/>
+                    <a:p>
+                      <a:r>
+                        <a:rPr lang="en-GB"/>
+                        <a:t>6</a:t>
+                      </a:r>
+                    </a:p>
+                  </a:txBody>
+                  <a:tcPr/>
+                </a:tc>
+                <a:tc>
+                  <a:txBody>
+                    <a:bodyPr/>
+                    <a:lstStyle/>
+                    <a:p>
+                      <a:r>
+                        <a:rPr lang="en-GB"/>
+                        <a:t>30</a:t>
+                      </a:r>
+                    </a:p>
+                  </a:txBody>
+                  <a:tcPr/>
+                </a:tc>
+                <a:tc>
+                  <a:txBody>
+                    <a:bodyPr/>
+                    <a:lstStyle/>
+                    <a:p>
+                      <a:r>
+                        <a:rPr lang="en-GB"/>
+                        <a:t>57</a:t>
+                      </a:r>
+                    </a:p>
+                  </a:txBody>
+                  <a:tcPr/>
+                </a:tc>
+                <a:extLst>
+                  <a:ext uri="{0D108BD9-81ED-4DB2-BD59-A6C34878D82A}">
+                    <a16:rowId xmlns:a16="http://schemas.microsoft.com/office/drawing/2014/main" val="1392929125"/>
+                  </a:ext>
+                </a:extLst>
+              </a:tr>
+              <a:tr h="370840">
+                <a:tc>
+                  <a:txBody>
+                    <a:bodyPr/>
+                    <a:lstStyle/>
+                    <a:p>
+                      <a:r>
+                        <a:rPr lang="en-GB"/>
+                        <a:t>User 14</a:t>
+                      </a:r>
+                    </a:p>
+                  </a:txBody>
+                  <a:tcPr/>
+                </a:tc>
+                <a:tc>
+                  <a:txBody>
+                    <a:bodyPr/>
+                    <a:lstStyle/>
+                    <a:p>
+                      <a:r>
+                        <a:rPr lang="en-GB"/>
+                        <a:t>20</a:t>
+                      </a:r>
+                    </a:p>
+                  </a:txBody>
+                  <a:tcPr/>
+                </a:tc>
+                <a:tc>
+                  <a:txBody>
+                    <a:bodyPr/>
+                    <a:lstStyle/>
+                    <a:p>
+                      <a:r>
+                        <a:rPr lang="en-GB"/>
+                        <a:t>100</a:t>
+                      </a:r>
+                    </a:p>
+                  </a:txBody>
+                  <a:tcPr/>
+                </a:tc>
+                <a:tc>
+                  <a:txBody>
+                    <a:bodyPr/>
+                    <a:lstStyle/>
+                    <a:p>
+                      <a:r>
+                        <a:rPr lang="en-GB"/>
+                        <a:t>100</a:t>
+                      </a:r>
+                    </a:p>
+                  </a:txBody>
+                  <a:tcPr/>
+                </a:tc>
+                <a:tc>
+                  <a:txBody>
+                    <a:bodyPr/>
+                    <a:lstStyle/>
+                    <a:p>
+                      <a:r>
+                        <a:rPr lang="en-GB"/>
+                        <a:t>100</a:t>
+                      </a:r>
+                    </a:p>
+                  </a:txBody>
+                  <a:tcPr/>
+                </a:tc>
+                <a:tc>
+                  <a:txBody>
+                    <a:bodyPr/>
+                    <a:lstStyle/>
+                    <a:p>
+                      <a:r>
+                        <a:rPr lang="en-GB"/>
+                        <a:t>100</a:t>
+                      </a:r>
+                    </a:p>
+                  </a:txBody>
+                  <a:tcPr/>
+                </a:tc>
+                <a:extLst>
+                  <a:ext uri="{0D108BD9-81ED-4DB2-BD59-A6C34878D82A}">
+                    <a16:rowId xmlns:a16="http://schemas.microsoft.com/office/drawing/2014/main" val="3701806738"/>
+                  </a:ext>
+                </a:extLst>
+              </a:tr>
+              <a:tr h="370840">
+                <a:tc>
+                  <a:txBody>
+                    <a:bodyPr/>
+                    <a:lstStyle/>
+                    <a:p>
+                      <a:r>
+                        <a:rPr lang="en-GB"/>
+                        <a:t>User 15</a:t>
+                      </a:r>
+                    </a:p>
+                  </a:txBody>
+                  <a:tcPr/>
+                </a:tc>
+                <a:tc>
+                  <a:txBody>
+                    <a:bodyPr/>
+                    <a:lstStyle/>
+                    <a:p>
+                      <a:r>
+                        <a:rPr lang="en-GB"/>
+                        <a:t>20</a:t>
+                      </a:r>
+                    </a:p>
+                  </a:txBody>
+                  <a:tcPr/>
+                </a:tc>
+                <a:tc>
+                  <a:txBody>
+                    <a:bodyPr/>
+                    <a:lstStyle/>
+                    <a:p>
+                      <a:r>
+                        <a:rPr lang="en-GB"/>
+                        <a:t>100</a:t>
+                      </a:r>
+                    </a:p>
+                  </a:txBody>
+                  <a:tcPr/>
+                </a:tc>
+                <a:tc>
+                  <a:txBody>
+                    <a:bodyPr/>
+                    <a:lstStyle/>
+                    <a:p>
+                      <a:r>
+                        <a:rPr lang="en-GB"/>
+                        <a:t>0</a:t>
+                      </a:r>
+                    </a:p>
+                  </a:txBody>
+                  <a:tcPr/>
+                </a:tc>
+                <a:tc>
+                  <a:txBody>
+                    <a:bodyPr/>
+                    <a:lstStyle/>
+                    <a:p>
+                      <a:r>
+                        <a:rPr lang="en-GB"/>
+                        <a:t>1</a:t>
+                      </a:r>
+                    </a:p>
+                  </a:txBody>
+                  <a:tcPr/>
+                </a:tc>
+                <a:tc>
+                  <a:txBody>
+                    <a:bodyPr/>
+                    <a:lstStyle/>
+                    <a:p>
+                      <a:r>
+                        <a:rPr lang="en-GB"/>
+                        <a:t>100</a:t>
+                      </a:r>
+                    </a:p>
+                  </a:txBody>
+                  <a:tcPr/>
+                </a:tc>
+                <a:extLst>
+                  <a:ext uri="{0D108BD9-81ED-4DB2-BD59-A6C34878D82A}">
+                    <a16:rowId xmlns:a16="http://schemas.microsoft.com/office/drawing/2014/main" val="1937506733"/>
+                  </a:ext>
+                </a:extLst>
+              </a:tr>
+              <a:tr h="370840">
+                <a:tc>
+                  <a:txBody>
+                    <a:bodyPr/>
+                    <a:lstStyle/>
+                    <a:p>
+                      <a:r>
+                        <a:rPr lang="en-GB"/>
+                        <a:t>User 16</a:t>
+                      </a:r>
+                    </a:p>
+                  </a:txBody>
+                  <a:tcPr/>
+                </a:tc>
+                <a:tc>
+                  <a:txBody>
+                    <a:bodyPr/>
+                    <a:lstStyle/>
+                    <a:p>
+                      <a:r>
+                        <a:rPr lang="en-GB"/>
+                        <a:t>10</a:t>
+                      </a:r>
+                    </a:p>
+                  </a:txBody>
+                  <a:tcPr/>
+                </a:tc>
+                <a:tc>
+                  <a:txBody>
+                    <a:bodyPr/>
+                    <a:lstStyle/>
+                    <a:p>
+                      <a:r>
+                        <a:rPr lang="en-GB"/>
+                        <a:t>25</a:t>
+                      </a:r>
+                    </a:p>
+                  </a:txBody>
+                  <a:tcPr/>
+                </a:tc>
+                <a:tc>
+                  <a:txBody>
+                    <a:bodyPr/>
+                    <a:lstStyle/>
+                    <a:p>
+                      <a:r>
+                        <a:rPr lang="en-GB"/>
+                        <a:t>50</a:t>
+                      </a:r>
+                    </a:p>
+                  </a:txBody>
+                  <a:tcPr/>
+                </a:tc>
+                <a:tc>
+                  <a:txBody>
+                    <a:bodyPr/>
+                    <a:lstStyle/>
+                    <a:p>
+                      <a:r>
+                        <a:rPr lang="en-GB"/>
+                        <a:t>50</a:t>
+                      </a:r>
+                    </a:p>
+                  </a:txBody>
+                  <a:tcPr/>
+                </a:tc>
+                <a:tc>
+                  <a:txBody>
+                    <a:bodyPr/>
+                    <a:lstStyle/>
+                    <a:p>
+                      <a:r>
+                        <a:rPr lang="en-GB"/>
+                        <a:t>25</a:t>
+                      </a:r>
+                    </a:p>
+                  </a:txBody>
+                  <a:tcPr/>
+                </a:tc>
+                <a:extLst>
+                  <a:ext uri="{0D108BD9-81ED-4DB2-BD59-A6C34878D82A}">
+                    <a16:rowId xmlns:a16="http://schemas.microsoft.com/office/drawing/2014/main" val="1242168105"/>
+                  </a:ext>
+                </a:extLst>
+              </a:tr>
+              <a:tr h="370840">
+                <a:tc>
+                  <a:txBody>
+                    <a:bodyPr/>
+                    <a:lstStyle/>
+                    <a:p>
+                      <a:r>
+                        <a:rPr lang="en-GB"/>
+                        <a:t>User 17</a:t>
+                      </a:r>
+                    </a:p>
+                  </a:txBody>
+                  <a:tcPr/>
+                </a:tc>
+                <a:tc>
+                  <a:txBody>
+                    <a:bodyPr/>
+                    <a:lstStyle/>
+                    <a:p>
+                      <a:r>
+                        <a:rPr lang="en-GB"/>
+                        <a:t>15</a:t>
+                      </a:r>
+                    </a:p>
+                  </a:txBody>
+                  <a:tcPr/>
+                </a:tc>
+                <a:tc>
+                  <a:txBody>
+                    <a:bodyPr/>
+                    <a:lstStyle/>
+                    <a:p>
+                      <a:r>
+                        <a:rPr lang="en-GB"/>
+                        <a:t>42</a:t>
+                      </a:r>
+                    </a:p>
+                  </a:txBody>
+                  <a:tcPr/>
+                </a:tc>
+                <a:tc>
+                  <a:txBody>
+                    <a:bodyPr/>
+                    <a:lstStyle/>
+                    <a:p>
+                      <a:r>
+                        <a:rPr lang="en-GB"/>
+                        <a:t>52</a:t>
+                      </a:r>
+                    </a:p>
+                  </a:txBody>
+                  <a:tcPr/>
+                </a:tc>
+                <a:tc>
+                  <a:txBody>
+                    <a:bodyPr/>
+                    <a:lstStyle/>
+                    <a:p>
+                      <a:r>
+                        <a:rPr lang="en-GB"/>
+                        <a:t>50</a:t>
+                      </a:r>
+                    </a:p>
+                  </a:txBody>
+                  <a:tcPr/>
+                </a:tc>
+                <a:tc>
+                  <a:txBody>
+                    <a:bodyPr/>
+                    <a:lstStyle/>
+                    <a:p>
+                      <a:r>
+                        <a:rPr lang="en-GB"/>
+                        <a:t>25</a:t>
+                      </a:r>
+                    </a:p>
+                  </a:txBody>
+                  <a:tcPr/>
+                </a:tc>
+                <a:extLst>
+                  <a:ext uri="{0D108BD9-81ED-4DB2-BD59-A6C34878D82A}">
+                    <a16:rowId xmlns:a16="http://schemas.microsoft.com/office/drawing/2014/main" val="2133965958"/>
+                  </a:ext>
+                </a:extLst>
+              </a:tr>
+              <a:tr h="370840">
+                <a:tc>
+                  <a:txBody>
+                    <a:bodyPr/>
+                    <a:lstStyle/>
+                    <a:p>
+                      <a:r>
+                        <a:rPr lang="en-GB"/>
+                        <a:t>User 18</a:t>
+                      </a:r>
+                    </a:p>
+                  </a:txBody>
+                  <a:tcPr/>
+                </a:tc>
+                <a:tc>
+                  <a:txBody>
+                    <a:bodyPr/>
+                    <a:lstStyle/>
+                    <a:p>
+                      <a:r>
+                        <a:rPr lang="en-GB"/>
+                        <a:t>15</a:t>
+                      </a:r>
+                    </a:p>
+                  </a:txBody>
+                  <a:tcPr/>
+                </a:tc>
+                <a:tc>
+                  <a:txBody>
+                    <a:bodyPr/>
+                    <a:lstStyle/>
+                    <a:p>
+                      <a:r>
+                        <a:rPr lang="en-GB"/>
+                        <a:t>100</a:t>
+                      </a:r>
+                    </a:p>
+                  </a:txBody>
+                  <a:tcPr/>
+                </a:tc>
+                <a:tc>
+                  <a:txBody>
+                    <a:bodyPr/>
+                    <a:lstStyle/>
+                    <a:p>
+                      <a:r>
+                        <a:rPr lang="en-GB"/>
+                        <a:t>5</a:t>
+                      </a:r>
+                    </a:p>
+                  </a:txBody>
+                  <a:tcPr/>
+                </a:tc>
+                <a:tc>
+                  <a:txBody>
+                    <a:bodyPr/>
+                    <a:lstStyle/>
+                    <a:p>
+                      <a:r>
+                        <a:rPr lang="en-GB"/>
+                        <a:t>1</a:t>
+                      </a:r>
+                    </a:p>
+                  </a:txBody>
+                  <a:tcPr/>
+                </a:tc>
+                <a:tc>
+                  <a:txBody>
+                    <a:bodyPr/>
+                    <a:lstStyle/>
+                    <a:p>
+                      <a:r>
+                        <a:rPr lang="en-GB"/>
+                        <a:t>87</a:t>
+                      </a:r>
+                    </a:p>
+                  </a:txBody>
+                  <a:tcPr/>
+                </a:tc>
+                <a:extLst>
+                  <a:ext uri="{0D108BD9-81ED-4DB2-BD59-A6C34878D82A}">
+                    <a16:rowId xmlns:a16="http://schemas.microsoft.com/office/drawing/2014/main" val="423095059"/>
+                  </a:ext>
+                </a:extLst>
+              </a:tr>
+            </a:tbl>
+          </a:graphicData>
+        </a:graphic>
+      </p:graphicFrame>
+    </p:spTree>
+    <p:extLst>
+      <p:ext uri="{BB962C8B-B14F-4D97-AF65-F5344CB8AC3E}">
+        <p14:creationId xmlns:p14="http://schemas.microsoft.com/office/powerpoint/2010/main" val="2546703248"/>
+      </p:ext>
+    </p:extLst>
+  </p:cSld>
+  <p:clrMapOvr>
+    <a:masterClrMapping/>
+  </p:clrMapOvr>
+</p:sld>
+</file>
+
+<file path=ppt/slides/slide8.xml><?xml version="1.0" encoding="utf-8"?>
+<p:sld xmlns:a="http://schemas.openxmlformats.org/drawingml/2006/main" xmlns:r="http://schemas.openxmlformats.org/officeDocument/2006/relationships" xmlns:p="http://schemas.openxmlformats.org/presentationml/2006/main">
+  <p:cSld>
+    <p:spTree>
+      <p:nvGrpSpPr>
+        <p:cNvPr id="1" name=""/>
+        <p:cNvGrpSpPr/>
+        <p:nvPr/>
+      </p:nvGrpSpPr>
+      <p:grpSpPr>
+        <a:xfrm>
+          <a:off x="0" y="0"/>
+          <a:ext cx="0" cy="0"/>
+          <a:chOff x="0" y="0"/>
+          <a:chExt cx="0" cy="0"/>
+        </a:xfrm>
+      </p:grpSpPr>
+      <p:sp>
+        <p:nvSpPr>
+          <p:cNvPr id="2" name="Title 1">
+            <a:extLst>
+              <a:ext uri="{FF2B5EF4-FFF2-40B4-BE49-F238E27FC236}">
+                <a16:creationId xmlns:a16="http://schemas.microsoft.com/office/drawing/2014/main" id="{F1577E1F-78E5-3C96-60BA-0D94562BDCEA}"/>
+              </a:ext>
+            </a:extLst>
+          </p:cNvPr>
+          <p:cNvSpPr>
+            <a:spLocks noGrp="1"/>
+          </p:cNvSpPr>
+          <p:nvPr>
+            <p:ph type="title"/>
+          </p:nvPr>
+        </p:nvSpPr>
+        <p:spPr/>
+        <p:txBody>
+          <a:bodyPr/>
+          <a:lstStyle/>
+          <a:p>
+            <a:endParaRPr lang="en-GB"/>
+          </a:p>
+        </p:txBody>
+      </p:sp>
+      <p:graphicFrame>
+        <p:nvGraphicFramePr>
+          <p:cNvPr id="4" name="Content Placeholder 3">
+            <a:extLst>
+              <a:ext uri="{FF2B5EF4-FFF2-40B4-BE49-F238E27FC236}">
+                <a16:creationId xmlns:a16="http://schemas.microsoft.com/office/drawing/2014/main" id="{34C4F811-0926-ABC1-50B8-2A7663187066}"/>
+              </a:ext>
+            </a:extLst>
+          </p:cNvPr>
+          <p:cNvGraphicFramePr>
+            <a:graphicFrameLocks noGrp="1"/>
+          </p:cNvGraphicFramePr>
+          <p:nvPr>
+            <p:ph idx="1"/>
+            <p:extLst>
+              <p:ext uri="{D42A27DB-BD31-4B8C-83A1-F6EECF244321}">
+                <p14:modId xmlns:p14="http://schemas.microsoft.com/office/powerpoint/2010/main" val="1738122715"/>
+              </p:ext>
+            </p:extLst>
+          </p:nvPr>
+        </p:nvGraphicFramePr>
+        <p:xfrm>
+          <a:off x="-1324431" y="-389618"/>
+          <a:ext cx="9307288" cy="8140244"/>
+        </p:xfrm>
+        <a:graphic>
+          <a:graphicData uri="http://schemas.openxmlformats.org/drawingml/2006/table">
+            <a:tbl>
+              <a:tblPr firstRow="1" bandRow="1">
+                <a:tableStyleId>{5C22544A-7EE6-4342-B048-85BDC9FD1C3A}</a:tableStyleId>
+              </a:tblPr>
+              <a:tblGrid>
+                <a:gridCol w="1163411">
+                  <a:extLst>
+                    <a:ext uri="{9D8B030D-6E8A-4147-A177-3AD203B41FA5}">
+                      <a16:colId xmlns:a16="http://schemas.microsoft.com/office/drawing/2014/main" val="1690320644"/>
+                    </a:ext>
+                  </a:extLst>
+                </a:gridCol>
+                <a:gridCol w="1163411">
+                  <a:extLst>
+                    <a:ext uri="{9D8B030D-6E8A-4147-A177-3AD203B41FA5}">
+                      <a16:colId xmlns:a16="http://schemas.microsoft.com/office/drawing/2014/main" val="559780507"/>
+                    </a:ext>
+                  </a:extLst>
+                </a:gridCol>
+                <a:gridCol w="1163411">
+                  <a:extLst>
+                    <a:ext uri="{9D8B030D-6E8A-4147-A177-3AD203B41FA5}">
+                      <a16:colId xmlns:a16="http://schemas.microsoft.com/office/drawing/2014/main" val="1595608466"/>
+                    </a:ext>
+                  </a:extLst>
+                </a:gridCol>
+                <a:gridCol w="1163411">
+                  <a:extLst>
+                    <a:ext uri="{9D8B030D-6E8A-4147-A177-3AD203B41FA5}">
+                      <a16:colId xmlns:a16="http://schemas.microsoft.com/office/drawing/2014/main" val="4252701340"/>
+                    </a:ext>
+                  </a:extLst>
+                </a:gridCol>
+                <a:gridCol w="1163411">
+                  <a:extLst>
+                    <a:ext uri="{9D8B030D-6E8A-4147-A177-3AD203B41FA5}">
+                      <a16:colId xmlns:a16="http://schemas.microsoft.com/office/drawing/2014/main" val="3245684239"/>
+                    </a:ext>
+                  </a:extLst>
+                </a:gridCol>
+                <a:gridCol w="1163411">
+                  <a:extLst>
+                    <a:ext uri="{9D8B030D-6E8A-4147-A177-3AD203B41FA5}">
+                      <a16:colId xmlns:a16="http://schemas.microsoft.com/office/drawing/2014/main" val="1597645529"/>
+                    </a:ext>
+                  </a:extLst>
+                </a:gridCol>
+                <a:gridCol w="1163411">
+                  <a:extLst>
+                    <a:ext uri="{9D8B030D-6E8A-4147-A177-3AD203B41FA5}">
+                      <a16:colId xmlns:a16="http://schemas.microsoft.com/office/drawing/2014/main" val="1213379075"/>
+                    </a:ext>
+                  </a:extLst>
+                </a:gridCol>
+                <a:gridCol w="1163411">
+                  <a:extLst>
+                    <a:ext uri="{9D8B030D-6E8A-4147-A177-3AD203B41FA5}">
+                      <a16:colId xmlns:a16="http://schemas.microsoft.com/office/drawing/2014/main" val="1579922913"/>
+                    </a:ext>
+                  </a:extLst>
+                </a:gridCol>
+              </a:tblGrid>
+              <a:tr h="422870">
+                <a:tc>
+                  <a:txBody>
+                    <a:bodyPr/>
+                    <a:lstStyle/>
+                    <a:p>
+                      <a:r>
+                        <a:rPr lang="en-GB"/>
+                        <a:t>User</a:t>
+                      </a:r>
+                    </a:p>
+                  </a:txBody>
+                  <a:tcPr/>
+                </a:tc>
+                <a:tc>
+                  <a:txBody>
+                    <a:bodyPr/>
+                    <a:lstStyle/>
+                    <a:p>
+                      <a:r>
+                        <a:rPr lang="en-GB"/>
+                        <a:t>Option 1</a:t>
+                      </a:r>
+                    </a:p>
+                  </a:txBody>
+                  <a:tcPr/>
+                </a:tc>
+                <a:tc>
+                  <a:txBody>
+                    <a:bodyPr/>
+                    <a:lstStyle/>
+                    <a:p>
+                      <a:r>
+                        <a:rPr lang="en-GB"/>
+                        <a:t>Option 2</a:t>
+                      </a:r>
+                    </a:p>
+                  </a:txBody>
+                  <a:tcPr/>
+                </a:tc>
+                <a:tc>
+                  <a:txBody>
+                    <a:bodyPr/>
+                    <a:lstStyle/>
+                    <a:p>
+                      <a:r>
+                        <a:rPr lang="en-GB"/>
+                        <a:t>Option 3</a:t>
+                      </a:r>
+                    </a:p>
+                  </a:txBody>
+                  <a:tcPr/>
+                </a:tc>
+                <a:tc>
+                  <a:txBody>
+                    <a:bodyPr/>
+                    <a:lstStyle/>
+                    <a:p>
+                      <a:r>
+                        <a:rPr lang="en-GB"/>
+                        <a:t>Option 4</a:t>
+                      </a:r>
+                    </a:p>
+                  </a:txBody>
+                  <a:tcPr/>
+                </a:tc>
+                <a:tc>
+                  <a:txBody>
+                    <a:bodyPr/>
+                    <a:lstStyle/>
+                    <a:p>
+                      <a:r>
+                        <a:rPr lang="en-GB"/>
+                        <a:t>Option 5</a:t>
+                      </a:r>
+                    </a:p>
+                  </a:txBody>
+                  <a:tcPr/>
+                </a:tc>
+                <a:tc>
+                  <a:txBody>
+                    <a:bodyPr/>
+                    <a:lstStyle/>
+                    <a:p>
+                      <a:r>
+                        <a:rPr lang="en-GB"/>
+                        <a:t>Option 6</a:t>
+                      </a:r>
+                    </a:p>
+                  </a:txBody>
+                  <a:tcPr/>
+                </a:tc>
+                <a:tc>
+                  <a:txBody>
+                    <a:bodyPr/>
+                    <a:lstStyle/>
+                    <a:p>
+                      <a:r>
+                        <a:rPr lang="en-GB"/>
+                        <a:t>Option 7</a:t>
+                      </a:r>
+                    </a:p>
+                  </a:txBody>
+                  <a:tcPr/>
+                </a:tc>
+                <a:extLst>
+                  <a:ext uri="{0D108BD9-81ED-4DB2-BD59-A6C34878D82A}">
+                    <a16:rowId xmlns:a16="http://schemas.microsoft.com/office/drawing/2014/main" val="786681107"/>
+                  </a:ext>
+                </a:extLst>
+              </a:tr>
+              <a:tr h="428743">
+                <a:tc>
+                  <a:txBody>
+                    <a:bodyPr/>
+                    <a:lstStyle/>
+                    <a:p>
+                      <a:r>
+                        <a:rPr lang="en-GB"/>
+                        <a:t>User 1</a:t>
+                      </a:r>
+                    </a:p>
+                  </a:txBody>
+                  <a:tcPr/>
+                </a:tc>
+                <a:tc>
+                  <a:txBody>
+                    <a:bodyPr/>
+                    <a:lstStyle/>
+                    <a:p>
+                      <a:r>
+                        <a:rPr lang="en-GB">
+                          <a:sym typeface="Wingdings" panose="05000000000000000000" pitchFamily="2" charset="2"/>
+                        </a:rPr>
+                        <a:t>X</a:t>
+                      </a:r>
+                      <a:endParaRPr lang="en-GB"/>
+                    </a:p>
+                  </a:txBody>
+                  <a:tcPr/>
+                </a:tc>
+                <a:tc>
+                  <a:txBody>
+                    <a:bodyPr/>
+                    <a:lstStyle/>
+                    <a:p>
+                      <a:pPr marL="0" marR="0" lvl="0" indent="0" algn="l" defTabSz="914400" rtl="0" eaLnBrk="1" fontAlgn="auto" latinLnBrk="0" hangingPunct="1">
+                        <a:lnSpc>
+                          <a:spcPct val="100000"/>
+                        </a:lnSpc>
+                        <a:spcBef>
+                          <a:spcPts val="0"/>
+                        </a:spcBef>
+                        <a:spcAft>
+                          <a:spcPts val="0"/>
+                        </a:spcAft>
+                        <a:buClrTx/>
+                        <a:buSzTx/>
+                        <a:buFontTx/>
+                        <a:buNone/>
+                        <a:tabLst/>
+                        <a:defRPr/>
+                      </a:pPr>
+                      <a:r>
+                        <a:rPr lang="en-GB">
+                          <a:sym typeface="Wingdings" panose="05000000000000000000" pitchFamily="2" charset="2"/>
+                        </a:rPr>
+                        <a:t>X</a:t>
+                      </a:r>
+                      <a:endParaRPr lang="en-GB"/>
+                    </a:p>
+                  </a:txBody>
+                  <a:tcPr/>
+                </a:tc>
+                <a:tc>
+                  <a:txBody>
+                    <a:bodyPr/>
+                    <a:lstStyle/>
+                    <a:p>
+                      <a:pPr marL="0" marR="0" lvl="0" indent="0" algn="l" defTabSz="914400" rtl="0" eaLnBrk="1" fontAlgn="auto" latinLnBrk="0" hangingPunct="1">
+                        <a:lnSpc>
+                          <a:spcPct val="100000"/>
+                        </a:lnSpc>
+                        <a:spcBef>
+                          <a:spcPts val="0"/>
+                        </a:spcBef>
+                        <a:spcAft>
+                          <a:spcPts val="0"/>
+                        </a:spcAft>
+                        <a:buClrTx/>
+                        <a:buSzTx/>
+                        <a:buFontTx/>
+                        <a:buNone/>
+                        <a:tabLst/>
+                        <a:defRPr/>
+                      </a:pPr>
+                      <a:r>
+                        <a:rPr lang="en-GB">
+                          <a:sym typeface="Wingdings" panose="05000000000000000000" pitchFamily="2" charset="2"/>
+                        </a:rPr>
+                        <a:t>X</a:t>
+                      </a:r>
+                      <a:endParaRPr lang="en-GB"/>
+                    </a:p>
+                  </a:txBody>
+                  <a:tcPr/>
+                </a:tc>
+                <a:tc>
+                  <a:txBody>
+                    <a:bodyPr/>
+                    <a:lstStyle/>
+                    <a:p>
+                      <a:pPr marL="0" marR="0" lvl="0" indent="0" algn="l" defTabSz="914400" rtl="0" eaLnBrk="1" fontAlgn="auto" latinLnBrk="0" hangingPunct="1">
+                        <a:lnSpc>
+                          <a:spcPct val="100000"/>
+                        </a:lnSpc>
+                        <a:spcBef>
+                          <a:spcPts val="0"/>
+                        </a:spcBef>
+                        <a:spcAft>
+                          <a:spcPts val="0"/>
+                        </a:spcAft>
+                        <a:buClrTx/>
+                        <a:buSzTx/>
+                        <a:buFontTx/>
+                        <a:buNone/>
+                        <a:tabLst/>
+                        <a:defRPr/>
+                      </a:pPr>
+                      <a:r>
+                        <a:rPr lang="en-GB">
+                          <a:sym typeface="Wingdings" panose="05000000000000000000" pitchFamily="2" charset="2"/>
+                        </a:rPr>
+                        <a:t>X</a:t>
+                      </a:r>
+                      <a:endParaRPr lang="en-GB"/>
+                    </a:p>
+                  </a:txBody>
+                  <a:tcPr/>
+                </a:tc>
+                <a:tc>
+                  <a:txBody>
+                    <a:bodyPr/>
+                    <a:lstStyle/>
+                    <a:p>
+                      <a:pPr marL="0" marR="0" lvl="0" indent="0" algn="l" defTabSz="914400" rtl="0" eaLnBrk="1" fontAlgn="auto" latinLnBrk="0" hangingPunct="1">
+                        <a:lnSpc>
+                          <a:spcPct val="100000"/>
+                        </a:lnSpc>
+                        <a:spcBef>
+                          <a:spcPts val="0"/>
+                        </a:spcBef>
+                        <a:spcAft>
+                          <a:spcPts val="0"/>
+                        </a:spcAft>
+                        <a:buClrTx/>
+                        <a:buSzTx/>
+                        <a:buFontTx/>
+                        <a:buNone/>
+                        <a:tabLst/>
+                        <a:defRPr/>
+                      </a:pPr>
+                      <a:r>
+                        <a:rPr lang="en-GB">
+                          <a:sym typeface="Wingdings" panose="05000000000000000000" pitchFamily="2" charset="2"/>
+                        </a:rPr>
+                        <a:t>X</a:t>
+                      </a:r>
+                      <a:endParaRPr lang="en-GB"/>
+                    </a:p>
+                  </a:txBody>
+                  <a:tcPr/>
+                </a:tc>
+                <a:tc>
+                  <a:txBody>
+                    <a:bodyPr/>
+                    <a:lstStyle/>
+                    <a:p>
+                      <a:pPr marL="0" marR="0" lvl="0" indent="0" algn="l" defTabSz="914400" rtl="0" eaLnBrk="1" fontAlgn="auto" latinLnBrk="0" hangingPunct="1">
+                        <a:lnSpc>
+                          <a:spcPct val="100000"/>
+                        </a:lnSpc>
+                        <a:spcBef>
+                          <a:spcPts val="0"/>
+                        </a:spcBef>
+                        <a:spcAft>
+                          <a:spcPts val="0"/>
+                        </a:spcAft>
+                        <a:buClrTx/>
+                        <a:buSzTx/>
+                        <a:buFontTx/>
+                        <a:buNone/>
+                        <a:tabLst/>
+                        <a:defRPr/>
+                      </a:pPr>
+                      <a:r>
+                        <a:rPr lang="en-GB">
+                          <a:sym typeface="Wingdings" panose="05000000000000000000" pitchFamily="2" charset="2"/>
+                        </a:rPr>
+                        <a:t>X</a:t>
+                      </a:r>
+                      <a:endParaRPr lang="en-GB"/>
+                    </a:p>
+                  </a:txBody>
+                  <a:tcPr/>
+                </a:tc>
+                <a:tc>
+                  <a:txBody>
+                    <a:bodyPr/>
+                    <a:lstStyle/>
+                    <a:p>
+                      <a:endParaRPr lang="en-GB"/>
+                    </a:p>
+                  </a:txBody>
+                  <a:tcPr/>
+                </a:tc>
+                <a:extLst>
+                  <a:ext uri="{0D108BD9-81ED-4DB2-BD59-A6C34878D82A}">
+                    <a16:rowId xmlns:a16="http://schemas.microsoft.com/office/drawing/2014/main" val="4271361335"/>
+                  </a:ext>
+                </a:extLst>
+              </a:tr>
+              <a:tr h="428743">
+                <a:tc>
+                  <a:txBody>
+                    <a:bodyPr/>
+                    <a:lstStyle/>
+                    <a:p>
+                      <a:r>
+                        <a:rPr lang="en-GB"/>
+                        <a:t>User 2</a:t>
+                      </a:r>
+                    </a:p>
+                  </a:txBody>
+                  <a:tcPr/>
+                </a:tc>
+                <a:tc>
+                  <a:txBody>
+                    <a:bodyPr/>
+                    <a:lstStyle/>
+                    <a:p>
+                      <a:pPr marL="0" marR="0" lvl="0" indent="0" algn="l" defTabSz="914400" rtl="0" eaLnBrk="1" fontAlgn="auto" latinLnBrk="0" hangingPunct="1">
+                        <a:lnSpc>
+                          <a:spcPct val="100000"/>
+                        </a:lnSpc>
+                        <a:spcBef>
+                          <a:spcPts val="0"/>
+                        </a:spcBef>
+                        <a:spcAft>
+                          <a:spcPts val="0"/>
+                        </a:spcAft>
+                        <a:buClrTx/>
+                        <a:buSzTx/>
+                        <a:buFontTx/>
+                        <a:buNone/>
+                        <a:tabLst/>
+                        <a:defRPr/>
+                      </a:pPr>
+                      <a:r>
+                        <a:rPr lang="en-GB"/>
+                        <a:t>X</a:t>
+                      </a:r>
+                    </a:p>
+                  </a:txBody>
+                  <a:tcPr/>
+                </a:tc>
+                <a:tc>
+                  <a:txBody>
+                    <a:bodyPr/>
+                    <a:lstStyle/>
+                    <a:p>
+                      <a:r>
+                        <a:rPr lang="en-GB"/>
+                        <a:t>X</a:t>
+                      </a:r>
+                    </a:p>
+                  </a:txBody>
+                  <a:tcPr/>
+                </a:tc>
+                <a:tc>
+                  <a:txBody>
+                    <a:bodyPr/>
+                    <a:lstStyle/>
+                    <a:p>
+                      <a:endParaRPr lang="en-GB"/>
+                    </a:p>
+                  </a:txBody>
+                  <a:tcPr/>
+                </a:tc>
+                <a:tc>
+                  <a:txBody>
+                    <a:bodyPr/>
+                    <a:lstStyle/>
+                    <a:p>
+                      <a:r>
+                        <a:rPr lang="en-GB"/>
+                        <a:t>X</a:t>
+                      </a:r>
+                    </a:p>
+                  </a:txBody>
+                  <a:tcPr/>
+                </a:tc>
+                <a:tc>
+                  <a:txBody>
+                    <a:bodyPr/>
+                    <a:lstStyle/>
+                    <a:p>
+                      <a:r>
+                        <a:rPr lang="en-GB"/>
+                        <a:t>X</a:t>
+                      </a:r>
+                    </a:p>
+                  </a:txBody>
+                  <a:tcPr/>
+                </a:tc>
+                <a:tc>
+                  <a:txBody>
+                    <a:bodyPr/>
+                    <a:lstStyle/>
+                    <a:p>
+                      <a:r>
+                        <a:rPr lang="en-GB"/>
+                        <a:t>X</a:t>
+                      </a:r>
+                    </a:p>
+                  </a:txBody>
+                  <a:tcPr/>
+                </a:tc>
+                <a:tc>
+                  <a:txBody>
+                    <a:bodyPr/>
+                    <a:lstStyle/>
+                    <a:p>
+                      <a:endParaRPr lang="en-GB"/>
+                    </a:p>
+                  </a:txBody>
+                  <a:tcPr/>
+                </a:tc>
+                <a:extLst>
+                  <a:ext uri="{0D108BD9-81ED-4DB2-BD59-A6C34878D82A}">
+                    <a16:rowId xmlns:a16="http://schemas.microsoft.com/office/drawing/2014/main" val="406610565"/>
+                  </a:ext>
+                </a:extLst>
+              </a:tr>
+              <a:tr h="428743">
+                <a:tc>
+                  <a:txBody>
+                    <a:bodyPr/>
+                    <a:lstStyle/>
+                    <a:p>
+                      <a:r>
+                        <a:rPr lang="en-GB"/>
+                        <a:t>User 3</a:t>
+                      </a:r>
+                    </a:p>
+                  </a:txBody>
+                  <a:tcPr/>
+                </a:tc>
+                <a:tc>
+                  <a:txBody>
+                    <a:bodyPr/>
+                    <a:lstStyle/>
+                    <a:p>
+                      <a:r>
+                        <a:rPr lang="en-GB"/>
+                        <a:t>X</a:t>
+                      </a:r>
+                    </a:p>
+                  </a:txBody>
+                  <a:tcPr/>
+                </a:tc>
+                <a:tc>
+                  <a:txBody>
+                    <a:bodyPr/>
+                    <a:lstStyle/>
+                    <a:p>
+                      <a:r>
+                        <a:rPr lang="en-GB"/>
+                        <a:t>X</a:t>
+                      </a:r>
+                    </a:p>
+                  </a:txBody>
+                  <a:tcPr/>
+                </a:tc>
+                <a:tc>
+                  <a:txBody>
+                    <a:bodyPr/>
+                    <a:lstStyle/>
+                    <a:p>
+                      <a:endParaRPr lang="en-GB"/>
+                    </a:p>
+                  </a:txBody>
+                  <a:tcPr/>
+                </a:tc>
+                <a:tc>
+                  <a:txBody>
+                    <a:bodyPr/>
+                    <a:lstStyle/>
+                    <a:p>
+                      <a:endParaRPr lang="en-GB"/>
+                    </a:p>
+                  </a:txBody>
+                  <a:tcPr/>
+                </a:tc>
+                <a:tc>
+                  <a:txBody>
+                    <a:bodyPr/>
+                    <a:lstStyle/>
+                    <a:p>
+                      <a:endParaRPr lang="en-GB"/>
+                    </a:p>
+                  </a:txBody>
+                  <a:tcPr/>
+                </a:tc>
+                <a:tc>
+                  <a:txBody>
+                    <a:bodyPr/>
+                    <a:lstStyle/>
+                    <a:p>
+                      <a:endParaRPr lang="en-GB"/>
+                    </a:p>
+                  </a:txBody>
+                  <a:tcPr/>
+                </a:tc>
+                <a:tc>
+                  <a:txBody>
+                    <a:bodyPr/>
+                    <a:lstStyle/>
+                    <a:p>
+                      <a:endParaRPr lang="en-GB"/>
+                    </a:p>
+                  </a:txBody>
+                  <a:tcPr/>
+                </a:tc>
+                <a:extLst>
+                  <a:ext uri="{0D108BD9-81ED-4DB2-BD59-A6C34878D82A}">
+                    <a16:rowId xmlns:a16="http://schemas.microsoft.com/office/drawing/2014/main" val="1120250426"/>
+                  </a:ext>
+                </a:extLst>
+              </a:tr>
+              <a:tr h="428743">
+                <a:tc>
+                  <a:txBody>
+                    <a:bodyPr/>
+                    <a:lstStyle/>
+                    <a:p>
+                      <a:r>
+                        <a:rPr lang="en-GB"/>
+                        <a:t>User 4</a:t>
+                      </a:r>
+                    </a:p>
+                  </a:txBody>
+                  <a:tcPr/>
+                </a:tc>
+                <a:tc>
+                  <a:txBody>
+                    <a:bodyPr/>
+                    <a:lstStyle/>
+                    <a:p>
+                      <a:r>
+                        <a:rPr lang="en-GB"/>
+                        <a:t>X</a:t>
+                      </a:r>
+                    </a:p>
+                  </a:txBody>
+                  <a:tcPr/>
+                </a:tc>
+                <a:tc>
+                  <a:txBody>
+                    <a:bodyPr/>
+                    <a:lstStyle/>
+                    <a:p>
+                      <a:r>
+                        <a:rPr lang="en-GB"/>
+                        <a:t>X</a:t>
+                      </a:r>
+                    </a:p>
+                  </a:txBody>
+                  <a:tcPr/>
+                </a:tc>
+                <a:tc>
+                  <a:txBody>
+                    <a:bodyPr/>
+                    <a:lstStyle/>
+                    <a:p>
+                      <a:endParaRPr lang="en-GB"/>
+                    </a:p>
+                  </a:txBody>
+                  <a:tcPr/>
+                </a:tc>
+                <a:tc>
+                  <a:txBody>
+                    <a:bodyPr/>
+                    <a:lstStyle/>
+                    <a:p>
+                      <a:endParaRPr lang="en-GB"/>
+                    </a:p>
+                  </a:txBody>
+                  <a:tcPr/>
+                </a:tc>
+                <a:tc>
+                  <a:txBody>
+                    <a:bodyPr/>
+                    <a:lstStyle/>
+                    <a:p>
+                      <a:r>
+                        <a:rPr lang="en-GB"/>
+                        <a:t>X</a:t>
+                      </a:r>
+                    </a:p>
+                  </a:txBody>
+                  <a:tcPr/>
+                </a:tc>
+                <a:tc>
+                  <a:txBody>
+                    <a:bodyPr/>
+                    <a:lstStyle/>
+                    <a:p>
+                      <a:r>
+                        <a:rPr lang="en-GB"/>
+                        <a:t>X</a:t>
+                      </a:r>
+                    </a:p>
+                  </a:txBody>
+                  <a:tcPr/>
+                </a:tc>
+                <a:tc>
+                  <a:txBody>
+                    <a:bodyPr/>
+                    <a:lstStyle/>
+                    <a:p>
+                      <a:endParaRPr lang="en-GB"/>
+                    </a:p>
+                  </a:txBody>
+                  <a:tcPr/>
+                </a:tc>
+                <a:extLst>
+                  <a:ext uri="{0D108BD9-81ED-4DB2-BD59-A6C34878D82A}">
+                    <a16:rowId xmlns:a16="http://schemas.microsoft.com/office/drawing/2014/main" val="3990437050"/>
+                  </a:ext>
+                </a:extLst>
+              </a:tr>
+              <a:tr h="428743">
+                <a:tc>
+                  <a:txBody>
+                    <a:bodyPr/>
+                    <a:lstStyle/>
+                    <a:p>
+                      <a:r>
+                        <a:rPr lang="en-GB"/>
+                        <a:t>User 5</a:t>
+                      </a:r>
+                    </a:p>
+                  </a:txBody>
+                  <a:tcPr/>
+                </a:tc>
+                <a:tc>
+                  <a:txBody>
+                    <a:bodyPr/>
+                    <a:lstStyle/>
+                    <a:p>
+                      <a:r>
+                        <a:rPr lang="en-GB"/>
+                        <a:t>X</a:t>
+                      </a:r>
+                    </a:p>
+                  </a:txBody>
+                  <a:tcPr/>
+                </a:tc>
+                <a:tc>
+                  <a:txBody>
+                    <a:bodyPr/>
+                    <a:lstStyle/>
+                    <a:p>
+                      <a:r>
+                        <a:rPr lang="en-GB"/>
+                        <a:t>X</a:t>
+                      </a:r>
+                    </a:p>
+                  </a:txBody>
+                  <a:tcPr/>
+                </a:tc>
+                <a:tc>
+                  <a:txBody>
+                    <a:bodyPr/>
+                    <a:lstStyle/>
+                    <a:p>
+                      <a:r>
+                        <a:rPr lang="en-GB"/>
+                        <a:t>X</a:t>
+                      </a:r>
+                    </a:p>
+                  </a:txBody>
+                  <a:tcPr/>
+                </a:tc>
+                <a:tc>
+                  <a:txBody>
+                    <a:bodyPr/>
+                    <a:lstStyle/>
+                    <a:p>
+                      <a:r>
+                        <a:rPr lang="en-GB"/>
+                        <a:t>X</a:t>
+                      </a:r>
+                    </a:p>
+                  </a:txBody>
+                  <a:tcPr/>
+                </a:tc>
+                <a:tc>
+                  <a:txBody>
+                    <a:bodyPr/>
+                    <a:lstStyle/>
+                    <a:p>
+                      <a:r>
+                        <a:rPr lang="en-GB"/>
+                        <a:t>X</a:t>
+                      </a:r>
+                    </a:p>
+                  </a:txBody>
+                  <a:tcPr/>
+                </a:tc>
+                <a:tc>
+                  <a:txBody>
+                    <a:bodyPr/>
+                    <a:lstStyle/>
+                    <a:p>
+                      <a:r>
+                        <a:rPr lang="en-GB"/>
+                        <a:t>X</a:t>
+                      </a:r>
+                    </a:p>
+                  </a:txBody>
+                  <a:tcPr/>
+                </a:tc>
+                <a:tc>
+                  <a:txBody>
+                    <a:bodyPr/>
+                    <a:lstStyle/>
+                    <a:p>
+                      <a:endParaRPr lang="en-GB"/>
+                    </a:p>
+                  </a:txBody>
+                  <a:tcPr/>
+                </a:tc>
+                <a:extLst>
+                  <a:ext uri="{0D108BD9-81ED-4DB2-BD59-A6C34878D82A}">
+                    <a16:rowId xmlns:a16="http://schemas.microsoft.com/office/drawing/2014/main" val="214093928"/>
+                  </a:ext>
+                </a:extLst>
+              </a:tr>
+              <a:tr h="428743">
+                <a:tc>
+                  <a:txBody>
+                    <a:bodyPr/>
+                    <a:lstStyle/>
+                    <a:p>
+                      <a:r>
+                        <a:rPr lang="en-GB"/>
+                        <a:t>User 6</a:t>
+                      </a:r>
+                    </a:p>
+                  </a:txBody>
+                  <a:tcPr/>
+                </a:tc>
+                <a:tc>
+                  <a:txBody>
+                    <a:bodyPr/>
+                    <a:lstStyle/>
+                    <a:p>
+                      <a:r>
+                        <a:rPr lang="en-GB"/>
+                        <a:t>X</a:t>
+                      </a:r>
+                    </a:p>
+                  </a:txBody>
+                  <a:tcPr/>
+                </a:tc>
+                <a:tc>
+                  <a:txBody>
+                    <a:bodyPr/>
+                    <a:lstStyle/>
+                    <a:p>
+                      <a:r>
+                        <a:rPr lang="en-GB"/>
+                        <a:t>X</a:t>
+                      </a:r>
+                    </a:p>
+                  </a:txBody>
+                  <a:tcPr/>
+                </a:tc>
+                <a:tc>
+                  <a:txBody>
+                    <a:bodyPr/>
+                    <a:lstStyle/>
+                    <a:p>
+                      <a:r>
+                        <a:rPr lang="en-GB"/>
+                        <a:t>X</a:t>
+                      </a:r>
+                    </a:p>
+                  </a:txBody>
+                  <a:tcPr/>
+                </a:tc>
+                <a:tc>
+                  <a:txBody>
+                    <a:bodyPr/>
+                    <a:lstStyle/>
+                    <a:p>
+                      <a:r>
+                        <a:rPr lang="en-GB"/>
+                        <a:t>X</a:t>
+                      </a:r>
+                    </a:p>
+                  </a:txBody>
+                  <a:tcPr/>
+                </a:tc>
+                <a:tc>
+                  <a:txBody>
+                    <a:bodyPr/>
+                    <a:lstStyle/>
+                    <a:p>
+                      <a:r>
+                        <a:rPr lang="en-GB"/>
+                        <a:t>X</a:t>
+                      </a:r>
+                    </a:p>
+                  </a:txBody>
+                  <a:tcPr/>
+                </a:tc>
+                <a:tc>
+                  <a:txBody>
+                    <a:bodyPr/>
+                    <a:lstStyle/>
+                    <a:p>
+                      <a:r>
+                        <a:rPr lang="en-GB"/>
+                        <a:t>X</a:t>
+                      </a:r>
+                    </a:p>
+                  </a:txBody>
+                  <a:tcPr/>
+                </a:tc>
+                <a:tc>
+                  <a:txBody>
+                    <a:bodyPr/>
+                    <a:lstStyle/>
+                    <a:p>
+                      <a:endParaRPr lang="en-GB"/>
+                    </a:p>
+                  </a:txBody>
+                  <a:tcPr/>
+                </a:tc>
+                <a:extLst>
+                  <a:ext uri="{0D108BD9-81ED-4DB2-BD59-A6C34878D82A}">
+                    <a16:rowId xmlns:a16="http://schemas.microsoft.com/office/drawing/2014/main" val="639143091"/>
+                  </a:ext>
+                </a:extLst>
+              </a:tr>
+              <a:tr h="428743">
+                <a:tc>
+                  <a:txBody>
+                    <a:bodyPr/>
+                    <a:lstStyle/>
+                    <a:p>
+                      <a:r>
+                        <a:rPr lang="en-GB"/>
+                        <a:t>User 7</a:t>
+                      </a:r>
+                    </a:p>
+                  </a:txBody>
+                  <a:tcPr/>
+                </a:tc>
+                <a:tc>
+                  <a:txBody>
+                    <a:bodyPr/>
+                    <a:lstStyle/>
+                    <a:p>
+                      <a:r>
+                        <a:rPr lang="en-GB"/>
+                        <a:t>X</a:t>
+                      </a:r>
+                    </a:p>
+                  </a:txBody>
+                  <a:tcPr/>
+                </a:tc>
+                <a:tc>
+                  <a:txBody>
+                    <a:bodyPr/>
+                    <a:lstStyle/>
+                    <a:p>
+                      <a:r>
+                        <a:rPr lang="en-GB"/>
+                        <a:t>X</a:t>
+                      </a:r>
+                    </a:p>
+                  </a:txBody>
+                  <a:tcPr/>
+                </a:tc>
+                <a:tc>
+                  <a:txBody>
+                    <a:bodyPr/>
+                    <a:lstStyle/>
+                    <a:p>
+                      <a:endParaRPr lang="en-GB"/>
+                    </a:p>
+                  </a:txBody>
+                  <a:tcPr/>
+                </a:tc>
+                <a:tc>
+                  <a:txBody>
+                    <a:bodyPr/>
+                    <a:lstStyle/>
+                    <a:p>
+                      <a:endParaRPr lang="en-GB"/>
+                    </a:p>
+                  </a:txBody>
+                  <a:tcPr/>
+                </a:tc>
+                <a:tc>
+                  <a:txBody>
+                    <a:bodyPr/>
+                    <a:lstStyle/>
+                    <a:p>
+                      <a:r>
+                        <a:rPr lang="en-GB"/>
+                        <a:t>X</a:t>
+                      </a:r>
+                    </a:p>
+                  </a:txBody>
+                  <a:tcPr/>
+                </a:tc>
+                <a:tc>
+                  <a:txBody>
+                    <a:bodyPr/>
+                    <a:lstStyle/>
+                    <a:p>
+                      <a:endParaRPr lang="en-GB"/>
+                    </a:p>
+                  </a:txBody>
+                  <a:tcPr/>
+                </a:tc>
+                <a:tc>
+                  <a:txBody>
+                    <a:bodyPr/>
+                    <a:lstStyle/>
+                    <a:p>
+                      <a:endParaRPr lang="en-GB"/>
+                    </a:p>
+                  </a:txBody>
+                  <a:tcPr/>
+                </a:tc>
+                <a:extLst>
+                  <a:ext uri="{0D108BD9-81ED-4DB2-BD59-A6C34878D82A}">
+                    <a16:rowId xmlns:a16="http://schemas.microsoft.com/office/drawing/2014/main" val="891698826"/>
+                  </a:ext>
+                </a:extLst>
+              </a:tr>
+              <a:tr h="428743">
+                <a:tc>
+                  <a:txBody>
+                    <a:bodyPr/>
+                    <a:lstStyle/>
+                    <a:p>
+                      <a:r>
+                        <a:rPr lang="en-GB"/>
+                        <a:t>User 8</a:t>
+                      </a:r>
+                    </a:p>
+                  </a:txBody>
+                  <a:tcPr/>
+                </a:tc>
+                <a:tc>
+                  <a:txBody>
+                    <a:bodyPr/>
+                    <a:lstStyle/>
+                    <a:p>
+                      <a:r>
+                        <a:rPr lang="en-GB"/>
+                        <a:t>X</a:t>
+                      </a:r>
+                    </a:p>
+                  </a:txBody>
+                  <a:tcPr/>
+                </a:tc>
+                <a:tc>
+                  <a:txBody>
+                    <a:bodyPr/>
+                    <a:lstStyle/>
+                    <a:p>
+                      <a:r>
+                        <a:rPr lang="en-GB"/>
+                        <a:t>X</a:t>
+                      </a:r>
+                    </a:p>
+                  </a:txBody>
+                  <a:tcPr/>
+                </a:tc>
+                <a:tc>
+                  <a:txBody>
+                    <a:bodyPr/>
+                    <a:lstStyle/>
+                    <a:p>
+                      <a:r>
+                        <a:rPr lang="en-GB"/>
+                        <a:t>X</a:t>
+                      </a:r>
+                    </a:p>
+                  </a:txBody>
+                  <a:tcPr/>
+                </a:tc>
+                <a:tc>
+                  <a:txBody>
+                    <a:bodyPr/>
+                    <a:lstStyle/>
+                    <a:p>
+                      <a:endParaRPr lang="en-GB"/>
+                    </a:p>
+                  </a:txBody>
+                  <a:tcPr/>
+                </a:tc>
+                <a:tc>
+                  <a:txBody>
+                    <a:bodyPr/>
+                    <a:lstStyle/>
+                    <a:p>
+                      <a:endParaRPr lang="en-GB"/>
+                    </a:p>
+                  </a:txBody>
+                  <a:tcPr/>
+                </a:tc>
+                <a:tc>
+                  <a:txBody>
+                    <a:bodyPr/>
+                    <a:lstStyle/>
+                    <a:p>
+                      <a:endParaRPr lang="en-GB"/>
+                    </a:p>
+                  </a:txBody>
+                  <a:tcPr/>
+                </a:tc>
+                <a:tc>
+                  <a:txBody>
+                    <a:bodyPr/>
+                    <a:lstStyle/>
+                    <a:p>
+                      <a:endParaRPr lang="en-GB"/>
+                    </a:p>
+                  </a:txBody>
+                  <a:tcPr/>
+                </a:tc>
+                <a:extLst>
+                  <a:ext uri="{0D108BD9-81ED-4DB2-BD59-A6C34878D82A}">
+                    <a16:rowId xmlns:a16="http://schemas.microsoft.com/office/drawing/2014/main" val="1800499495"/>
+                  </a:ext>
+                </a:extLst>
+              </a:tr>
+              <a:tr h="428743">
+                <a:tc>
+                  <a:txBody>
+                    <a:bodyPr/>
+                    <a:lstStyle/>
+                    <a:p>
+                      <a:r>
+                        <a:rPr lang="en-GB"/>
+                        <a:t>User 9</a:t>
+                      </a:r>
+                    </a:p>
+                  </a:txBody>
+                  <a:tcPr/>
+                </a:tc>
+                <a:tc>
+                  <a:txBody>
+                    <a:bodyPr/>
+                    <a:lstStyle/>
+                    <a:p>
+                      <a:r>
+                        <a:rPr lang="en-GB"/>
+                        <a:t>X</a:t>
+                      </a:r>
+                    </a:p>
+                  </a:txBody>
+                  <a:tcPr/>
+                </a:tc>
+                <a:tc>
+                  <a:txBody>
+                    <a:bodyPr/>
+                    <a:lstStyle/>
+                    <a:p>
+                      <a:r>
+                        <a:rPr lang="en-GB"/>
+                        <a:t>X</a:t>
+                      </a:r>
+                    </a:p>
+                  </a:txBody>
+                  <a:tcPr/>
+                </a:tc>
+                <a:tc>
+                  <a:txBody>
+                    <a:bodyPr/>
+                    <a:lstStyle/>
+                    <a:p>
+                      <a:r>
+                        <a:rPr lang="en-GB"/>
+                        <a:t>X</a:t>
+                      </a:r>
+                    </a:p>
+                  </a:txBody>
+                  <a:tcPr/>
+                </a:tc>
+                <a:tc>
+                  <a:txBody>
+                    <a:bodyPr/>
+                    <a:lstStyle/>
+                    <a:p>
+                      <a:endParaRPr lang="en-GB"/>
+                    </a:p>
+                  </a:txBody>
+                  <a:tcPr/>
+                </a:tc>
+                <a:tc>
+                  <a:txBody>
+                    <a:bodyPr/>
+                    <a:lstStyle/>
+                    <a:p>
+                      <a:r>
+                        <a:rPr lang="en-GB"/>
+                        <a:t>X</a:t>
+                      </a:r>
+                    </a:p>
+                  </a:txBody>
+                  <a:tcPr/>
+                </a:tc>
+                <a:tc>
+                  <a:txBody>
+                    <a:bodyPr/>
+                    <a:lstStyle/>
+                    <a:p>
+                      <a:r>
+                        <a:rPr lang="en-GB"/>
+                        <a:t>X</a:t>
+                      </a:r>
+                    </a:p>
+                  </a:txBody>
+                  <a:tcPr/>
+                </a:tc>
+                <a:tc>
+                  <a:txBody>
+                    <a:bodyPr/>
+                    <a:lstStyle/>
+                    <a:p>
+                      <a:endParaRPr lang="en-GB"/>
+                    </a:p>
+                  </a:txBody>
+                  <a:tcPr/>
+                </a:tc>
+                <a:extLst>
+                  <a:ext uri="{0D108BD9-81ED-4DB2-BD59-A6C34878D82A}">
+                    <a16:rowId xmlns:a16="http://schemas.microsoft.com/office/drawing/2014/main" val="3357664421"/>
+                  </a:ext>
+                </a:extLst>
+              </a:tr>
+              <a:tr h="428743">
+                <a:tc>
+                  <a:txBody>
+                    <a:bodyPr/>
+                    <a:lstStyle/>
+                    <a:p>
+                      <a:r>
+                        <a:rPr lang="en-GB"/>
+                        <a:t>User 10</a:t>
+                      </a:r>
+                    </a:p>
+                  </a:txBody>
+                  <a:tcPr/>
+                </a:tc>
+                <a:tc>
+                  <a:txBody>
+                    <a:bodyPr/>
+                    <a:lstStyle/>
+                    <a:p>
+                      <a:r>
+                        <a:rPr lang="en-GB"/>
+                        <a:t>X</a:t>
+                      </a:r>
+                    </a:p>
+                  </a:txBody>
+                  <a:tcPr/>
+                </a:tc>
+                <a:tc>
+                  <a:txBody>
+                    <a:bodyPr/>
+                    <a:lstStyle/>
+                    <a:p>
+                      <a:r>
+                        <a:rPr lang="en-GB"/>
+                        <a:t>X</a:t>
+                      </a:r>
+                    </a:p>
+                  </a:txBody>
+                  <a:tcPr/>
+                </a:tc>
+                <a:tc>
+                  <a:txBody>
+                    <a:bodyPr/>
+                    <a:lstStyle/>
+                    <a:p>
+                      <a:r>
+                        <a:rPr lang="en-GB"/>
+                        <a:t>X</a:t>
+                      </a:r>
+                    </a:p>
+                  </a:txBody>
+                  <a:tcPr/>
+                </a:tc>
+                <a:tc>
+                  <a:txBody>
+                    <a:bodyPr/>
+                    <a:lstStyle/>
+                    <a:p>
+                      <a:endParaRPr lang="en-GB"/>
+                    </a:p>
+                  </a:txBody>
+                  <a:tcPr/>
+                </a:tc>
+                <a:tc>
+                  <a:txBody>
+                    <a:bodyPr/>
+                    <a:lstStyle/>
+                    <a:p>
+                      <a:endParaRPr lang="en-GB"/>
+                    </a:p>
+                  </a:txBody>
+                  <a:tcPr/>
+                </a:tc>
+                <a:tc>
+                  <a:txBody>
+                    <a:bodyPr/>
+                    <a:lstStyle/>
+                    <a:p>
+                      <a:endParaRPr lang="en-GB"/>
+                    </a:p>
+                  </a:txBody>
+                  <a:tcPr/>
+                </a:tc>
+                <a:tc>
+                  <a:txBody>
+                    <a:bodyPr/>
+                    <a:lstStyle/>
+                    <a:p>
+                      <a:endParaRPr lang="en-GB"/>
+                    </a:p>
+                  </a:txBody>
+                  <a:tcPr/>
+                </a:tc>
+                <a:extLst>
+                  <a:ext uri="{0D108BD9-81ED-4DB2-BD59-A6C34878D82A}">
+                    <a16:rowId xmlns:a16="http://schemas.microsoft.com/office/drawing/2014/main" val="423814281"/>
+                  </a:ext>
+                </a:extLst>
+              </a:tr>
+              <a:tr h="428743">
+                <a:tc>
+                  <a:txBody>
+                    <a:bodyPr/>
+                    <a:lstStyle/>
+                    <a:p>
+                      <a:r>
+                        <a:rPr lang="en-GB"/>
+                        <a:t>User 11</a:t>
+                      </a:r>
+                    </a:p>
+                  </a:txBody>
+                  <a:tcPr/>
+                </a:tc>
+                <a:tc>
+                  <a:txBody>
+                    <a:bodyPr/>
+                    <a:lstStyle/>
+                    <a:p>
+                      <a:r>
+                        <a:rPr lang="en-GB"/>
+                        <a:t>X</a:t>
+                      </a:r>
+                    </a:p>
+                  </a:txBody>
+                  <a:tcPr/>
+                </a:tc>
+                <a:tc>
+                  <a:txBody>
+                    <a:bodyPr/>
+                    <a:lstStyle/>
+                    <a:p>
+                      <a:r>
+                        <a:rPr lang="en-GB"/>
+                        <a:t>X</a:t>
+                      </a:r>
+                    </a:p>
+                  </a:txBody>
+                  <a:tcPr/>
+                </a:tc>
+                <a:tc>
+                  <a:txBody>
+                    <a:bodyPr/>
+                    <a:lstStyle/>
+                    <a:p>
+                      <a:r>
+                        <a:rPr lang="en-GB"/>
+                        <a:t>X</a:t>
+                      </a:r>
+                    </a:p>
+                  </a:txBody>
+                  <a:tcPr/>
+                </a:tc>
+                <a:tc>
+                  <a:txBody>
+                    <a:bodyPr/>
+                    <a:lstStyle/>
+                    <a:p>
+                      <a:endParaRPr lang="en-GB"/>
+                    </a:p>
+                  </a:txBody>
+                  <a:tcPr/>
+                </a:tc>
+                <a:tc>
+                  <a:txBody>
+                    <a:bodyPr/>
+                    <a:lstStyle/>
+                    <a:p>
+                      <a:r>
+                        <a:rPr lang="en-GB"/>
+                        <a:t>X</a:t>
+                      </a:r>
+                    </a:p>
+                  </a:txBody>
+                  <a:tcPr/>
+                </a:tc>
+                <a:tc>
+                  <a:txBody>
+                    <a:bodyPr/>
+                    <a:lstStyle/>
+                    <a:p>
+                      <a:r>
+                        <a:rPr lang="en-GB"/>
+                        <a:t>X</a:t>
+                      </a:r>
+                    </a:p>
+                  </a:txBody>
+                  <a:tcPr/>
+                </a:tc>
+                <a:tc>
+                  <a:txBody>
+                    <a:bodyPr/>
+                    <a:lstStyle/>
+                    <a:p>
+                      <a:endParaRPr lang="en-GB"/>
+                    </a:p>
+                  </a:txBody>
+                  <a:tcPr/>
+                </a:tc>
+                <a:extLst>
+                  <a:ext uri="{0D108BD9-81ED-4DB2-BD59-A6C34878D82A}">
+                    <a16:rowId xmlns:a16="http://schemas.microsoft.com/office/drawing/2014/main" val="1298576077"/>
+                  </a:ext>
+                </a:extLst>
+              </a:tr>
+              <a:tr h="428743">
+                <a:tc>
+                  <a:txBody>
+                    <a:bodyPr/>
+                    <a:lstStyle/>
+                    <a:p>
+                      <a:r>
+                        <a:rPr lang="en-GB"/>
+                        <a:t>User 12</a:t>
+                      </a:r>
+                    </a:p>
+                  </a:txBody>
+                  <a:tcPr/>
+                </a:tc>
+                <a:tc>
+                  <a:txBody>
+                    <a:bodyPr/>
+                    <a:lstStyle/>
+                    <a:p>
+                      <a:r>
+                        <a:rPr lang="en-GB"/>
+                        <a:t>X</a:t>
+                      </a:r>
+                    </a:p>
+                  </a:txBody>
+                  <a:tcPr/>
+                </a:tc>
+                <a:tc>
+                  <a:txBody>
+                    <a:bodyPr/>
+                    <a:lstStyle/>
+                    <a:p>
+                      <a:endParaRPr lang="en-GB"/>
+                    </a:p>
+                  </a:txBody>
+                  <a:tcPr/>
+                </a:tc>
+                <a:tc>
+                  <a:txBody>
+                    <a:bodyPr/>
+                    <a:lstStyle/>
+                    <a:p>
+                      <a:endParaRPr lang="en-GB"/>
+                    </a:p>
+                  </a:txBody>
+                  <a:tcPr/>
+                </a:tc>
+                <a:tc>
+                  <a:txBody>
+                    <a:bodyPr/>
+                    <a:lstStyle/>
+                    <a:p>
+                      <a:endParaRPr lang="en-GB"/>
+                    </a:p>
+                  </a:txBody>
+                  <a:tcPr/>
+                </a:tc>
+                <a:tc>
+                  <a:txBody>
+                    <a:bodyPr/>
+                    <a:lstStyle/>
+                    <a:p>
+                      <a:endParaRPr lang="en-GB"/>
+                    </a:p>
+                  </a:txBody>
+                  <a:tcPr/>
+                </a:tc>
+                <a:tc>
+                  <a:txBody>
+                    <a:bodyPr/>
+                    <a:lstStyle/>
+                    <a:p>
+                      <a:endParaRPr lang="en-GB"/>
+                    </a:p>
+                  </a:txBody>
+                  <a:tcPr/>
+                </a:tc>
+                <a:tc>
+                  <a:txBody>
+                    <a:bodyPr/>
+                    <a:lstStyle/>
+                    <a:p>
+                      <a:endParaRPr lang="en-GB"/>
+                    </a:p>
+                  </a:txBody>
+                  <a:tcPr/>
+                </a:tc>
+                <a:extLst>
+                  <a:ext uri="{0D108BD9-81ED-4DB2-BD59-A6C34878D82A}">
+                    <a16:rowId xmlns:a16="http://schemas.microsoft.com/office/drawing/2014/main" val="1755637582"/>
+                  </a:ext>
+                </a:extLst>
+              </a:tr>
+              <a:tr h="428743">
+                <a:tc>
+                  <a:txBody>
+                    <a:bodyPr/>
+                    <a:lstStyle/>
+                    <a:p>
+                      <a:r>
+                        <a:rPr lang="en-GB"/>
+                        <a:t>User 13</a:t>
+                      </a:r>
+                    </a:p>
+                  </a:txBody>
+                  <a:tcPr/>
+                </a:tc>
+                <a:tc>
+                  <a:txBody>
+                    <a:bodyPr/>
+                    <a:lstStyle/>
+                    <a:p>
+                      <a:r>
+                        <a:rPr lang="en-GB"/>
+                        <a:t>X</a:t>
+                      </a:r>
+                    </a:p>
+                  </a:txBody>
+                  <a:tcPr/>
+                </a:tc>
+                <a:tc>
+                  <a:txBody>
+                    <a:bodyPr/>
+                    <a:lstStyle/>
+                    <a:p>
+                      <a:r>
+                        <a:rPr lang="en-GB"/>
+                        <a:t>X</a:t>
+                      </a:r>
+                    </a:p>
+                  </a:txBody>
+                  <a:tcPr/>
+                </a:tc>
+                <a:tc>
+                  <a:txBody>
+                    <a:bodyPr/>
+                    <a:lstStyle/>
+                    <a:p>
+                      <a:r>
+                        <a:rPr lang="en-GB"/>
+                        <a:t>X</a:t>
+                      </a:r>
+                    </a:p>
+                  </a:txBody>
+                  <a:tcPr/>
+                </a:tc>
+                <a:tc>
+                  <a:txBody>
+                    <a:bodyPr/>
+                    <a:lstStyle/>
+                    <a:p>
+                      <a:r>
+                        <a:rPr lang="en-GB"/>
+                        <a:t>X</a:t>
+                      </a:r>
+                    </a:p>
+                  </a:txBody>
+                  <a:tcPr/>
+                </a:tc>
+                <a:tc>
+                  <a:txBody>
+                    <a:bodyPr/>
+                    <a:lstStyle/>
+                    <a:p>
+                      <a:r>
+                        <a:rPr lang="en-GB"/>
+                        <a:t>X</a:t>
+                      </a:r>
+                    </a:p>
+                  </a:txBody>
+                  <a:tcPr/>
+                </a:tc>
+                <a:tc>
+                  <a:txBody>
+                    <a:bodyPr/>
+                    <a:lstStyle/>
+                    <a:p>
+                      <a:r>
+                        <a:rPr lang="en-GB"/>
+                        <a:t>X</a:t>
+                      </a:r>
+                    </a:p>
+                  </a:txBody>
+                  <a:tcPr/>
+                </a:tc>
+                <a:tc>
+                  <a:txBody>
+                    <a:bodyPr/>
+                    <a:lstStyle/>
+                    <a:p>
+                      <a:endParaRPr lang="en-GB"/>
+                    </a:p>
+                  </a:txBody>
+                  <a:tcPr/>
+                </a:tc>
+                <a:extLst>
+                  <a:ext uri="{0D108BD9-81ED-4DB2-BD59-A6C34878D82A}">
+                    <a16:rowId xmlns:a16="http://schemas.microsoft.com/office/drawing/2014/main" val="3500379508"/>
+                  </a:ext>
+                </a:extLst>
+              </a:tr>
+              <a:tr h="428743">
+                <a:tc>
+                  <a:txBody>
+                    <a:bodyPr/>
+                    <a:lstStyle/>
+                    <a:p>
+                      <a:r>
+                        <a:rPr lang="en-GB"/>
+                        <a:t>User 14</a:t>
+                      </a:r>
+                    </a:p>
+                  </a:txBody>
+                  <a:tcPr/>
+                </a:tc>
+                <a:tc>
+                  <a:txBody>
+                    <a:bodyPr/>
+                    <a:lstStyle/>
+                    <a:p>
+                      <a:r>
+                        <a:rPr lang="en-GB"/>
+                        <a:t>X</a:t>
+                      </a:r>
+                    </a:p>
+                  </a:txBody>
+                  <a:tcPr/>
+                </a:tc>
+                <a:tc>
+                  <a:txBody>
+                    <a:bodyPr/>
+                    <a:lstStyle/>
+                    <a:p>
+                      <a:r>
+                        <a:rPr lang="en-GB"/>
+                        <a:t>X</a:t>
+                      </a:r>
+                    </a:p>
+                  </a:txBody>
+                  <a:tcPr/>
+                </a:tc>
+                <a:tc>
+                  <a:txBody>
+                    <a:bodyPr/>
+                    <a:lstStyle/>
+                    <a:p>
+                      <a:r>
+                        <a:rPr lang="en-GB"/>
+                        <a:t>X</a:t>
+                      </a:r>
+                    </a:p>
+                  </a:txBody>
+                  <a:tcPr/>
+                </a:tc>
+                <a:tc>
+                  <a:txBody>
+                    <a:bodyPr/>
+                    <a:lstStyle/>
+                    <a:p>
+                      <a:r>
+                        <a:rPr lang="en-GB"/>
+                        <a:t>X</a:t>
+                      </a:r>
+                    </a:p>
+                  </a:txBody>
+                  <a:tcPr/>
+                </a:tc>
+                <a:tc>
+                  <a:txBody>
+                    <a:bodyPr/>
+                    <a:lstStyle/>
+                    <a:p>
+                      <a:r>
+                        <a:rPr lang="en-GB"/>
+                        <a:t>X</a:t>
+                      </a:r>
+                    </a:p>
+                  </a:txBody>
+                  <a:tcPr/>
+                </a:tc>
+                <a:tc>
+                  <a:txBody>
+                    <a:bodyPr/>
+                    <a:lstStyle/>
+                    <a:p>
+                      <a:r>
+                        <a:rPr lang="en-GB"/>
+                        <a:t>X</a:t>
+                      </a:r>
+                    </a:p>
+                  </a:txBody>
+                  <a:tcPr/>
+                </a:tc>
+                <a:tc>
+                  <a:txBody>
+                    <a:bodyPr/>
+                    <a:lstStyle/>
+                    <a:p>
+                      <a:endParaRPr lang="en-GB"/>
+                    </a:p>
+                  </a:txBody>
+                  <a:tcPr/>
+                </a:tc>
+                <a:extLst>
+                  <a:ext uri="{0D108BD9-81ED-4DB2-BD59-A6C34878D82A}">
+                    <a16:rowId xmlns:a16="http://schemas.microsoft.com/office/drawing/2014/main" val="3979657190"/>
+                  </a:ext>
+                </a:extLst>
+              </a:tr>
+              <a:tr h="428743">
+                <a:tc>
+                  <a:txBody>
+                    <a:bodyPr/>
+                    <a:lstStyle/>
+                    <a:p>
+                      <a:r>
+                        <a:rPr lang="en-GB"/>
+                        <a:t>User 15</a:t>
+                      </a:r>
+                    </a:p>
+                  </a:txBody>
+                  <a:tcPr/>
+                </a:tc>
+                <a:tc>
+                  <a:txBody>
+                    <a:bodyPr/>
+                    <a:lstStyle/>
+                    <a:p>
+                      <a:endParaRPr lang="en-GB"/>
+                    </a:p>
+                  </a:txBody>
+                  <a:tcPr/>
+                </a:tc>
+                <a:tc>
+                  <a:txBody>
+                    <a:bodyPr/>
+                    <a:lstStyle/>
+                    <a:p>
+                      <a:endParaRPr lang="en-GB"/>
+                    </a:p>
+                  </a:txBody>
+                  <a:tcPr/>
+                </a:tc>
+                <a:tc>
+                  <a:txBody>
+                    <a:bodyPr/>
+                    <a:lstStyle/>
+                    <a:p>
+                      <a:endParaRPr lang="en-GB"/>
+                    </a:p>
+                  </a:txBody>
+                  <a:tcPr/>
+                </a:tc>
+                <a:tc>
+                  <a:txBody>
+                    <a:bodyPr/>
+                    <a:lstStyle/>
+                    <a:p>
+                      <a:endParaRPr lang="en-GB"/>
+                    </a:p>
+                  </a:txBody>
+                  <a:tcPr/>
+                </a:tc>
+                <a:tc>
+                  <a:txBody>
+                    <a:bodyPr/>
+                    <a:lstStyle/>
+                    <a:p>
+                      <a:endParaRPr lang="en-GB"/>
+                    </a:p>
+                  </a:txBody>
+                  <a:tcPr/>
+                </a:tc>
+                <a:tc>
+                  <a:txBody>
+                    <a:bodyPr/>
+                    <a:lstStyle/>
+                    <a:p>
+                      <a:endParaRPr lang="en-GB"/>
+                    </a:p>
+                  </a:txBody>
+                  <a:tcPr/>
+                </a:tc>
+                <a:tc>
+                  <a:txBody>
+                    <a:bodyPr/>
+                    <a:lstStyle/>
+                    <a:p>
+                      <a:r>
+                        <a:rPr lang="en-GB"/>
+                        <a:t>X</a:t>
+                      </a:r>
+                    </a:p>
+                  </a:txBody>
+                  <a:tcPr/>
+                </a:tc>
+                <a:extLst>
+                  <a:ext uri="{0D108BD9-81ED-4DB2-BD59-A6C34878D82A}">
+                    <a16:rowId xmlns:a16="http://schemas.microsoft.com/office/drawing/2014/main" val="3906025473"/>
+                  </a:ext>
+                </a:extLst>
+              </a:tr>
+              <a:tr h="428743">
+                <a:tc>
+                  <a:txBody>
+                    <a:bodyPr/>
+                    <a:lstStyle/>
+                    <a:p>
+                      <a:r>
+                        <a:rPr lang="en-GB"/>
+                        <a:t>User 16</a:t>
+                      </a:r>
+                    </a:p>
+                  </a:txBody>
+                  <a:tcPr/>
+                </a:tc>
+                <a:tc>
+                  <a:txBody>
+                    <a:bodyPr/>
+                    <a:lstStyle/>
+                    <a:p>
+                      <a:r>
+                        <a:rPr lang="en-GB"/>
+                        <a:t>X</a:t>
+                      </a:r>
+                    </a:p>
+                  </a:txBody>
+                  <a:tcPr/>
+                </a:tc>
+                <a:tc>
+                  <a:txBody>
+                    <a:bodyPr/>
+                    <a:lstStyle/>
+                    <a:p>
+                      <a:r>
+                        <a:rPr lang="en-GB"/>
+                        <a:t>X</a:t>
+                      </a:r>
+                    </a:p>
+                  </a:txBody>
+                  <a:tcPr/>
+                </a:tc>
+                <a:tc>
+                  <a:txBody>
+                    <a:bodyPr/>
+                    <a:lstStyle/>
+                    <a:p>
+                      <a:endParaRPr lang="en-GB"/>
+                    </a:p>
+                  </a:txBody>
+                  <a:tcPr/>
+                </a:tc>
+                <a:tc>
+                  <a:txBody>
+                    <a:bodyPr/>
+                    <a:lstStyle/>
+                    <a:p>
+                      <a:r>
+                        <a:rPr lang="en-GB"/>
+                        <a:t>X</a:t>
+                      </a:r>
+                    </a:p>
+                  </a:txBody>
+                  <a:tcPr/>
+                </a:tc>
+                <a:tc>
+                  <a:txBody>
+                    <a:bodyPr/>
+                    <a:lstStyle/>
+                    <a:p>
+                      <a:r>
+                        <a:rPr lang="en-GB"/>
+                        <a:t>X</a:t>
+                      </a:r>
+                    </a:p>
+                  </a:txBody>
+                  <a:tcPr/>
+                </a:tc>
+                <a:tc>
+                  <a:txBody>
+                    <a:bodyPr/>
+                    <a:lstStyle/>
+                    <a:p>
+                      <a:r>
+                        <a:rPr lang="en-GB"/>
+                        <a:t>X</a:t>
+                      </a:r>
+                    </a:p>
+                  </a:txBody>
+                  <a:tcPr/>
+                </a:tc>
+                <a:tc>
+                  <a:txBody>
+                    <a:bodyPr/>
+                    <a:lstStyle/>
+                    <a:p>
+                      <a:endParaRPr lang="en-GB"/>
+                    </a:p>
+                  </a:txBody>
+                  <a:tcPr/>
+                </a:tc>
+                <a:extLst>
+                  <a:ext uri="{0D108BD9-81ED-4DB2-BD59-A6C34878D82A}">
+                    <a16:rowId xmlns:a16="http://schemas.microsoft.com/office/drawing/2014/main" val="2392670828"/>
+                  </a:ext>
+                </a:extLst>
+              </a:tr>
+              <a:tr h="428743">
+                <a:tc>
+                  <a:txBody>
+                    <a:bodyPr/>
+                    <a:lstStyle/>
+                    <a:p>
+                      <a:r>
+                        <a:rPr lang="en-GB"/>
+                        <a:t>User 17</a:t>
+                      </a:r>
+                    </a:p>
+                  </a:txBody>
+                  <a:tcPr/>
+                </a:tc>
+                <a:tc>
+                  <a:txBody>
+                    <a:bodyPr/>
+                    <a:lstStyle/>
+                    <a:p>
+                      <a:endParaRPr lang="en-GB"/>
+                    </a:p>
+                  </a:txBody>
+                  <a:tcPr/>
+                </a:tc>
+                <a:tc>
+                  <a:txBody>
+                    <a:bodyPr/>
+                    <a:lstStyle/>
+                    <a:p>
+                      <a:endParaRPr lang="en-GB"/>
+                    </a:p>
+                  </a:txBody>
+                  <a:tcPr/>
+                </a:tc>
+                <a:tc>
+                  <a:txBody>
+                    <a:bodyPr/>
+                    <a:lstStyle/>
+                    <a:p>
+                      <a:endParaRPr lang="en-GB"/>
+                    </a:p>
+                  </a:txBody>
+                  <a:tcPr/>
+                </a:tc>
+                <a:tc>
+                  <a:txBody>
+                    <a:bodyPr/>
+                    <a:lstStyle/>
+                    <a:p>
+                      <a:endParaRPr lang="en-GB"/>
+                    </a:p>
+                  </a:txBody>
+                  <a:tcPr/>
+                </a:tc>
+                <a:tc>
+                  <a:txBody>
+                    <a:bodyPr/>
+                    <a:lstStyle/>
+                    <a:p>
+                      <a:endParaRPr lang="en-GB"/>
+                    </a:p>
+                  </a:txBody>
+                  <a:tcPr/>
+                </a:tc>
+                <a:tc>
+                  <a:txBody>
+                    <a:bodyPr/>
+                    <a:lstStyle/>
+                    <a:p>
+                      <a:endParaRPr lang="en-GB"/>
+                    </a:p>
+                  </a:txBody>
+                  <a:tcPr/>
+                </a:tc>
+                <a:tc>
+                  <a:txBody>
+                    <a:bodyPr/>
+                    <a:lstStyle/>
+                    <a:p>
+                      <a:r>
+                        <a:rPr lang="en-GB"/>
+                        <a:t>X</a:t>
+                      </a:r>
+                    </a:p>
+                  </a:txBody>
+                  <a:tcPr/>
+                </a:tc>
+                <a:extLst>
+                  <a:ext uri="{0D108BD9-81ED-4DB2-BD59-A6C34878D82A}">
+                    <a16:rowId xmlns:a16="http://schemas.microsoft.com/office/drawing/2014/main" val="3403076789"/>
+                  </a:ext>
+                </a:extLst>
+              </a:tr>
+              <a:tr h="428743">
+                <a:tc>
+                  <a:txBody>
+                    <a:bodyPr/>
+                    <a:lstStyle/>
+                    <a:p>
+                      <a:r>
+                        <a:rPr lang="en-GB"/>
+                        <a:t>User 18</a:t>
+                      </a:r>
+                    </a:p>
+                  </a:txBody>
+                  <a:tcPr/>
+                </a:tc>
+                <a:tc>
+                  <a:txBody>
+                    <a:bodyPr/>
+                    <a:lstStyle/>
+                    <a:p>
+                      <a:r>
+                        <a:rPr lang="en-GB"/>
+                        <a:t>X</a:t>
+                      </a:r>
+                    </a:p>
+                  </a:txBody>
+                  <a:tcPr/>
+                </a:tc>
+                <a:tc>
+                  <a:txBody>
+                    <a:bodyPr/>
+                    <a:lstStyle/>
+                    <a:p>
+                      <a:r>
+                        <a:rPr lang="en-GB"/>
+                        <a:t>X</a:t>
+                      </a:r>
+                    </a:p>
+                  </a:txBody>
+                  <a:tcPr/>
+                </a:tc>
+                <a:tc>
+                  <a:txBody>
+                    <a:bodyPr/>
+                    <a:lstStyle/>
+                    <a:p>
+                      <a:endParaRPr lang="en-GB"/>
+                    </a:p>
+                  </a:txBody>
+                  <a:tcPr/>
+                </a:tc>
+                <a:tc>
+                  <a:txBody>
+                    <a:bodyPr/>
+                    <a:lstStyle/>
+                    <a:p>
+                      <a:endParaRPr lang="en-GB"/>
+                    </a:p>
+                  </a:txBody>
+                  <a:tcPr/>
+                </a:tc>
+                <a:tc>
+                  <a:txBody>
+                    <a:bodyPr/>
+                    <a:lstStyle/>
+                    <a:p>
+                      <a:endParaRPr lang="en-GB"/>
+                    </a:p>
+                  </a:txBody>
+                  <a:tcPr/>
+                </a:tc>
+                <a:tc>
+                  <a:txBody>
+                    <a:bodyPr/>
+                    <a:lstStyle/>
+                    <a:p>
+                      <a:endParaRPr lang="en-GB"/>
+                    </a:p>
+                  </a:txBody>
+                  <a:tcPr/>
+                </a:tc>
+                <a:tc>
+                  <a:txBody>
+                    <a:bodyPr/>
+                    <a:lstStyle/>
+                    <a:p>
+                      <a:endParaRPr lang="en-GB"/>
+                    </a:p>
+                  </a:txBody>
+                  <a:tcPr/>
+                </a:tc>
+                <a:extLst>
+                  <a:ext uri="{0D108BD9-81ED-4DB2-BD59-A6C34878D82A}">
+                    <a16:rowId xmlns:a16="http://schemas.microsoft.com/office/drawing/2014/main" val="1094028839"/>
+                  </a:ext>
+                </a:extLst>
+              </a:tr>
+            </a:tbl>
+          </a:graphicData>
+        </a:graphic>
+      </p:graphicFrame>
+    </p:spTree>
+    <p:extLst>
+      <p:ext uri="{BB962C8B-B14F-4D97-AF65-F5344CB8AC3E}">
+        <p14:creationId xmlns:p14="http://schemas.microsoft.com/office/powerpoint/2010/main" val="972748264"/>
+      </p:ext>
+    </p:extLst>
+  </p:cSld>
+  <p:clrMapOvr>
+    <a:masterClrMapping/>
+  </p:clrMapOvr>
+</p:sld>
+</file>
+
+<file path=ppt/slides/slide9.xml><?xml version="1.0" encoding="utf-8"?>
+<p:sld xmlns:a="http://schemas.openxmlformats.org/drawingml/2006/main" xmlns:r="http://schemas.openxmlformats.org/officeDocument/2006/relationships" xmlns:p="http://schemas.openxmlformats.org/presentationml/2006/main">
+  <p:cSld>
+    <p:spTree>
+      <p:nvGrpSpPr>
+        <p:cNvPr id="1" name=""/>
+        <p:cNvGrpSpPr/>
+        <p:nvPr/>
+      </p:nvGrpSpPr>
+      <p:grpSpPr>
+        <a:xfrm>
+          <a:off x="0" y="0"/>
+          <a:ext cx="0" cy="0"/>
+          <a:chOff x="0" y="0"/>
+          <a:chExt cx="0" cy="0"/>
+        </a:xfrm>
+      </p:grpSpPr>
+      <p:sp>
+        <p:nvSpPr>
+          <p:cNvPr id="2" name="Title 1">
+            <a:extLst>
+              <a:ext uri="{FF2B5EF4-FFF2-40B4-BE49-F238E27FC236}">
+                <a16:creationId xmlns:a16="http://schemas.microsoft.com/office/drawing/2014/main" id="{D134B6C8-95A6-295C-8766-37C3FAC1D392}"/>
+              </a:ext>
+            </a:extLst>
+          </p:cNvPr>
+          <p:cNvSpPr>
+            <a:spLocks noGrp="1"/>
+          </p:cNvSpPr>
+          <p:nvPr>
+            <p:ph type="title"/>
+          </p:nvPr>
+        </p:nvSpPr>
+        <p:spPr/>
+        <p:txBody>
+          <a:bodyPr/>
+          <a:lstStyle/>
+          <a:p>
+            <a:endParaRPr lang="en-GB"/>
+          </a:p>
+        </p:txBody>
+      </p:sp>
+      <p:graphicFrame>
+        <p:nvGraphicFramePr>
+          <p:cNvPr id="7" name="Content Placeholder 6">
+            <a:extLst>
+              <a:ext uri="{FF2B5EF4-FFF2-40B4-BE49-F238E27FC236}">
+                <a16:creationId xmlns:a16="http://schemas.microsoft.com/office/drawing/2014/main" id="{5CE69088-D07E-6B2D-0364-998ED183E1F0}"/>
+              </a:ext>
+            </a:extLst>
+          </p:cNvPr>
+          <p:cNvGraphicFramePr>
+            <a:graphicFrameLocks noGrp="1"/>
+          </p:cNvGraphicFramePr>
+          <p:nvPr>
+            <p:ph idx="1"/>
+            <p:extLst>
+              <p:ext uri="{D42A27DB-BD31-4B8C-83A1-F6EECF244321}">
+                <p14:modId xmlns:p14="http://schemas.microsoft.com/office/powerpoint/2010/main" val="4209724454"/>
+              </p:ext>
+            </p:extLst>
+          </p:nvPr>
+        </p:nvGraphicFramePr>
+        <p:xfrm>
+          <a:off x="576943" y="1690688"/>
+          <a:ext cx="10515600" cy="10830560"/>
+        </p:xfrm>
+        <a:graphic>
+          <a:graphicData uri="http://schemas.openxmlformats.org/drawingml/2006/table">
+            <a:tbl>
+              <a:tblPr firstRow="1" bandRow="1">
+                <a:tableStyleId>{5C22544A-7EE6-4342-B048-85BDC9FD1C3A}</a:tableStyleId>
+              </a:tblPr>
+              <a:tblGrid>
+                <a:gridCol w="1314450">
+                  <a:extLst>
+                    <a:ext uri="{9D8B030D-6E8A-4147-A177-3AD203B41FA5}">
+                      <a16:colId xmlns:a16="http://schemas.microsoft.com/office/drawing/2014/main" val="774775388"/>
+                    </a:ext>
+                  </a:extLst>
+                </a:gridCol>
+                <a:gridCol w="1314450">
+                  <a:extLst>
+                    <a:ext uri="{9D8B030D-6E8A-4147-A177-3AD203B41FA5}">
+                      <a16:colId xmlns:a16="http://schemas.microsoft.com/office/drawing/2014/main" val="4223624970"/>
+                    </a:ext>
+                  </a:extLst>
+                </a:gridCol>
+                <a:gridCol w="1314450">
+                  <a:extLst>
+                    <a:ext uri="{9D8B030D-6E8A-4147-A177-3AD203B41FA5}">
+                      <a16:colId xmlns:a16="http://schemas.microsoft.com/office/drawing/2014/main" val="656085967"/>
+                    </a:ext>
+                  </a:extLst>
+                </a:gridCol>
+                <a:gridCol w="1314450">
+                  <a:extLst>
+                    <a:ext uri="{9D8B030D-6E8A-4147-A177-3AD203B41FA5}">
+                      <a16:colId xmlns:a16="http://schemas.microsoft.com/office/drawing/2014/main" val="740210011"/>
+                    </a:ext>
+                  </a:extLst>
+                </a:gridCol>
+                <a:gridCol w="1314450">
+                  <a:extLst>
+                    <a:ext uri="{9D8B030D-6E8A-4147-A177-3AD203B41FA5}">
+                      <a16:colId xmlns:a16="http://schemas.microsoft.com/office/drawing/2014/main" val="3620375582"/>
+                    </a:ext>
+                  </a:extLst>
+                </a:gridCol>
+                <a:gridCol w="1314450">
+                  <a:extLst>
+                    <a:ext uri="{9D8B030D-6E8A-4147-A177-3AD203B41FA5}">
+                      <a16:colId xmlns:a16="http://schemas.microsoft.com/office/drawing/2014/main" val="1336674046"/>
+                    </a:ext>
+                  </a:extLst>
+                </a:gridCol>
+                <a:gridCol w="1314450">
+                  <a:extLst>
+                    <a:ext uri="{9D8B030D-6E8A-4147-A177-3AD203B41FA5}">
+                      <a16:colId xmlns:a16="http://schemas.microsoft.com/office/drawing/2014/main" val="2985342727"/>
+                    </a:ext>
+                  </a:extLst>
+                </a:gridCol>
+                <a:gridCol w="1314450">
+                  <a:extLst>
+                    <a:ext uri="{9D8B030D-6E8A-4147-A177-3AD203B41FA5}">
+                      <a16:colId xmlns:a16="http://schemas.microsoft.com/office/drawing/2014/main" val="233630075"/>
+                    </a:ext>
+                  </a:extLst>
+                </a:gridCol>
+              </a:tblGrid>
+              <a:tr h="370840">
+                <a:tc>
+                  <a:txBody>
+                    <a:bodyPr/>
+                    <a:lstStyle/>
+                    <a:p>
+                      <a:r>
+                        <a:rPr lang="en-GB"/>
+                        <a:t>User</a:t>
+                      </a:r>
+                    </a:p>
+                  </a:txBody>
+                  <a:tcPr/>
+                </a:tc>
+                <a:tc>
+                  <a:txBody>
+                    <a:bodyPr/>
+                    <a:lstStyle/>
+                    <a:p>
+                      <a:r>
+                        <a:rPr lang="en-GB"/>
+                        <a:t>Q1</a:t>
+                      </a:r>
+                    </a:p>
+                  </a:txBody>
+                  <a:tcPr/>
+                </a:tc>
+                <a:tc>
+                  <a:txBody>
+                    <a:bodyPr/>
+                    <a:lstStyle/>
+                    <a:p>
+                      <a:r>
+                        <a:rPr lang="en-GB"/>
+                        <a:t>Q2</a:t>
+                      </a:r>
+                    </a:p>
+                  </a:txBody>
+                  <a:tcPr/>
+                </a:tc>
+                <a:tc>
+                  <a:txBody>
+                    <a:bodyPr/>
+                    <a:lstStyle/>
+                    <a:p>
+                      <a:r>
+                        <a:rPr lang="en-GB"/>
+                        <a:t>Q4</a:t>
+                      </a:r>
+                    </a:p>
+                  </a:txBody>
+                  <a:tcPr/>
+                </a:tc>
+                <a:tc>
+                  <a:txBody>
+                    <a:bodyPr/>
+                    <a:lstStyle/>
+                    <a:p>
+                      <a:r>
+                        <a:rPr lang="en-GB"/>
+                        <a:t>Q5</a:t>
+                      </a:r>
+                    </a:p>
+                  </a:txBody>
+                  <a:tcPr/>
+                </a:tc>
+                <a:tc>
+                  <a:txBody>
+                    <a:bodyPr/>
+                    <a:lstStyle/>
+                    <a:p>
+                      <a:r>
+                        <a:rPr lang="en-GB"/>
+                        <a:t>Q6</a:t>
+                      </a:r>
+                    </a:p>
+                  </a:txBody>
+                  <a:tcPr/>
+                </a:tc>
+                <a:tc>
+                  <a:txBody>
+                    <a:bodyPr/>
+                    <a:lstStyle/>
+                    <a:p>
+                      <a:r>
+                        <a:rPr lang="en-GB"/>
+                        <a:t>Q8</a:t>
+                      </a:r>
+                    </a:p>
+                  </a:txBody>
+                  <a:tcPr/>
+                </a:tc>
+                <a:tc>
+                  <a:txBody>
+                    <a:bodyPr/>
+                    <a:lstStyle/>
+                    <a:p>
+                      <a:r>
+                        <a:rPr lang="en-GB"/>
+                        <a:t>Q9</a:t>
+                      </a:r>
+                    </a:p>
+                  </a:txBody>
+                  <a:tcPr/>
+                </a:tc>
+                <a:extLst>
+                  <a:ext uri="{0D108BD9-81ED-4DB2-BD59-A6C34878D82A}">
+                    <a16:rowId xmlns:a16="http://schemas.microsoft.com/office/drawing/2014/main" val="436100949"/>
+                  </a:ext>
+                </a:extLst>
+              </a:tr>
+              <a:tr h="370840">
+                <a:tc>
+                  <a:txBody>
+                    <a:bodyPr/>
+                    <a:lstStyle/>
+                    <a:p>
+                      <a:r>
+                        <a:rPr lang="en-GB"/>
+                        <a:t>User 1</a:t>
+                      </a:r>
+                    </a:p>
+                  </a:txBody>
+                  <a:tcPr/>
+                </a:tc>
+                <a:tc>
+                  <a:txBody>
+                    <a:bodyPr/>
+                    <a:lstStyle/>
+                    <a:p>
+                      <a:r>
+                        <a:rPr lang="en-GB"/>
+                        <a:t>Excellent</a:t>
+                      </a:r>
+                    </a:p>
+                  </a:txBody>
+                  <a:tcPr/>
+                </a:tc>
+                <a:tc>
+                  <a:txBody>
+                    <a:bodyPr/>
+                    <a:lstStyle/>
+                    <a:p>
+                      <a:r>
+                        <a:rPr lang="en-GB"/>
+                        <a:t>Few hours a day</a:t>
+                      </a:r>
+                    </a:p>
+                  </a:txBody>
+                  <a:tcPr/>
+                </a:tc>
+                <a:tc>
+                  <a:txBody>
+                    <a:bodyPr/>
+                    <a:lstStyle/>
+                    <a:p>
+                      <a:r>
+                        <a:rPr lang="en-GB"/>
+                        <a:t>9/10</a:t>
+                      </a:r>
+                    </a:p>
+                  </a:txBody>
+                  <a:tcPr/>
+                </a:tc>
+                <a:tc>
+                  <a:txBody>
+                    <a:bodyPr/>
+                    <a:lstStyle/>
+                    <a:p>
+                      <a:r>
+                        <a:rPr lang="en-GB"/>
+                        <a:t>Yes</a:t>
+                      </a:r>
+                    </a:p>
+                  </a:txBody>
+                  <a:tcPr/>
+                </a:tc>
+                <a:tc>
+                  <a:txBody>
+                    <a:bodyPr/>
+                    <a:lstStyle/>
+                    <a:p>
+                      <a:r>
+                        <a:rPr lang="en-GB"/>
+                        <a:t>7/10</a:t>
+                      </a:r>
+                    </a:p>
+                  </a:txBody>
+                  <a:tcPr/>
+                </a:tc>
+                <a:tc>
+                  <a:txBody>
+                    <a:bodyPr/>
+                    <a:lstStyle/>
+                    <a:p>
+                      <a:r>
+                        <a:rPr lang="en-GB"/>
+                        <a:t>7/10</a:t>
+                      </a:r>
+                    </a:p>
+                  </a:txBody>
+                  <a:tcPr/>
+                </a:tc>
+                <a:tc>
+                  <a:txBody>
+                    <a:bodyPr/>
+                    <a:lstStyle/>
+                    <a:p>
+                      <a:r>
+                        <a:rPr lang="en-GB"/>
+                        <a:t>6/10</a:t>
+                      </a:r>
+                    </a:p>
+                  </a:txBody>
+                  <a:tcPr/>
+                </a:tc>
+                <a:extLst>
+                  <a:ext uri="{0D108BD9-81ED-4DB2-BD59-A6C34878D82A}">
+                    <a16:rowId xmlns:a16="http://schemas.microsoft.com/office/drawing/2014/main" val="3097725850"/>
+                  </a:ext>
+                </a:extLst>
+              </a:tr>
+              <a:tr h="370840">
+                <a:tc>
+                  <a:txBody>
+                    <a:bodyPr/>
+                    <a:lstStyle/>
+                    <a:p>
+                      <a:r>
+                        <a:rPr lang="en-GB"/>
+                        <a:t>User 2</a:t>
+                      </a:r>
+                    </a:p>
+                  </a:txBody>
+                  <a:tcPr/>
+                </a:tc>
+                <a:tc>
+                  <a:txBody>
+                    <a:bodyPr/>
+                    <a:lstStyle/>
+                    <a:p>
+                      <a:r>
+                        <a:rPr lang="en-GB"/>
+                        <a:t>Good</a:t>
+                      </a:r>
+                    </a:p>
+                  </a:txBody>
+                  <a:tcPr/>
+                </a:tc>
+                <a:tc>
+                  <a:txBody>
+                    <a:bodyPr/>
+                    <a:lstStyle/>
+                    <a:p>
+                      <a:r>
+                        <a:rPr lang="en-GB"/>
+                        <a:t>Few hours a day</a:t>
+                      </a:r>
+                    </a:p>
+                  </a:txBody>
+                  <a:tcPr/>
+                </a:tc>
+                <a:tc>
+                  <a:txBody>
+                    <a:bodyPr/>
+                    <a:lstStyle/>
+                    <a:p>
+                      <a:r>
+                        <a:rPr lang="en-GB"/>
+                        <a:t>10/10</a:t>
+                      </a:r>
+                    </a:p>
+                  </a:txBody>
+                  <a:tcPr/>
+                </a:tc>
+                <a:tc>
+                  <a:txBody>
+                    <a:bodyPr/>
+                    <a:lstStyle/>
+                    <a:p>
+                      <a:r>
+                        <a:rPr lang="en-GB"/>
+                        <a:t>Yes</a:t>
+                      </a:r>
+                    </a:p>
+                  </a:txBody>
+                  <a:tcPr/>
+                </a:tc>
+                <a:tc>
+                  <a:txBody>
+                    <a:bodyPr/>
+                    <a:lstStyle/>
+                    <a:p>
+                      <a:r>
+                        <a:rPr lang="en-GB"/>
+                        <a:t>8/10</a:t>
+                      </a:r>
+                    </a:p>
+                  </a:txBody>
+                  <a:tcPr/>
+                </a:tc>
+                <a:tc>
+                  <a:txBody>
+                    <a:bodyPr/>
+                    <a:lstStyle/>
+                    <a:p>
+                      <a:r>
+                        <a:rPr lang="en-GB"/>
+                        <a:t>8/10</a:t>
+                      </a:r>
+                    </a:p>
+                  </a:txBody>
+                  <a:tcPr/>
+                </a:tc>
+                <a:tc>
+                  <a:txBody>
+                    <a:bodyPr/>
+                    <a:lstStyle/>
+                    <a:p>
+                      <a:r>
+                        <a:rPr lang="en-GB"/>
+                        <a:t>8/10</a:t>
+                      </a:r>
+                    </a:p>
+                  </a:txBody>
+                  <a:tcPr/>
+                </a:tc>
+                <a:extLst>
+                  <a:ext uri="{0D108BD9-81ED-4DB2-BD59-A6C34878D82A}">
+                    <a16:rowId xmlns:a16="http://schemas.microsoft.com/office/drawing/2014/main" val="1163578505"/>
+                  </a:ext>
+                </a:extLst>
+              </a:tr>
+              <a:tr h="370840">
+                <a:tc>
+                  <a:txBody>
+                    <a:bodyPr/>
+                    <a:lstStyle/>
+                    <a:p>
+                      <a:r>
+                        <a:rPr lang="en-GB"/>
+                        <a:t>User 3</a:t>
+                      </a:r>
+                    </a:p>
+                  </a:txBody>
+                  <a:tcPr/>
+                </a:tc>
+                <a:tc>
+                  <a:txBody>
+                    <a:bodyPr/>
+                    <a:lstStyle/>
+                    <a:p>
+                      <a:r>
+                        <a:rPr lang="en-GB"/>
+                        <a:t>Good</a:t>
+                      </a:r>
+                    </a:p>
+                  </a:txBody>
+                  <a:tcPr/>
+                </a:tc>
+                <a:tc>
+                  <a:txBody>
+                    <a:bodyPr/>
+                    <a:lstStyle/>
+                    <a:p>
+                      <a:r>
+                        <a:rPr lang="en-GB"/>
+                        <a:t>Few times a week</a:t>
+                      </a:r>
+                    </a:p>
+                  </a:txBody>
+                  <a:tcPr/>
+                </a:tc>
+                <a:tc>
+                  <a:txBody>
+                    <a:bodyPr/>
+                    <a:lstStyle/>
+                    <a:p>
+                      <a:r>
+                        <a:rPr lang="en-GB"/>
+                        <a:t>7/10</a:t>
+                      </a:r>
+                    </a:p>
+                  </a:txBody>
+                  <a:tcPr/>
+                </a:tc>
+                <a:tc>
+                  <a:txBody>
+                    <a:bodyPr/>
+                    <a:lstStyle/>
+                    <a:p>
+                      <a:r>
+                        <a:rPr lang="en-GB"/>
+                        <a:t>Yes</a:t>
+                      </a:r>
+                    </a:p>
+                  </a:txBody>
+                  <a:tcPr/>
+                </a:tc>
+                <a:tc>
+                  <a:txBody>
+                    <a:bodyPr/>
+                    <a:lstStyle/>
+                    <a:p>
+                      <a:r>
+                        <a:rPr lang="en-GB"/>
+                        <a:t>7/10</a:t>
+                      </a:r>
+                    </a:p>
+                  </a:txBody>
+                  <a:tcPr/>
+                </a:tc>
+                <a:tc>
+                  <a:txBody>
+                    <a:bodyPr/>
+                    <a:lstStyle/>
+                    <a:p>
+                      <a:r>
+                        <a:rPr lang="en-GB"/>
+                        <a:t>10/10</a:t>
+                      </a:r>
+                    </a:p>
+                  </a:txBody>
+                  <a:tcPr/>
+                </a:tc>
+                <a:tc>
+                  <a:txBody>
+                    <a:bodyPr/>
+                    <a:lstStyle/>
+                    <a:p>
+                      <a:r>
+                        <a:rPr lang="en-GB"/>
+                        <a:t>8/10</a:t>
+                      </a:r>
+                    </a:p>
+                  </a:txBody>
+                  <a:tcPr/>
+                </a:tc>
+                <a:extLst>
+                  <a:ext uri="{0D108BD9-81ED-4DB2-BD59-A6C34878D82A}">
+                    <a16:rowId xmlns:a16="http://schemas.microsoft.com/office/drawing/2014/main" val="1599934660"/>
+                  </a:ext>
+                </a:extLst>
+              </a:tr>
+              <a:tr h="370840">
+                <a:tc>
+                  <a:txBody>
+                    <a:bodyPr/>
+                    <a:lstStyle/>
+                    <a:p>
+                      <a:r>
+                        <a:rPr lang="en-GB"/>
+                        <a:t>User 4</a:t>
+                      </a:r>
+                    </a:p>
+                  </a:txBody>
+                  <a:tcPr/>
+                </a:tc>
+                <a:tc>
+                  <a:txBody>
+                    <a:bodyPr/>
+                    <a:lstStyle/>
+                    <a:p>
+                      <a:r>
+                        <a:rPr lang="en-GB"/>
+                        <a:t>Good</a:t>
+                      </a:r>
+                    </a:p>
+                  </a:txBody>
+                  <a:tcPr/>
+                </a:tc>
+                <a:tc>
+                  <a:txBody>
+                    <a:bodyPr/>
+                    <a:lstStyle/>
+                    <a:p>
+                      <a:r>
+                        <a:rPr lang="en-GB"/>
+                        <a:t>Few times a week</a:t>
+                      </a:r>
+                    </a:p>
+                  </a:txBody>
+                  <a:tcPr/>
+                </a:tc>
+                <a:tc>
+                  <a:txBody>
+                    <a:bodyPr/>
+                    <a:lstStyle/>
+                    <a:p>
+                      <a:r>
+                        <a:rPr lang="en-GB"/>
+                        <a:t>7/10</a:t>
+                      </a:r>
+                    </a:p>
+                  </a:txBody>
+                  <a:tcPr/>
+                </a:tc>
+                <a:tc>
+                  <a:txBody>
+                    <a:bodyPr/>
+                    <a:lstStyle/>
+                    <a:p>
+                      <a:r>
+                        <a:rPr lang="en-GB"/>
+                        <a:t>No</a:t>
+                      </a:r>
+                    </a:p>
+                  </a:txBody>
+                  <a:tcPr/>
+                </a:tc>
+                <a:tc>
+                  <a:txBody>
+                    <a:bodyPr/>
+                    <a:lstStyle/>
+                    <a:p>
+                      <a:r>
+                        <a:rPr lang="en-GB"/>
+                        <a:t>7/10</a:t>
+                      </a:r>
+                    </a:p>
+                  </a:txBody>
+                  <a:tcPr/>
+                </a:tc>
+                <a:tc>
+                  <a:txBody>
+                    <a:bodyPr/>
+                    <a:lstStyle/>
+                    <a:p>
+                      <a:r>
+                        <a:rPr lang="en-GB"/>
+                        <a:t>9/10</a:t>
+                      </a:r>
+                    </a:p>
+                  </a:txBody>
+                  <a:tcPr/>
+                </a:tc>
+                <a:tc>
+                  <a:txBody>
+                    <a:bodyPr/>
+                    <a:lstStyle/>
+                    <a:p>
+                      <a:r>
+                        <a:rPr lang="en-GB"/>
+                        <a:t>7/10</a:t>
+                      </a:r>
+                    </a:p>
+                  </a:txBody>
+                  <a:tcPr/>
+                </a:tc>
+                <a:extLst>
+                  <a:ext uri="{0D108BD9-81ED-4DB2-BD59-A6C34878D82A}">
+                    <a16:rowId xmlns:a16="http://schemas.microsoft.com/office/drawing/2014/main" val="288206116"/>
+                  </a:ext>
+                </a:extLst>
+              </a:tr>
+              <a:tr h="370840">
+                <a:tc>
+                  <a:txBody>
+                    <a:bodyPr/>
+                    <a:lstStyle/>
+                    <a:p>
+                      <a:r>
+                        <a:rPr lang="en-GB"/>
+                        <a:t>User 5</a:t>
+                      </a:r>
+                    </a:p>
+                  </a:txBody>
+                  <a:tcPr/>
+                </a:tc>
+                <a:tc>
+                  <a:txBody>
+                    <a:bodyPr/>
+                    <a:lstStyle/>
+                    <a:p>
+                      <a:r>
+                        <a:rPr lang="en-GB"/>
+                        <a:t>Good</a:t>
+                      </a:r>
+                    </a:p>
+                  </a:txBody>
+                  <a:tcPr/>
+                </a:tc>
+                <a:tc>
+                  <a:txBody>
+                    <a:bodyPr/>
+                    <a:lstStyle/>
+                    <a:p>
+                      <a:r>
+                        <a:rPr lang="en-GB"/>
+                        <a:t>Few hours a day</a:t>
+                      </a:r>
+                    </a:p>
+                  </a:txBody>
+                  <a:tcPr/>
+                </a:tc>
+                <a:tc>
+                  <a:txBody>
+                    <a:bodyPr/>
+                    <a:lstStyle/>
+                    <a:p>
+                      <a:r>
+                        <a:rPr lang="en-GB"/>
+                        <a:t>10/10</a:t>
+                      </a:r>
+                    </a:p>
+                  </a:txBody>
+                  <a:tcPr/>
+                </a:tc>
+                <a:tc>
+                  <a:txBody>
+                    <a:bodyPr/>
+                    <a:lstStyle/>
+                    <a:p>
+                      <a:r>
+                        <a:rPr lang="en-GB"/>
+                        <a:t>Yes</a:t>
+                      </a:r>
+                    </a:p>
+                  </a:txBody>
+                  <a:tcPr/>
+                </a:tc>
+                <a:tc>
+                  <a:txBody>
+                    <a:bodyPr/>
+                    <a:lstStyle/>
+                    <a:p>
+                      <a:r>
+                        <a:rPr lang="en-GB"/>
+                        <a:t>6/10</a:t>
+                      </a:r>
+                    </a:p>
+                  </a:txBody>
+                  <a:tcPr/>
+                </a:tc>
+                <a:tc>
+                  <a:txBody>
+                    <a:bodyPr/>
+                    <a:lstStyle/>
+                    <a:p>
+                      <a:r>
+                        <a:rPr lang="en-GB"/>
+                        <a:t>10/10</a:t>
+                      </a:r>
+                    </a:p>
+                  </a:txBody>
+                  <a:tcPr/>
+                </a:tc>
+                <a:tc>
+                  <a:txBody>
+                    <a:bodyPr/>
+                    <a:lstStyle/>
+                    <a:p>
+                      <a:r>
+                        <a:rPr lang="en-GB"/>
+                        <a:t>7/10</a:t>
+                      </a:r>
+                    </a:p>
+                  </a:txBody>
+                  <a:tcPr/>
+                </a:tc>
+                <a:extLst>
+                  <a:ext uri="{0D108BD9-81ED-4DB2-BD59-A6C34878D82A}">
+                    <a16:rowId xmlns:a16="http://schemas.microsoft.com/office/drawing/2014/main" val="1388090111"/>
+                  </a:ext>
+                </a:extLst>
+              </a:tr>
+              <a:tr h="370840">
+                <a:tc>
+                  <a:txBody>
+                    <a:bodyPr/>
+                    <a:lstStyle/>
+                    <a:p>
+                      <a:r>
+                        <a:rPr lang="en-GB"/>
+                        <a:t>User 6</a:t>
+                      </a:r>
+                    </a:p>
+                  </a:txBody>
+                  <a:tcPr/>
+                </a:tc>
+                <a:tc>
+                  <a:txBody>
+                    <a:bodyPr/>
+                    <a:lstStyle/>
+                    <a:p>
+                      <a:r>
+                        <a:rPr lang="en-GB"/>
+                        <a:t>Good</a:t>
+                      </a:r>
+                    </a:p>
+                  </a:txBody>
+                  <a:tcPr/>
+                </a:tc>
+                <a:tc>
+                  <a:txBody>
+                    <a:bodyPr/>
+                    <a:lstStyle/>
+                    <a:p>
+                      <a:r>
+                        <a:rPr lang="en-GB"/>
+                        <a:t>Few times a week</a:t>
+                      </a:r>
+                    </a:p>
+                  </a:txBody>
+                  <a:tcPr/>
+                </a:tc>
+                <a:tc>
+                  <a:txBody>
+                    <a:bodyPr/>
+                    <a:lstStyle/>
+                    <a:p>
+                      <a:r>
+                        <a:rPr lang="en-GB"/>
+                        <a:t>8/10</a:t>
+                      </a:r>
+                    </a:p>
+                  </a:txBody>
+                  <a:tcPr/>
+                </a:tc>
+                <a:tc>
+                  <a:txBody>
+                    <a:bodyPr/>
+                    <a:lstStyle/>
+                    <a:p>
+                      <a:r>
+                        <a:rPr lang="en-GB"/>
+                        <a:t>Yes</a:t>
+                      </a:r>
+                    </a:p>
+                  </a:txBody>
+                  <a:tcPr/>
+                </a:tc>
+                <a:tc>
+                  <a:txBody>
+                    <a:bodyPr/>
+                    <a:lstStyle/>
+                    <a:p>
+                      <a:r>
+                        <a:rPr lang="en-GB"/>
+                        <a:t>7/10</a:t>
+                      </a:r>
+                    </a:p>
+                  </a:txBody>
+                  <a:tcPr/>
+                </a:tc>
+                <a:tc>
+                  <a:txBody>
+                    <a:bodyPr/>
+                    <a:lstStyle/>
+                    <a:p>
+                      <a:r>
+                        <a:rPr lang="en-GB"/>
+                        <a:t>8/10</a:t>
+                      </a:r>
+                    </a:p>
+                  </a:txBody>
+                  <a:tcPr/>
+                </a:tc>
+                <a:tc>
+                  <a:txBody>
+                    <a:bodyPr/>
+                    <a:lstStyle/>
+                    <a:p>
+                      <a:r>
+                        <a:rPr lang="en-GB"/>
+                        <a:t>9/10</a:t>
+                      </a:r>
+                    </a:p>
+                  </a:txBody>
+                  <a:tcPr/>
+                </a:tc>
+                <a:extLst>
+                  <a:ext uri="{0D108BD9-81ED-4DB2-BD59-A6C34878D82A}">
+                    <a16:rowId xmlns:a16="http://schemas.microsoft.com/office/drawing/2014/main" val="2302692820"/>
+                  </a:ext>
+                </a:extLst>
+              </a:tr>
+              <a:tr h="370840">
+                <a:tc>
+                  <a:txBody>
+                    <a:bodyPr/>
+                    <a:lstStyle/>
+                    <a:p>
+                      <a:r>
+                        <a:rPr lang="en-GB"/>
+                        <a:t>User 7</a:t>
+                      </a:r>
+                    </a:p>
+                  </a:txBody>
+                  <a:tcPr/>
+                </a:tc>
+                <a:tc>
+                  <a:txBody>
+                    <a:bodyPr/>
+                    <a:lstStyle/>
+                    <a:p>
+                      <a:r>
+                        <a:rPr lang="en-GB"/>
+                        <a:t>Excellent</a:t>
+                      </a:r>
+                    </a:p>
+                  </a:txBody>
+                  <a:tcPr/>
+                </a:tc>
+                <a:tc>
+                  <a:txBody>
+                    <a:bodyPr/>
+                    <a:lstStyle/>
+                    <a:p>
+                      <a:r>
+                        <a:rPr lang="en-GB"/>
+                        <a:t>Many hours a day</a:t>
+                      </a:r>
+                    </a:p>
+                  </a:txBody>
+                  <a:tcPr/>
+                </a:tc>
+                <a:tc>
+                  <a:txBody>
+                    <a:bodyPr/>
+                    <a:lstStyle/>
+                    <a:p>
+                      <a:r>
+                        <a:rPr lang="en-GB"/>
+                        <a:t>10/10</a:t>
+                      </a:r>
+                    </a:p>
+                  </a:txBody>
+                  <a:tcPr/>
+                </a:tc>
+                <a:tc>
+                  <a:txBody>
+                    <a:bodyPr/>
+                    <a:lstStyle/>
+                    <a:p>
+                      <a:r>
+                        <a:rPr lang="en-GB"/>
+                        <a:t>No</a:t>
+                      </a:r>
+                    </a:p>
+                  </a:txBody>
+                  <a:tcPr/>
+                </a:tc>
+                <a:tc>
+                  <a:txBody>
+                    <a:bodyPr/>
+                    <a:lstStyle/>
+                    <a:p>
+                      <a:r>
+                        <a:rPr lang="en-GB"/>
+                        <a:t>8/10</a:t>
+                      </a:r>
+                    </a:p>
+                  </a:txBody>
+                  <a:tcPr/>
+                </a:tc>
+                <a:tc>
+                  <a:txBody>
+                    <a:bodyPr/>
+                    <a:lstStyle/>
+                    <a:p>
+                      <a:r>
+                        <a:rPr lang="en-GB"/>
+                        <a:t>8/10</a:t>
+                      </a:r>
+                    </a:p>
+                  </a:txBody>
+                  <a:tcPr/>
+                </a:tc>
+                <a:tc>
+                  <a:txBody>
+                    <a:bodyPr/>
+                    <a:lstStyle/>
+                    <a:p>
+                      <a:r>
+                        <a:rPr lang="en-GB"/>
+                        <a:t>10/10</a:t>
+                      </a:r>
+                    </a:p>
+                  </a:txBody>
+                  <a:tcPr/>
+                </a:tc>
+                <a:extLst>
+                  <a:ext uri="{0D108BD9-81ED-4DB2-BD59-A6C34878D82A}">
+                    <a16:rowId xmlns:a16="http://schemas.microsoft.com/office/drawing/2014/main" val="2599998837"/>
+                  </a:ext>
+                </a:extLst>
+              </a:tr>
+              <a:tr h="370840">
+                <a:tc>
+                  <a:txBody>
+                    <a:bodyPr/>
+                    <a:lstStyle/>
+                    <a:p>
+                      <a:r>
+                        <a:rPr lang="en-GB"/>
+                        <a:t>User 8</a:t>
+                      </a:r>
+                    </a:p>
+                  </a:txBody>
+                  <a:tcPr/>
+                </a:tc>
+                <a:tc>
+                  <a:txBody>
+                    <a:bodyPr/>
+                    <a:lstStyle/>
+                    <a:p>
+                      <a:r>
+                        <a:rPr lang="en-GB"/>
+                        <a:t>Good</a:t>
+                      </a:r>
+                    </a:p>
+                  </a:txBody>
+                  <a:tcPr/>
+                </a:tc>
+                <a:tc>
+                  <a:txBody>
+                    <a:bodyPr/>
+                    <a:lstStyle/>
+                    <a:p>
+                      <a:r>
+                        <a:rPr lang="en-GB"/>
+                        <a:t>Few hours a day</a:t>
+                      </a:r>
+                    </a:p>
+                  </a:txBody>
+                  <a:tcPr/>
+                </a:tc>
+                <a:tc>
+                  <a:txBody>
+                    <a:bodyPr/>
+                    <a:lstStyle/>
+                    <a:p>
+                      <a:r>
+                        <a:rPr lang="en-GB"/>
+                        <a:t>7/10</a:t>
+                      </a:r>
+                    </a:p>
+                  </a:txBody>
+                  <a:tcPr/>
+                </a:tc>
+                <a:tc>
+                  <a:txBody>
+                    <a:bodyPr/>
+                    <a:lstStyle/>
+                    <a:p>
+                      <a:r>
+                        <a:rPr lang="en-GB"/>
+                        <a:t>Yes</a:t>
+                      </a:r>
+                    </a:p>
+                  </a:txBody>
+                  <a:tcPr/>
+                </a:tc>
+                <a:tc>
+                  <a:txBody>
+                    <a:bodyPr/>
+                    <a:lstStyle/>
+                    <a:p>
+                      <a:r>
+                        <a:rPr lang="en-GB"/>
+                        <a:t>8/10</a:t>
+                      </a:r>
+                    </a:p>
+                  </a:txBody>
+                  <a:tcPr/>
+                </a:tc>
+                <a:tc>
+                  <a:txBody>
+                    <a:bodyPr/>
+                    <a:lstStyle/>
+                    <a:p>
+                      <a:r>
+                        <a:rPr lang="en-GB"/>
+                        <a:t>7/10</a:t>
+                      </a:r>
+                    </a:p>
+                  </a:txBody>
+                  <a:tcPr/>
+                </a:tc>
+                <a:tc>
+                  <a:txBody>
+                    <a:bodyPr/>
+                    <a:lstStyle/>
+                    <a:p>
+                      <a:r>
+                        <a:rPr lang="en-GB"/>
+                        <a:t>8/10</a:t>
+                      </a:r>
+                    </a:p>
+                  </a:txBody>
+                  <a:tcPr/>
+                </a:tc>
+                <a:extLst>
+                  <a:ext uri="{0D108BD9-81ED-4DB2-BD59-A6C34878D82A}">
+                    <a16:rowId xmlns:a16="http://schemas.microsoft.com/office/drawing/2014/main" val="1870292549"/>
+                  </a:ext>
+                </a:extLst>
+              </a:tr>
+              <a:tr h="370840">
+                <a:tc>
+                  <a:txBody>
+                    <a:bodyPr/>
+                    <a:lstStyle/>
+                    <a:p>
+                      <a:r>
+                        <a:rPr lang="en-GB"/>
+                        <a:t>User 9</a:t>
+                      </a:r>
+                    </a:p>
+                  </a:txBody>
+                  <a:tcPr/>
+                </a:tc>
+                <a:tc>
+                  <a:txBody>
+                    <a:bodyPr/>
+                    <a:lstStyle/>
+                    <a:p>
+                      <a:r>
+                        <a:rPr lang="en-GB"/>
+                        <a:t>Good</a:t>
+                      </a:r>
+                    </a:p>
+                  </a:txBody>
+                  <a:tcPr/>
+                </a:tc>
+                <a:tc>
+                  <a:txBody>
+                    <a:bodyPr/>
+                    <a:lstStyle/>
+                    <a:p>
+                      <a:r>
+                        <a:rPr lang="en-GB"/>
+                        <a:t>Many hours a day</a:t>
+                      </a:r>
+                    </a:p>
+                  </a:txBody>
+                  <a:tcPr/>
+                </a:tc>
+                <a:tc>
+                  <a:txBody>
+                    <a:bodyPr/>
+                    <a:lstStyle/>
+                    <a:p>
+                      <a:r>
+                        <a:rPr lang="en-GB"/>
+                        <a:t>8/10</a:t>
+                      </a:r>
+                    </a:p>
+                  </a:txBody>
+                  <a:tcPr/>
+                </a:tc>
+                <a:tc>
+                  <a:txBody>
+                    <a:bodyPr/>
+                    <a:lstStyle/>
+                    <a:p>
+                      <a:r>
+                        <a:rPr lang="en-GB"/>
+                        <a:t>Yes</a:t>
+                      </a:r>
+                    </a:p>
+                  </a:txBody>
+                  <a:tcPr/>
+                </a:tc>
+                <a:tc>
+                  <a:txBody>
+                    <a:bodyPr/>
+                    <a:lstStyle/>
+                    <a:p>
+                      <a:r>
+                        <a:rPr lang="en-GB"/>
+                        <a:t>6/10</a:t>
+                      </a:r>
+                    </a:p>
+                  </a:txBody>
+                  <a:tcPr/>
+                </a:tc>
+                <a:tc>
+                  <a:txBody>
+                    <a:bodyPr/>
+                    <a:lstStyle/>
+                    <a:p>
+                      <a:r>
+                        <a:rPr lang="en-GB"/>
+                        <a:t>10/10</a:t>
+                      </a:r>
+                    </a:p>
+                  </a:txBody>
+                  <a:tcPr/>
+                </a:tc>
+                <a:tc>
+                  <a:txBody>
+                    <a:bodyPr/>
+                    <a:lstStyle/>
+                    <a:p>
+                      <a:r>
+                        <a:rPr lang="en-GB"/>
+                        <a:t>9/10</a:t>
+                      </a:r>
+                    </a:p>
+                  </a:txBody>
+                  <a:tcPr/>
+                </a:tc>
+                <a:extLst>
+                  <a:ext uri="{0D108BD9-81ED-4DB2-BD59-A6C34878D82A}">
+                    <a16:rowId xmlns:a16="http://schemas.microsoft.com/office/drawing/2014/main" val="2991584095"/>
+                  </a:ext>
+                </a:extLst>
+              </a:tr>
+              <a:tr h="370840">
+                <a:tc>
+                  <a:txBody>
+                    <a:bodyPr/>
+                    <a:lstStyle/>
+                    <a:p>
+                      <a:r>
+                        <a:rPr lang="en-GB"/>
+                        <a:t>User 10</a:t>
+                      </a:r>
+                    </a:p>
+                  </a:txBody>
+                  <a:tcPr/>
+                </a:tc>
+                <a:tc>
+                  <a:txBody>
+                    <a:bodyPr/>
+                    <a:lstStyle/>
+                    <a:p>
+                      <a:r>
+                        <a:rPr lang="en-GB"/>
+                        <a:t>Good</a:t>
+                      </a:r>
+                    </a:p>
+                  </a:txBody>
+                  <a:tcPr/>
+                </a:tc>
+                <a:tc>
+                  <a:txBody>
+                    <a:bodyPr/>
+                    <a:lstStyle/>
+                    <a:p>
+                      <a:r>
+                        <a:rPr lang="en-GB"/>
+                        <a:t>Few hours a day</a:t>
+                      </a:r>
+                    </a:p>
+                  </a:txBody>
+                  <a:tcPr/>
+                </a:tc>
+                <a:tc>
+                  <a:txBody>
+                    <a:bodyPr/>
+                    <a:lstStyle/>
+                    <a:p>
+                      <a:r>
+                        <a:rPr lang="en-GB"/>
+                        <a:t>8/10</a:t>
+                      </a:r>
+                    </a:p>
+                  </a:txBody>
+                  <a:tcPr/>
+                </a:tc>
+                <a:tc>
+                  <a:txBody>
+                    <a:bodyPr/>
+                    <a:lstStyle/>
+                    <a:p>
+                      <a:r>
+                        <a:rPr lang="en-GB"/>
+                        <a:t>No</a:t>
+                      </a:r>
+                    </a:p>
+                  </a:txBody>
+                  <a:tcPr/>
+                </a:tc>
+                <a:tc>
+                  <a:txBody>
+                    <a:bodyPr/>
+                    <a:lstStyle/>
+                    <a:p>
+                      <a:r>
+                        <a:rPr lang="en-GB"/>
+                        <a:t>9/10</a:t>
+                      </a:r>
+                    </a:p>
+                  </a:txBody>
+                  <a:tcPr/>
+                </a:tc>
+                <a:tc>
+                  <a:txBody>
+                    <a:bodyPr/>
+                    <a:lstStyle/>
+                    <a:p>
+                      <a:r>
+                        <a:rPr lang="en-GB"/>
+                        <a:t>10/10</a:t>
+                      </a:r>
+                    </a:p>
+                  </a:txBody>
+                  <a:tcPr/>
+                </a:tc>
+                <a:tc>
+                  <a:txBody>
+                    <a:bodyPr/>
+                    <a:lstStyle/>
+                    <a:p>
+                      <a:r>
+                        <a:rPr lang="en-GB"/>
+                        <a:t>10/10</a:t>
+                      </a:r>
+                    </a:p>
+                  </a:txBody>
+                  <a:tcPr/>
+                </a:tc>
+                <a:extLst>
+                  <a:ext uri="{0D108BD9-81ED-4DB2-BD59-A6C34878D82A}">
+                    <a16:rowId xmlns:a16="http://schemas.microsoft.com/office/drawing/2014/main" val="1625391122"/>
+                  </a:ext>
+                </a:extLst>
+              </a:tr>
+              <a:tr h="370840">
+                <a:tc>
+                  <a:txBody>
+                    <a:bodyPr/>
+                    <a:lstStyle/>
+                    <a:p>
+                      <a:r>
+                        <a:rPr lang="en-GB"/>
+                        <a:t>User 11</a:t>
+                      </a:r>
+                    </a:p>
+                  </a:txBody>
+                  <a:tcPr/>
+                </a:tc>
+                <a:tc>
+                  <a:txBody>
+                    <a:bodyPr/>
+                    <a:lstStyle/>
+                    <a:p>
+                      <a:r>
+                        <a:rPr lang="en-GB"/>
+                        <a:t>Good</a:t>
+                      </a:r>
+                    </a:p>
+                  </a:txBody>
+                  <a:tcPr/>
+                </a:tc>
+                <a:tc>
+                  <a:txBody>
+                    <a:bodyPr/>
+                    <a:lstStyle/>
+                    <a:p>
+                      <a:r>
+                        <a:rPr lang="en-GB"/>
+                        <a:t>Many hours a day</a:t>
+                      </a:r>
+                    </a:p>
+                  </a:txBody>
+                  <a:tcPr/>
+                </a:tc>
+                <a:tc>
+                  <a:txBody>
+                    <a:bodyPr/>
+                    <a:lstStyle/>
+                    <a:p>
+                      <a:r>
+                        <a:rPr lang="en-GB"/>
+                        <a:t>7/10</a:t>
+                      </a:r>
+                    </a:p>
+                  </a:txBody>
+                  <a:tcPr/>
+                </a:tc>
+                <a:tc>
+                  <a:txBody>
+                    <a:bodyPr/>
+                    <a:lstStyle/>
+                    <a:p>
+                      <a:r>
+                        <a:rPr lang="en-GB"/>
+                        <a:t>Yes</a:t>
+                      </a:r>
+                    </a:p>
+                  </a:txBody>
+                  <a:tcPr/>
+                </a:tc>
+                <a:tc>
+                  <a:txBody>
+                    <a:bodyPr/>
+                    <a:lstStyle/>
+                    <a:p>
+                      <a:r>
+                        <a:rPr lang="en-GB"/>
+                        <a:t>8/10</a:t>
+                      </a:r>
+                    </a:p>
+                  </a:txBody>
+                  <a:tcPr/>
+                </a:tc>
+                <a:tc>
+                  <a:txBody>
+                    <a:bodyPr/>
+                    <a:lstStyle/>
+                    <a:p>
+                      <a:r>
+                        <a:rPr lang="en-GB"/>
+                        <a:t>6/10</a:t>
+                      </a:r>
+                    </a:p>
+                  </a:txBody>
+                  <a:tcPr/>
+                </a:tc>
+                <a:tc>
+                  <a:txBody>
+                    <a:bodyPr/>
+                    <a:lstStyle/>
+                    <a:p>
+                      <a:r>
+                        <a:rPr lang="en-GB"/>
+                        <a:t>9/10</a:t>
+                      </a:r>
+                    </a:p>
+                  </a:txBody>
+                  <a:tcPr/>
+                </a:tc>
+                <a:extLst>
+                  <a:ext uri="{0D108BD9-81ED-4DB2-BD59-A6C34878D82A}">
+                    <a16:rowId xmlns:a16="http://schemas.microsoft.com/office/drawing/2014/main" val="681538946"/>
+                  </a:ext>
+                </a:extLst>
+              </a:tr>
+              <a:tr h="370840">
+                <a:tc>
+                  <a:txBody>
+                    <a:bodyPr/>
+                    <a:lstStyle/>
+                    <a:p>
+                      <a:r>
+                        <a:rPr lang="en-GB"/>
+                        <a:t>User 12</a:t>
+                      </a:r>
+                    </a:p>
+                  </a:txBody>
+                  <a:tcPr/>
+                </a:tc>
+                <a:tc>
+                  <a:txBody>
+                    <a:bodyPr/>
+                    <a:lstStyle/>
+                    <a:p>
+                      <a:endParaRPr lang="en-GB"/>
+                    </a:p>
+                  </a:txBody>
+                  <a:tcPr/>
+                </a:tc>
+                <a:tc>
+                  <a:txBody>
+                    <a:bodyPr/>
+                    <a:lstStyle/>
+                    <a:p>
+                      <a:endParaRPr lang="en-GB"/>
+                    </a:p>
+                  </a:txBody>
+                  <a:tcPr/>
+                </a:tc>
+                <a:tc>
+                  <a:txBody>
+                    <a:bodyPr/>
+                    <a:lstStyle/>
+                    <a:p>
+                      <a:endParaRPr lang="en-GB"/>
+                    </a:p>
+                  </a:txBody>
+                  <a:tcPr/>
+                </a:tc>
+                <a:tc>
+                  <a:txBody>
+                    <a:bodyPr/>
+                    <a:lstStyle/>
+                    <a:p>
+                      <a:endParaRPr lang="en-GB"/>
+                    </a:p>
+                  </a:txBody>
+                  <a:tcPr/>
+                </a:tc>
+                <a:tc>
+                  <a:txBody>
+                    <a:bodyPr/>
+                    <a:lstStyle/>
+                    <a:p>
+                      <a:endParaRPr lang="en-GB"/>
+                    </a:p>
+                  </a:txBody>
+                  <a:tcPr/>
+                </a:tc>
+                <a:tc>
+                  <a:txBody>
+                    <a:bodyPr/>
+                    <a:lstStyle/>
+                    <a:p>
+                      <a:endParaRPr lang="en-GB"/>
+                    </a:p>
+                  </a:txBody>
+                  <a:tcPr/>
+                </a:tc>
+                <a:tc>
+                  <a:txBody>
+                    <a:bodyPr/>
+                    <a:lstStyle/>
+                    <a:p>
+                      <a:endParaRPr lang="en-GB"/>
+                    </a:p>
+                  </a:txBody>
+                  <a:tcPr/>
+                </a:tc>
+                <a:extLst>
+                  <a:ext uri="{0D108BD9-81ED-4DB2-BD59-A6C34878D82A}">
+                    <a16:rowId xmlns:a16="http://schemas.microsoft.com/office/drawing/2014/main" val="2037017143"/>
+                  </a:ext>
+                </a:extLst>
+              </a:tr>
+              <a:tr h="370840">
+                <a:tc>
+                  <a:txBody>
+                    <a:bodyPr/>
+                    <a:lstStyle/>
+                    <a:p>
+                      <a:r>
+                        <a:rPr lang="en-GB"/>
+                        <a:t>User 13</a:t>
+                      </a:r>
+                    </a:p>
+                  </a:txBody>
+                  <a:tcPr/>
+                </a:tc>
+                <a:tc>
+                  <a:txBody>
+                    <a:bodyPr/>
+                    <a:lstStyle/>
+                    <a:p>
+                      <a:endParaRPr lang="en-GB"/>
+                    </a:p>
+                  </a:txBody>
+                  <a:tcPr/>
+                </a:tc>
+                <a:tc>
+                  <a:txBody>
+                    <a:bodyPr/>
+                    <a:lstStyle/>
+                    <a:p>
+                      <a:endParaRPr lang="en-GB"/>
+                    </a:p>
+                  </a:txBody>
+                  <a:tcPr/>
+                </a:tc>
+                <a:tc>
+                  <a:txBody>
+                    <a:bodyPr/>
+                    <a:lstStyle/>
+                    <a:p>
+                      <a:endParaRPr lang="en-GB"/>
+                    </a:p>
+                  </a:txBody>
+                  <a:tcPr/>
+                </a:tc>
+                <a:tc>
+                  <a:txBody>
+                    <a:bodyPr/>
+                    <a:lstStyle/>
+                    <a:p>
+                      <a:endParaRPr lang="en-GB"/>
+                    </a:p>
+                  </a:txBody>
+                  <a:tcPr/>
+                </a:tc>
+                <a:tc>
+                  <a:txBody>
+                    <a:bodyPr/>
+                    <a:lstStyle/>
+                    <a:p>
+                      <a:endParaRPr lang="en-GB"/>
+                    </a:p>
+                  </a:txBody>
+                  <a:tcPr/>
+                </a:tc>
+                <a:tc>
+                  <a:txBody>
+                    <a:bodyPr/>
+                    <a:lstStyle/>
+                    <a:p>
+                      <a:endParaRPr lang="en-GB"/>
+                    </a:p>
+                  </a:txBody>
+                  <a:tcPr/>
+                </a:tc>
+                <a:tc>
+                  <a:txBody>
+                    <a:bodyPr/>
+                    <a:lstStyle/>
+                    <a:p>
+                      <a:endParaRPr lang="en-GB"/>
+                    </a:p>
+                  </a:txBody>
+                  <a:tcPr/>
+                </a:tc>
+                <a:extLst>
+                  <a:ext uri="{0D108BD9-81ED-4DB2-BD59-A6C34878D82A}">
+                    <a16:rowId xmlns:a16="http://schemas.microsoft.com/office/drawing/2014/main" val="3740000683"/>
+                  </a:ext>
+                </a:extLst>
+              </a:tr>
+              <a:tr h="370840">
+                <a:tc>
+                  <a:txBody>
+                    <a:bodyPr/>
+                    <a:lstStyle/>
+                    <a:p>
+                      <a:r>
+                        <a:rPr lang="en-GB"/>
+                        <a:t>User 14</a:t>
+                      </a:r>
+                    </a:p>
+                  </a:txBody>
+                  <a:tcPr/>
+                </a:tc>
+                <a:tc>
+                  <a:txBody>
+                    <a:bodyPr/>
+                    <a:lstStyle/>
+                    <a:p>
+                      <a:endParaRPr lang="en-GB"/>
+                    </a:p>
+                  </a:txBody>
+                  <a:tcPr/>
+                </a:tc>
+                <a:tc>
+                  <a:txBody>
+                    <a:bodyPr/>
+                    <a:lstStyle/>
+                    <a:p>
+                      <a:endParaRPr lang="en-GB"/>
+                    </a:p>
+                  </a:txBody>
+                  <a:tcPr/>
+                </a:tc>
+                <a:tc>
+                  <a:txBody>
+                    <a:bodyPr/>
+                    <a:lstStyle/>
+                    <a:p>
+                      <a:endParaRPr lang="en-GB"/>
+                    </a:p>
+                  </a:txBody>
+                  <a:tcPr/>
+                </a:tc>
+                <a:tc>
+                  <a:txBody>
+                    <a:bodyPr/>
+                    <a:lstStyle/>
+                    <a:p>
+                      <a:endParaRPr lang="en-GB"/>
+                    </a:p>
+                  </a:txBody>
+                  <a:tcPr/>
+                </a:tc>
+                <a:tc>
+                  <a:txBody>
+                    <a:bodyPr/>
+                    <a:lstStyle/>
+                    <a:p>
+                      <a:endParaRPr lang="en-GB"/>
+                    </a:p>
+                  </a:txBody>
+                  <a:tcPr/>
+                </a:tc>
+                <a:tc>
+                  <a:txBody>
+                    <a:bodyPr/>
+                    <a:lstStyle/>
+                    <a:p>
+                      <a:endParaRPr lang="en-GB"/>
+                    </a:p>
+                  </a:txBody>
+                  <a:tcPr/>
+                </a:tc>
+                <a:tc>
+                  <a:txBody>
+                    <a:bodyPr/>
+                    <a:lstStyle/>
+                    <a:p>
+                      <a:endParaRPr lang="en-GB"/>
+                    </a:p>
+                  </a:txBody>
+                  <a:tcPr/>
+                </a:tc>
+                <a:extLst>
+                  <a:ext uri="{0D108BD9-81ED-4DB2-BD59-A6C34878D82A}">
+                    <a16:rowId xmlns:a16="http://schemas.microsoft.com/office/drawing/2014/main" val="2586442214"/>
+                  </a:ext>
+                </a:extLst>
+              </a:tr>
+              <a:tr h="370840">
+                <a:tc>
+                  <a:txBody>
+                    <a:bodyPr/>
+                    <a:lstStyle/>
+                    <a:p>
+                      <a:r>
+                        <a:rPr lang="en-GB"/>
+                        <a:t>User 15</a:t>
+                      </a:r>
+                    </a:p>
+                  </a:txBody>
+                  <a:tcPr/>
+                </a:tc>
+                <a:tc>
+                  <a:txBody>
+                    <a:bodyPr/>
+                    <a:lstStyle/>
+                    <a:p>
+                      <a:endParaRPr lang="en-GB"/>
+                    </a:p>
+                  </a:txBody>
+                  <a:tcPr/>
+                </a:tc>
+                <a:tc>
+                  <a:txBody>
+                    <a:bodyPr/>
+                    <a:lstStyle/>
+                    <a:p>
+                      <a:endParaRPr lang="en-GB"/>
+                    </a:p>
+                  </a:txBody>
+                  <a:tcPr/>
+                </a:tc>
+                <a:tc>
+                  <a:txBody>
+                    <a:bodyPr/>
+                    <a:lstStyle/>
+                    <a:p>
+                      <a:endParaRPr lang="en-GB"/>
+                    </a:p>
+                  </a:txBody>
+                  <a:tcPr/>
+                </a:tc>
+                <a:tc>
+                  <a:txBody>
+                    <a:bodyPr/>
+                    <a:lstStyle/>
+                    <a:p>
+                      <a:endParaRPr lang="en-GB"/>
+                    </a:p>
+                  </a:txBody>
+                  <a:tcPr/>
+                </a:tc>
+                <a:tc>
+                  <a:txBody>
+                    <a:bodyPr/>
+                    <a:lstStyle/>
+                    <a:p>
+                      <a:endParaRPr lang="en-GB"/>
+                    </a:p>
+                  </a:txBody>
+                  <a:tcPr/>
+                </a:tc>
+                <a:tc>
+                  <a:txBody>
+                    <a:bodyPr/>
+                    <a:lstStyle/>
+                    <a:p>
+                      <a:endParaRPr lang="en-GB"/>
+                    </a:p>
+                  </a:txBody>
+                  <a:tcPr/>
+                </a:tc>
+                <a:tc>
+                  <a:txBody>
+                    <a:bodyPr/>
+                    <a:lstStyle/>
+                    <a:p>
+                      <a:endParaRPr lang="en-GB"/>
+                    </a:p>
+                  </a:txBody>
+                  <a:tcPr/>
+                </a:tc>
+                <a:extLst>
+                  <a:ext uri="{0D108BD9-81ED-4DB2-BD59-A6C34878D82A}">
+                    <a16:rowId xmlns:a16="http://schemas.microsoft.com/office/drawing/2014/main" val="3608927314"/>
+                  </a:ext>
+                </a:extLst>
+              </a:tr>
+              <a:tr h="370840">
+                <a:tc>
+                  <a:txBody>
+                    <a:bodyPr/>
+                    <a:lstStyle/>
+                    <a:p>
+                      <a:r>
+                        <a:rPr lang="en-GB"/>
+                        <a:t>User 16</a:t>
+                      </a:r>
+                    </a:p>
+                  </a:txBody>
+                  <a:tcPr/>
+                </a:tc>
+                <a:tc>
+                  <a:txBody>
+                    <a:bodyPr/>
+                    <a:lstStyle/>
+                    <a:p>
+                      <a:endParaRPr lang="en-GB"/>
+                    </a:p>
+                  </a:txBody>
+                  <a:tcPr/>
+                </a:tc>
+                <a:tc>
+                  <a:txBody>
+                    <a:bodyPr/>
+                    <a:lstStyle/>
+                    <a:p>
+                      <a:endParaRPr lang="en-GB"/>
+                    </a:p>
+                  </a:txBody>
+                  <a:tcPr/>
+                </a:tc>
+                <a:tc>
+                  <a:txBody>
+                    <a:bodyPr/>
+                    <a:lstStyle/>
+                    <a:p>
+                      <a:endParaRPr lang="en-GB"/>
+                    </a:p>
+                  </a:txBody>
+                  <a:tcPr/>
+                </a:tc>
+                <a:tc>
+                  <a:txBody>
+                    <a:bodyPr/>
+                    <a:lstStyle/>
+                    <a:p>
+                      <a:endParaRPr lang="en-GB"/>
+                    </a:p>
+                  </a:txBody>
+                  <a:tcPr/>
+                </a:tc>
+                <a:tc>
+                  <a:txBody>
+                    <a:bodyPr/>
+                    <a:lstStyle/>
+                    <a:p>
+                      <a:endParaRPr lang="en-GB"/>
+                    </a:p>
+                  </a:txBody>
+                  <a:tcPr/>
+                </a:tc>
+                <a:tc>
+                  <a:txBody>
+                    <a:bodyPr/>
+                    <a:lstStyle/>
+                    <a:p>
+                      <a:endParaRPr lang="en-GB"/>
+                    </a:p>
+                  </a:txBody>
+                  <a:tcPr/>
+                </a:tc>
+                <a:tc>
+                  <a:txBody>
+                    <a:bodyPr/>
+                    <a:lstStyle/>
+                    <a:p>
+                      <a:endParaRPr lang="en-GB"/>
+                    </a:p>
+                  </a:txBody>
+                  <a:tcPr/>
+                </a:tc>
+                <a:extLst>
+                  <a:ext uri="{0D108BD9-81ED-4DB2-BD59-A6C34878D82A}">
+                    <a16:rowId xmlns:a16="http://schemas.microsoft.com/office/drawing/2014/main" val="1508996561"/>
+                  </a:ext>
+                </a:extLst>
+              </a:tr>
+              <a:tr h="370840">
+                <a:tc>
+                  <a:txBody>
+                    <a:bodyPr/>
+                    <a:lstStyle/>
+                    <a:p>
+                      <a:r>
+                        <a:rPr lang="en-GB"/>
+                        <a:t>User 17</a:t>
+                      </a:r>
+                    </a:p>
+                  </a:txBody>
+                  <a:tcPr/>
+                </a:tc>
+                <a:tc>
+                  <a:txBody>
+                    <a:bodyPr/>
+                    <a:lstStyle/>
+                    <a:p>
+                      <a:endParaRPr lang="en-GB"/>
+                    </a:p>
+                  </a:txBody>
+                  <a:tcPr/>
+                </a:tc>
+                <a:tc>
+                  <a:txBody>
+                    <a:bodyPr/>
+                    <a:lstStyle/>
+                    <a:p>
+                      <a:endParaRPr lang="en-GB"/>
+                    </a:p>
+                  </a:txBody>
+                  <a:tcPr/>
+                </a:tc>
+                <a:tc>
+                  <a:txBody>
+                    <a:bodyPr/>
+                    <a:lstStyle/>
+                    <a:p>
+                      <a:endParaRPr lang="en-GB"/>
+                    </a:p>
+                  </a:txBody>
+                  <a:tcPr/>
+                </a:tc>
+                <a:tc>
+                  <a:txBody>
+                    <a:bodyPr/>
+                    <a:lstStyle/>
+                    <a:p>
+                      <a:endParaRPr lang="en-GB"/>
+                    </a:p>
+                  </a:txBody>
+                  <a:tcPr/>
+                </a:tc>
+                <a:tc>
+                  <a:txBody>
+                    <a:bodyPr/>
+                    <a:lstStyle/>
+                    <a:p>
+                      <a:endParaRPr lang="en-GB"/>
+                    </a:p>
+                  </a:txBody>
+                  <a:tcPr/>
+                </a:tc>
+                <a:tc>
+                  <a:txBody>
+                    <a:bodyPr/>
+                    <a:lstStyle/>
+                    <a:p>
+                      <a:endParaRPr lang="en-GB"/>
+                    </a:p>
+                  </a:txBody>
+                  <a:tcPr/>
+                </a:tc>
+                <a:tc>
+                  <a:txBody>
+                    <a:bodyPr/>
+                    <a:lstStyle/>
+                    <a:p>
+                      <a:endParaRPr lang="en-GB"/>
+                    </a:p>
+                  </a:txBody>
+                  <a:tcPr/>
+                </a:tc>
+                <a:extLst>
+                  <a:ext uri="{0D108BD9-81ED-4DB2-BD59-A6C34878D82A}">
+                    <a16:rowId xmlns:a16="http://schemas.microsoft.com/office/drawing/2014/main" val="2070393773"/>
+                  </a:ext>
+                </a:extLst>
+              </a:tr>
+              <a:tr h="370840">
+                <a:tc>
+                  <a:txBody>
+                    <a:bodyPr/>
+                    <a:lstStyle/>
+                    <a:p>
+                      <a:r>
+                        <a:rPr lang="en-GB"/>
+                        <a:t>User 18</a:t>
+                      </a:r>
+                    </a:p>
+                  </a:txBody>
+                  <a:tcPr/>
+                </a:tc>
+                <a:tc>
+                  <a:txBody>
+                    <a:bodyPr/>
+                    <a:lstStyle/>
+                    <a:p>
+                      <a:endParaRPr lang="en-GB"/>
+                    </a:p>
+                  </a:txBody>
+                  <a:tcPr/>
+                </a:tc>
+                <a:tc>
+                  <a:txBody>
+                    <a:bodyPr/>
+                    <a:lstStyle/>
+                    <a:p>
+                      <a:endParaRPr lang="en-GB"/>
+                    </a:p>
+                  </a:txBody>
+                  <a:tcPr/>
+                </a:tc>
+                <a:tc>
+                  <a:txBody>
+                    <a:bodyPr/>
+                    <a:lstStyle/>
+                    <a:p>
+                      <a:endParaRPr lang="en-GB"/>
+                    </a:p>
+                  </a:txBody>
+                  <a:tcPr/>
+                </a:tc>
+                <a:tc>
+                  <a:txBody>
+                    <a:bodyPr/>
+                    <a:lstStyle/>
+                    <a:p>
+                      <a:endParaRPr lang="en-GB"/>
+                    </a:p>
+                  </a:txBody>
+                  <a:tcPr/>
+                </a:tc>
+                <a:tc>
+                  <a:txBody>
+                    <a:bodyPr/>
+                    <a:lstStyle/>
+                    <a:p>
+                      <a:endParaRPr lang="en-GB"/>
+                    </a:p>
+                  </a:txBody>
+                  <a:tcPr/>
+                </a:tc>
+                <a:tc>
+                  <a:txBody>
+                    <a:bodyPr/>
+                    <a:lstStyle/>
+                    <a:p>
+                      <a:endParaRPr lang="en-GB"/>
+                    </a:p>
+                  </a:txBody>
+                  <a:tcPr/>
+                </a:tc>
+                <a:tc>
+                  <a:txBody>
+                    <a:bodyPr/>
+                    <a:lstStyle/>
+                    <a:p>
+                      <a:endParaRPr lang="en-GB"/>
+                    </a:p>
+                  </a:txBody>
+                  <a:tcPr/>
+                </a:tc>
+                <a:extLst>
+                  <a:ext uri="{0D108BD9-81ED-4DB2-BD59-A6C34878D82A}">
+                    <a16:rowId xmlns:a16="http://schemas.microsoft.com/office/drawing/2014/main" val="2715442696"/>
+                  </a:ext>
+                </a:extLst>
+              </a:tr>
+            </a:tbl>
+          </a:graphicData>
+        </a:graphic>
+      </p:graphicFrame>
+    </p:spTree>
+    <p:extLst>
+      <p:ext uri="{BB962C8B-B14F-4D97-AF65-F5344CB8AC3E}">
+        <p14:creationId xmlns:p14="http://schemas.microsoft.com/office/powerpoint/2010/main" val="2771335001"/>
       </p:ext>
     </p:extLst>
   </p:cSld>
